--- a/docs/exec_manual/Execucao-Manual-Verzel-Store (API).pptx
+++ b/docs/exec_manual/Execucao-Manual-Verzel-Store (API).pptx
@@ -64,7 +64,6 @@
     <p:sldId id="306" r:id="rId57"/>
     <p:sldId id="307" r:id="rId58"/>
     <p:sldId id="308" r:id="rId59"/>
-    <p:sldId id="309" r:id="rId60"/>
   </p:sldIdLst>
   <p:sldSz cx="12192000" cy="6858000"/>
   <p:notesSz cx="6858000" cy="12192000"/>
@@ -124,7 +123,7 @@
                 </a:solidFill>
                 <a:latin typeface="Arial"/>
               </a:rPr>
-              <a:t>Cliqu</a:t>
+              <a:t>Clique para </a:t>
             </a:r>
             <a:r>
               <a:rPr b="0" lang="pt-BR" sz="4400" spc="-1" strike="noStrike">
@@ -133,34 +132,7 @@
                 </a:solidFill>
                 <a:latin typeface="Arial"/>
               </a:rPr>
-              <a:t>e </a:t>
-            </a:r>
-            <a:r>
-              <a:rPr b="0" lang="pt-BR" sz="4400" spc="-1" strike="noStrike">
-                <a:solidFill>
-                  <a:srgbClr val="000000"/>
-                </a:solidFill>
-                <a:latin typeface="Arial"/>
-              </a:rPr>
-              <a:t>para </a:t>
-            </a:r>
-            <a:r>
-              <a:rPr b="0" lang="pt-BR" sz="4400" spc="-1" strike="noStrike">
-                <a:solidFill>
-                  <a:srgbClr val="000000"/>
-                </a:solidFill>
-                <a:latin typeface="Arial"/>
-              </a:rPr>
-              <a:t>move</a:t>
-            </a:r>
-            <a:r>
-              <a:rPr b="0" lang="pt-BR" sz="4400" spc="-1" strike="noStrike">
-                <a:solidFill>
-                  <a:srgbClr val="000000"/>
-                </a:solidFill>
-                <a:latin typeface="Arial"/>
-              </a:rPr>
-              <a:t>r o </a:t>
+              <a:t>mover o </a:t>
             </a:r>
             <a:r>
               <a:rPr b="0" lang="pt-BR" sz="4400" spc="-1" strike="noStrike">
@@ -218,7 +190,7 @@
                 </a:solidFill>
                 <a:latin typeface="Arial"/>
               </a:rPr>
-              <a:t>Clique </a:t>
+              <a:t>Clique para editar o </a:t>
             </a:r>
             <a:r>
               <a:rPr b="0" lang="pt-BR" sz="2000" spc="-1" strike="noStrike">
@@ -227,52 +199,7 @@
                 </a:solidFill>
                 <a:latin typeface="Arial"/>
               </a:rPr>
-              <a:t>para </a:t>
-            </a:r>
-            <a:r>
-              <a:rPr b="0" lang="pt-BR" sz="2000" spc="-1" strike="noStrike">
-                <a:solidFill>
-                  <a:srgbClr val="000000"/>
-                </a:solidFill>
-                <a:latin typeface="Arial"/>
-              </a:rPr>
-              <a:t>editar </a:t>
-            </a:r>
-            <a:r>
-              <a:rPr b="0" lang="pt-BR" sz="2000" spc="-1" strike="noStrike">
-                <a:solidFill>
-                  <a:srgbClr val="000000"/>
-                </a:solidFill>
-                <a:latin typeface="Arial"/>
-              </a:rPr>
-              <a:t>o </a:t>
-            </a:r>
-            <a:r>
-              <a:rPr b="0" lang="pt-BR" sz="2000" spc="-1" strike="noStrike">
-                <a:solidFill>
-                  <a:srgbClr val="000000"/>
-                </a:solidFill>
-                <a:latin typeface="Arial"/>
-              </a:rPr>
-              <a:t>forma</a:t>
-            </a:r>
-            <a:r>
-              <a:rPr b="0" lang="pt-BR" sz="2000" spc="-1" strike="noStrike">
-                <a:solidFill>
-                  <a:srgbClr val="000000"/>
-                </a:solidFill>
-                <a:latin typeface="Arial"/>
-              </a:rPr>
-              <a:t>to de </a:t>
-            </a:r>
-            <a:r>
-              <a:rPr b="0" lang="pt-BR" sz="2000" spc="-1" strike="noStrike">
-                <a:solidFill>
-                  <a:srgbClr val="000000"/>
-                </a:solidFill>
-                <a:latin typeface="Arial"/>
-              </a:rPr>
-              <a:t>notas</a:t>
+              <a:t>formato de notas</a:t>
             </a:r>
             <a:endParaRPr b="0" lang="pt-BR" sz="2000" spc="-1" strike="noStrike">
               <a:solidFill>
@@ -494,7 +421,7 @@
             <a:pPr indent="0" algn="r">
               <a:buNone/>
             </a:pPr>
-            <a:fld id="{7579DD05-5F43-4E53-ADE4-AF103623AFAB}" type="slidenum">
+            <a:fld id="{DB5866BA-4FE1-4BFB-86E2-4854583A253B}" type="slidenum">
               <a:rPr b="0" lang="pt-BR" sz="1400" spc="-1" strike="noStrike">
                 <a:solidFill>
                   <a:srgbClr val="000000"/>
@@ -537,7 +464,7 @@
       </p:grpSpPr>
       <p:sp>
         <p:nvSpPr>
-          <p:cNvPr id="512" name="PlaceHolder 1"/>
+          <p:cNvPr id="506" name="PlaceHolder 1"/>
           <p:cNvSpPr>
             <a:spLocks noGrp="1"/>
           </p:cNvSpPr>
@@ -560,7 +487,7 @@
       </p:sp>
       <p:sp>
         <p:nvSpPr>
-          <p:cNvPr id="513" name="PlaceHolder 2"/>
+          <p:cNvPr id="507" name="PlaceHolder 2"/>
           <p:cNvSpPr>
             <a:spLocks noGrp="1"/>
           </p:cNvSpPr>
@@ -600,12 +527,12 @@
       </p:sp>
       <p:sp>
         <p:nvSpPr>
-          <p:cNvPr id="514" name="PlaceHolder 3"/>
+          <p:cNvPr id="508" name="PlaceHolder 3"/>
           <p:cNvSpPr>
             <a:spLocks noGrp="1"/>
           </p:cNvSpPr>
           <p:nvPr>
-            <p:ph type="sldNum" idx="59"/>
+            <p:ph type="sldNum" idx="58"/>
           </p:nvPr>
         </p:nvSpPr>
         <p:spPr>
@@ -653,7 +580,7 @@
                 <a:tab algn="l" pos="0"/>
               </a:tabLst>
             </a:pPr>
-            <a:fld id="{2DE83B8B-98BB-40DA-8E49-1C081A3D171C}" type="slidenum">
+            <a:fld id="{4E8A1378-9BB9-4C55-B26A-A64ACC9FBCDB}" type="slidenum">
               <a:rPr b="0" lang="en-US" sz="1200" spc="-1" strike="noStrike">
                 <a:solidFill>
                   <a:schemeClr val="dk1"/>
@@ -696,7 +623,7 @@
       </p:grpSpPr>
       <p:sp>
         <p:nvSpPr>
-          <p:cNvPr id="539" name="PlaceHolder 1"/>
+          <p:cNvPr id="533" name="PlaceHolder 1"/>
           <p:cNvSpPr>
             <a:spLocks noGrp="1"/>
           </p:cNvSpPr>
@@ -719,7 +646,7 @@
       </p:sp>
       <p:sp>
         <p:nvSpPr>
-          <p:cNvPr id="540" name="PlaceHolder 2"/>
+          <p:cNvPr id="534" name="PlaceHolder 2"/>
           <p:cNvSpPr>
             <a:spLocks noGrp="1"/>
           </p:cNvSpPr>
@@ -759,12 +686,12 @@
       </p:sp>
       <p:sp>
         <p:nvSpPr>
-          <p:cNvPr id="541" name="PlaceHolder 3"/>
+          <p:cNvPr id="535" name="PlaceHolder 3"/>
           <p:cNvSpPr>
             <a:spLocks noGrp="1"/>
           </p:cNvSpPr>
           <p:nvPr>
-            <p:ph type="sldNum" idx="68"/>
+            <p:ph type="sldNum" idx="67"/>
           </p:nvPr>
         </p:nvSpPr>
         <p:spPr>
@@ -812,7 +739,7 @@
                 <a:tab algn="l" pos="0"/>
               </a:tabLst>
             </a:pPr>
-            <a:fld id="{7D4D24D9-D5D3-4757-B072-3E514779861B}" type="slidenum">
+            <a:fld id="{7185BE4E-F436-4346-A63D-5409EF827BFF}" type="slidenum">
               <a:rPr b="0" lang="en-US" sz="1200" spc="-1" strike="noStrike">
                 <a:solidFill>
                   <a:schemeClr val="dk1"/>
@@ -855,7 +782,7 @@
       </p:grpSpPr>
       <p:sp>
         <p:nvSpPr>
-          <p:cNvPr id="542" name="PlaceHolder 1"/>
+          <p:cNvPr id="536" name="PlaceHolder 1"/>
           <p:cNvSpPr>
             <a:spLocks noGrp="1"/>
           </p:cNvSpPr>
@@ -878,7 +805,7 @@
       </p:sp>
       <p:sp>
         <p:nvSpPr>
-          <p:cNvPr id="543" name="PlaceHolder 2"/>
+          <p:cNvPr id="537" name="PlaceHolder 2"/>
           <p:cNvSpPr>
             <a:spLocks noGrp="1"/>
           </p:cNvSpPr>
@@ -918,12 +845,12 @@
       </p:sp>
       <p:sp>
         <p:nvSpPr>
-          <p:cNvPr id="544" name="PlaceHolder 3"/>
+          <p:cNvPr id="538" name="PlaceHolder 3"/>
           <p:cNvSpPr>
             <a:spLocks noGrp="1"/>
           </p:cNvSpPr>
           <p:nvPr>
-            <p:ph type="sldNum" idx="69"/>
+            <p:ph type="sldNum" idx="68"/>
           </p:nvPr>
         </p:nvSpPr>
         <p:spPr>
@@ -971,7 +898,7 @@
                 <a:tab algn="l" pos="0"/>
               </a:tabLst>
             </a:pPr>
-            <a:fld id="{5A334C26-0FB8-45CC-935F-607730942692}" type="slidenum">
+            <a:fld id="{37BBF21D-2EB5-471A-A16F-86314C814096}" type="slidenum">
               <a:rPr b="0" lang="en-US" sz="1200" spc="-1" strike="noStrike">
                 <a:solidFill>
                   <a:schemeClr val="dk1"/>
@@ -1014,7 +941,7 @@
       </p:grpSpPr>
       <p:sp>
         <p:nvSpPr>
-          <p:cNvPr id="545" name="PlaceHolder 1"/>
+          <p:cNvPr id="539" name="PlaceHolder 1"/>
           <p:cNvSpPr>
             <a:spLocks noGrp="1"/>
           </p:cNvSpPr>
@@ -1037,7 +964,7 @@
       </p:sp>
       <p:sp>
         <p:nvSpPr>
-          <p:cNvPr id="546" name="PlaceHolder 2"/>
+          <p:cNvPr id="540" name="PlaceHolder 2"/>
           <p:cNvSpPr>
             <a:spLocks noGrp="1"/>
           </p:cNvSpPr>
@@ -1077,12 +1004,12 @@
       </p:sp>
       <p:sp>
         <p:nvSpPr>
-          <p:cNvPr id="547" name="PlaceHolder 3"/>
+          <p:cNvPr id="541" name="PlaceHolder 3"/>
           <p:cNvSpPr>
             <a:spLocks noGrp="1"/>
           </p:cNvSpPr>
           <p:nvPr>
-            <p:ph type="sldNum" idx="70"/>
+            <p:ph type="sldNum" idx="69"/>
           </p:nvPr>
         </p:nvSpPr>
         <p:spPr>
@@ -1130,7 +1057,7 @@
                 <a:tab algn="l" pos="0"/>
               </a:tabLst>
             </a:pPr>
-            <a:fld id="{A310E70B-D972-4AA3-9CEC-139AB52C5E7B}" type="slidenum">
+            <a:fld id="{B3D7D823-88B3-4EE0-BC56-BC280ED11B24}" type="slidenum">
               <a:rPr b="0" lang="en-US" sz="1200" spc="-1" strike="noStrike">
                 <a:solidFill>
                   <a:schemeClr val="dk1"/>
@@ -1173,7 +1100,7 @@
       </p:grpSpPr>
       <p:sp>
         <p:nvSpPr>
-          <p:cNvPr id="548" name="PlaceHolder 1"/>
+          <p:cNvPr id="542" name="PlaceHolder 1"/>
           <p:cNvSpPr>
             <a:spLocks noGrp="1"/>
           </p:cNvSpPr>
@@ -1196,7 +1123,7 @@
       </p:sp>
       <p:sp>
         <p:nvSpPr>
-          <p:cNvPr id="549" name="PlaceHolder 2"/>
+          <p:cNvPr id="543" name="PlaceHolder 2"/>
           <p:cNvSpPr>
             <a:spLocks noGrp="1"/>
           </p:cNvSpPr>
@@ -1236,12 +1163,12 @@
       </p:sp>
       <p:sp>
         <p:nvSpPr>
-          <p:cNvPr id="550" name="PlaceHolder 3"/>
+          <p:cNvPr id="544" name="PlaceHolder 3"/>
           <p:cNvSpPr>
             <a:spLocks noGrp="1"/>
           </p:cNvSpPr>
           <p:nvPr>
-            <p:ph type="sldNum" idx="71"/>
+            <p:ph type="sldNum" idx="70"/>
           </p:nvPr>
         </p:nvSpPr>
         <p:spPr>
@@ -1289,7 +1216,7 @@
                 <a:tab algn="l" pos="0"/>
               </a:tabLst>
             </a:pPr>
-            <a:fld id="{B2B46FB4-8A63-49B6-AF8F-FA0E10A14780}" type="slidenum">
+            <a:fld id="{84D9262B-ABAE-4433-B97E-FFE7B6F42C6C}" type="slidenum">
               <a:rPr b="0" lang="en-US" sz="1200" spc="-1" strike="noStrike">
                 <a:solidFill>
                   <a:schemeClr val="dk1"/>
@@ -1332,7 +1259,7 @@
       </p:grpSpPr>
       <p:sp>
         <p:nvSpPr>
-          <p:cNvPr id="551" name="PlaceHolder 1"/>
+          <p:cNvPr id="545" name="PlaceHolder 1"/>
           <p:cNvSpPr>
             <a:spLocks noGrp="1"/>
           </p:cNvSpPr>
@@ -1355,7 +1282,7 @@
       </p:sp>
       <p:sp>
         <p:nvSpPr>
-          <p:cNvPr id="552" name="PlaceHolder 2"/>
+          <p:cNvPr id="546" name="PlaceHolder 2"/>
           <p:cNvSpPr>
             <a:spLocks noGrp="1"/>
           </p:cNvSpPr>
@@ -1395,12 +1322,12 @@
       </p:sp>
       <p:sp>
         <p:nvSpPr>
-          <p:cNvPr id="553" name="PlaceHolder 3"/>
+          <p:cNvPr id="547" name="PlaceHolder 3"/>
           <p:cNvSpPr>
             <a:spLocks noGrp="1"/>
           </p:cNvSpPr>
           <p:nvPr>
-            <p:ph type="sldNum" idx="72"/>
+            <p:ph type="sldNum" idx="71"/>
           </p:nvPr>
         </p:nvSpPr>
         <p:spPr>
@@ -1448,7 +1375,7 @@
                 <a:tab algn="l" pos="0"/>
               </a:tabLst>
             </a:pPr>
-            <a:fld id="{94A71F46-2F72-4CF9-8A92-2AA160A6023E}" type="slidenum">
+            <a:fld id="{0894F28C-00C2-4507-8414-558AF3C3B461}" type="slidenum">
               <a:rPr b="0" lang="en-US" sz="1200" spc="-1" strike="noStrike">
                 <a:solidFill>
                   <a:schemeClr val="dk1"/>
@@ -1491,7 +1418,7 @@
       </p:grpSpPr>
       <p:sp>
         <p:nvSpPr>
-          <p:cNvPr id="554" name="PlaceHolder 1"/>
+          <p:cNvPr id="548" name="PlaceHolder 1"/>
           <p:cNvSpPr>
             <a:spLocks noGrp="1"/>
           </p:cNvSpPr>
@@ -1514,7 +1441,7 @@
       </p:sp>
       <p:sp>
         <p:nvSpPr>
-          <p:cNvPr id="555" name="PlaceHolder 2"/>
+          <p:cNvPr id="549" name="PlaceHolder 2"/>
           <p:cNvSpPr>
             <a:spLocks noGrp="1"/>
           </p:cNvSpPr>
@@ -1554,12 +1481,12 @@
       </p:sp>
       <p:sp>
         <p:nvSpPr>
-          <p:cNvPr id="556" name="PlaceHolder 3"/>
+          <p:cNvPr id="550" name="PlaceHolder 3"/>
           <p:cNvSpPr>
             <a:spLocks noGrp="1"/>
           </p:cNvSpPr>
           <p:nvPr>
-            <p:ph type="sldNum" idx="73"/>
+            <p:ph type="sldNum" idx="72"/>
           </p:nvPr>
         </p:nvSpPr>
         <p:spPr>
@@ -1607,7 +1534,7 @@
                 <a:tab algn="l" pos="0"/>
               </a:tabLst>
             </a:pPr>
-            <a:fld id="{0645680F-37E6-4BF7-A482-72C64AA093ED}" type="slidenum">
+            <a:fld id="{F648FDE7-328F-48E1-80D9-972235ADE551}" type="slidenum">
               <a:rPr b="0" lang="en-US" sz="1200" spc="-1" strike="noStrike">
                 <a:solidFill>
                   <a:schemeClr val="dk1"/>
@@ -1650,7 +1577,7 @@
       </p:grpSpPr>
       <p:sp>
         <p:nvSpPr>
-          <p:cNvPr id="557" name="PlaceHolder 1"/>
+          <p:cNvPr id="551" name="PlaceHolder 1"/>
           <p:cNvSpPr>
             <a:spLocks noGrp="1"/>
           </p:cNvSpPr>
@@ -1673,7 +1600,7 @@
       </p:sp>
       <p:sp>
         <p:nvSpPr>
-          <p:cNvPr id="558" name="PlaceHolder 2"/>
+          <p:cNvPr id="552" name="PlaceHolder 2"/>
           <p:cNvSpPr>
             <a:spLocks noGrp="1"/>
           </p:cNvSpPr>
@@ -1713,12 +1640,12 @@
       </p:sp>
       <p:sp>
         <p:nvSpPr>
-          <p:cNvPr id="559" name="PlaceHolder 3"/>
+          <p:cNvPr id="553" name="PlaceHolder 3"/>
           <p:cNvSpPr>
             <a:spLocks noGrp="1"/>
           </p:cNvSpPr>
           <p:nvPr>
-            <p:ph type="sldNum" idx="74"/>
+            <p:ph type="sldNum" idx="73"/>
           </p:nvPr>
         </p:nvSpPr>
         <p:spPr>
@@ -1766,7 +1693,7 @@
                 <a:tab algn="l" pos="0"/>
               </a:tabLst>
             </a:pPr>
-            <a:fld id="{C31C7043-0B9E-4E87-BF59-E087E72A6675}" type="slidenum">
+            <a:fld id="{FD655612-0F18-4AD9-8A81-554F159E88E5}" type="slidenum">
               <a:rPr b="0" lang="en-US" sz="1200" spc="-1" strike="noStrike">
                 <a:solidFill>
                   <a:schemeClr val="dk1"/>
@@ -1809,7 +1736,7 @@
       </p:grpSpPr>
       <p:sp>
         <p:nvSpPr>
-          <p:cNvPr id="560" name="PlaceHolder 1"/>
+          <p:cNvPr id="554" name="PlaceHolder 1"/>
           <p:cNvSpPr>
             <a:spLocks noGrp="1"/>
           </p:cNvSpPr>
@@ -1832,7 +1759,7 @@
       </p:sp>
       <p:sp>
         <p:nvSpPr>
-          <p:cNvPr id="561" name="PlaceHolder 2"/>
+          <p:cNvPr id="555" name="PlaceHolder 2"/>
           <p:cNvSpPr>
             <a:spLocks noGrp="1"/>
           </p:cNvSpPr>
@@ -1872,12 +1799,12 @@
       </p:sp>
       <p:sp>
         <p:nvSpPr>
-          <p:cNvPr id="562" name="PlaceHolder 3"/>
+          <p:cNvPr id="556" name="PlaceHolder 3"/>
           <p:cNvSpPr>
             <a:spLocks noGrp="1"/>
           </p:cNvSpPr>
           <p:nvPr>
-            <p:ph type="sldNum" idx="75"/>
+            <p:ph type="sldNum" idx="74"/>
           </p:nvPr>
         </p:nvSpPr>
         <p:spPr>
@@ -1925,7 +1852,7 @@
                 <a:tab algn="l" pos="0"/>
               </a:tabLst>
             </a:pPr>
-            <a:fld id="{824DD09D-51CA-4B2C-A328-5A1B80355C14}" type="slidenum">
+            <a:fld id="{EB09C776-ACEA-4DBC-A34A-6B77218A92AD}" type="slidenum">
               <a:rPr b="0" lang="en-US" sz="1200" spc="-1" strike="noStrike">
                 <a:solidFill>
                   <a:schemeClr val="dk1"/>
@@ -1968,7 +1895,7 @@
       </p:grpSpPr>
       <p:sp>
         <p:nvSpPr>
-          <p:cNvPr id="563" name="PlaceHolder 1"/>
+          <p:cNvPr id="557" name="PlaceHolder 1"/>
           <p:cNvSpPr>
             <a:spLocks noGrp="1"/>
           </p:cNvSpPr>
@@ -1991,7 +1918,7 @@
       </p:sp>
       <p:sp>
         <p:nvSpPr>
-          <p:cNvPr id="564" name="PlaceHolder 2"/>
+          <p:cNvPr id="558" name="PlaceHolder 2"/>
           <p:cNvSpPr>
             <a:spLocks noGrp="1"/>
           </p:cNvSpPr>
@@ -2031,12 +1958,12 @@
       </p:sp>
       <p:sp>
         <p:nvSpPr>
-          <p:cNvPr id="565" name="PlaceHolder 3"/>
+          <p:cNvPr id="559" name="PlaceHolder 3"/>
           <p:cNvSpPr>
             <a:spLocks noGrp="1"/>
           </p:cNvSpPr>
           <p:nvPr>
-            <p:ph type="sldNum" idx="76"/>
+            <p:ph type="sldNum" idx="75"/>
           </p:nvPr>
         </p:nvSpPr>
         <p:spPr>
@@ -2084,7 +2011,7 @@
                 <a:tab algn="l" pos="0"/>
               </a:tabLst>
             </a:pPr>
-            <a:fld id="{70611B33-B3AF-4DD7-BCDD-E09F246996C3}" type="slidenum">
+            <a:fld id="{FAECE6E9-0BFB-4477-930B-3B01F2175255}" type="slidenum">
               <a:rPr b="0" lang="en-US" sz="1200" spc="-1" strike="noStrike">
                 <a:solidFill>
                   <a:schemeClr val="dk1"/>
@@ -2127,7 +2054,7 @@
       </p:grpSpPr>
       <p:sp>
         <p:nvSpPr>
-          <p:cNvPr id="566" name="PlaceHolder 1"/>
+          <p:cNvPr id="560" name="PlaceHolder 1"/>
           <p:cNvSpPr>
             <a:spLocks noGrp="1"/>
           </p:cNvSpPr>
@@ -2150,7 +2077,7 @@
       </p:sp>
       <p:sp>
         <p:nvSpPr>
-          <p:cNvPr id="567" name="PlaceHolder 2"/>
+          <p:cNvPr id="561" name="PlaceHolder 2"/>
           <p:cNvSpPr>
             <a:spLocks noGrp="1"/>
           </p:cNvSpPr>
@@ -2190,12 +2117,12 @@
       </p:sp>
       <p:sp>
         <p:nvSpPr>
-          <p:cNvPr id="568" name="PlaceHolder 3"/>
+          <p:cNvPr id="562" name="PlaceHolder 3"/>
           <p:cNvSpPr>
             <a:spLocks noGrp="1"/>
           </p:cNvSpPr>
           <p:nvPr>
-            <p:ph type="sldNum" idx="77"/>
+            <p:ph type="sldNum" idx="76"/>
           </p:nvPr>
         </p:nvSpPr>
         <p:spPr>
@@ -2243,7 +2170,7 @@
                 <a:tab algn="l" pos="0"/>
               </a:tabLst>
             </a:pPr>
-            <a:fld id="{8ED2E6CB-B0E1-431E-92FA-70A56DD24D5A}" type="slidenum">
+            <a:fld id="{A7221EE5-326B-4DFA-9AAE-CDE92393C7FF}" type="slidenum">
               <a:rPr b="0" lang="en-US" sz="1200" spc="-1" strike="noStrike">
                 <a:solidFill>
                   <a:schemeClr val="dk1"/>
@@ -2286,7 +2213,7 @@
       </p:grpSpPr>
       <p:sp>
         <p:nvSpPr>
-          <p:cNvPr id="515" name="PlaceHolder 1"/>
+          <p:cNvPr id="509" name="PlaceHolder 1"/>
           <p:cNvSpPr>
             <a:spLocks noGrp="1"/>
           </p:cNvSpPr>
@@ -2309,7 +2236,7 @@
       </p:sp>
       <p:sp>
         <p:nvSpPr>
-          <p:cNvPr id="516" name="PlaceHolder 2"/>
+          <p:cNvPr id="510" name="PlaceHolder 2"/>
           <p:cNvSpPr>
             <a:spLocks noGrp="1"/>
           </p:cNvSpPr>
@@ -2349,12 +2276,12 @@
       </p:sp>
       <p:sp>
         <p:nvSpPr>
-          <p:cNvPr id="517" name="PlaceHolder 3"/>
+          <p:cNvPr id="511" name="PlaceHolder 3"/>
           <p:cNvSpPr>
             <a:spLocks noGrp="1"/>
           </p:cNvSpPr>
           <p:nvPr>
-            <p:ph type="sldNum" idx="60"/>
+            <p:ph type="sldNum" idx="59"/>
           </p:nvPr>
         </p:nvSpPr>
         <p:spPr>
@@ -2402,7 +2329,7 @@
                 <a:tab algn="l" pos="0"/>
               </a:tabLst>
             </a:pPr>
-            <a:fld id="{3C705502-EAF0-4D69-9CBE-9E6B1324C95C}" type="slidenum">
+            <a:fld id="{11BAB116-017F-4AAD-93A7-DA01576B4D3B}" type="slidenum">
               <a:rPr b="0" lang="en-US" sz="1200" spc="-1" strike="noStrike">
                 <a:solidFill>
                   <a:schemeClr val="dk1"/>
@@ -2445,7 +2372,7 @@
       </p:grpSpPr>
       <p:sp>
         <p:nvSpPr>
-          <p:cNvPr id="569" name="PlaceHolder 1"/>
+          <p:cNvPr id="563" name="PlaceHolder 1"/>
           <p:cNvSpPr>
             <a:spLocks noGrp="1"/>
           </p:cNvSpPr>
@@ -2468,7 +2395,7 @@
       </p:sp>
       <p:sp>
         <p:nvSpPr>
-          <p:cNvPr id="570" name="PlaceHolder 2"/>
+          <p:cNvPr id="564" name="PlaceHolder 2"/>
           <p:cNvSpPr>
             <a:spLocks noGrp="1"/>
           </p:cNvSpPr>
@@ -2508,12 +2435,12 @@
       </p:sp>
       <p:sp>
         <p:nvSpPr>
-          <p:cNvPr id="571" name="PlaceHolder 3"/>
+          <p:cNvPr id="565" name="PlaceHolder 3"/>
           <p:cNvSpPr>
             <a:spLocks noGrp="1"/>
           </p:cNvSpPr>
           <p:nvPr>
-            <p:ph type="sldNum" idx="78"/>
+            <p:ph type="sldNum" idx="77"/>
           </p:nvPr>
         </p:nvSpPr>
         <p:spPr>
@@ -2561,7 +2488,7 @@
                 <a:tab algn="l" pos="0"/>
               </a:tabLst>
             </a:pPr>
-            <a:fld id="{431B2CD0-D5C5-4EA3-A656-0928AD21B34A}" type="slidenum">
+            <a:fld id="{306176AF-0CD2-4C5F-A766-2044547B8B6E}" type="slidenum">
               <a:rPr b="0" lang="en-US" sz="1200" spc="-1" strike="noStrike">
                 <a:solidFill>
                   <a:schemeClr val="dk1"/>
@@ -2604,7 +2531,7 @@
       </p:grpSpPr>
       <p:sp>
         <p:nvSpPr>
-          <p:cNvPr id="572" name="PlaceHolder 1"/>
+          <p:cNvPr id="566" name="PlaceHolder 1"/>
           <p:cNvSpPr>
             <a:spLocks noGrp="1"/>
           </p:cNvSpPr>
@@ -2627,7 +2554,7 @@
       </p:sp>
       <p:sp>
         <p:nvSpPr>
-          <p:cNvPr id="573" name="PlaceHolder 2"/>
+          <p:cNvPr id="567" name="PlaceHolder 2"/>
           <p:cNvSpPr>
             <a:spLocks noGrp="1"/>
           </p:cNvSpPr>
@@ -2667,12 +2594,12 @@
       </p:sp>
       <p:sp>
         <p:nvSpPr>
-          <p:cNvPr id="574" name="PlaceHolder 3"/>
+          <p:cNvPr id="568" name="PlaceHolder 3"/>
           <p:cNvSpPr>
             <a:spLocks noGrp="1"/>
           </p:cNvSpPr>
           <p:nvPr>
-            <p:ph type="sldNum" idx="79"/>
+            <p:ph type="sldNum" idx="78"/>
           </p:nvPr>
         </p:nvSpPr>
         <p:spPr>
@@ -2720,7 +2647,7 @@
                 <a:tab algn="l" pos="0"/>
               </a:tabLst>
             </a:pPr>
-            <a:fld id="{40115D6F-83A7-4F0F-AB1D-E47A36E42A0A}" type="slidenum">
+            <a:fld id="{8C678C5A-6F01-4CDC-BE7B-4E4D940337AB}" type="slidenum">
               <a:rPr b="0" lang="en-US" sz="1200" spc="-1" strike="noStrike">
                 <a:solidFill>
                   <a:schemeClr val="dk1"/>
@@ -2763,7 +2690,7 @@
       </p:grpSpPr>
       <p:sp>
         <p:nvSpPr>
-          <p:cNvPr id="575" name="PlaceHolder 1"/>
+          <p:cNvPr id="569" name="PlaceHolder 1"/>
           <p:cNvSpPr>
             <a:spLocks noGrp="1"/>
           </p:cNvSpPr>
@@ -2786,7 +2713,7 @@
       </p:sp>
       <p:sp>
         <p:nvSpPr>
-          <p:cNvPr id="576" name="PlaceHolder 2"/>
+          <p:cNvPr id="570" name="PlaceHolder 2"/>
           <p:cNvSpPr>
             <a:spLocks noGrp="1"/>
           </p:cNvSpPr>
@@ -2826,12 +2753,12 @@
       </p:sp>
       <p:sp>
         <p:nvSpPr>
-          <p:cNvPr id="577" name="PlaceHolder 3"/>
+          <p:cNvPr id="571" name="PlaceHolder 3"/>
           <p:cNvSpPr>
             <a:spLocks noGrp="1"/>
           </p:cNvSpPr>
           <p:nvPr>
-            <p:ph type="sldNum" idx="80"/>
+            <p:ph type="sldNum" idx="79"/>
           </p:nvPr>
         </p:nvSpPr>
         <p:spPr>
@@ -2879,7 +2806,7 @@
                 <a:tab algn="l" pos="0"/>
               </a:tabLst>
             </a:pPr>
-            <a:fld id="{3897C2A9-BD54-4904-B644-0A7EBB1491E9}" type="slidenum">
+            <a:fld id="{2A783D73-37F4-4CA4-A9F4-3BAAB99A191D}" type="slidenum">
               <a:rPr b="0" lang="en-US" sz="1200" spc="-1" strike="noStrike">
                 <a:solidFill>
                   <a:schemeClr val="dk1"/>
@@ -2922,7 +2849,7 @@
       </p:grpSpPr>
       <p:sp>
         <p:nvSpPr>
-          <p:cNvPr id="578" name="PlaceHolder 1"/>
+          <p:cNvPr id="572" name="PlaceHolder 1"/>
           <p:cNvSpPr>
             <a:spLocks noGrp="1"/>
           </p:cNvSpPr>
@@ -2945,7 +2872,7 @@
       </p:sp>
       <p:sp>
         <p:nvSpPr>
-          <p:cNvPr id="579" name="PlaceHolder 2"/>
+          <p:cNvPr id="573" name="PlaceHolder 2"/>
           <p:cNvSpPr>
             <a:spLocks noGrp="1"/>
           </p:cNvSpPr>
@@ -2985,12 +2912,12 @@
       </p:sp>
       <p:sp>
         <p:nvSpPr>
-          <p:cNvPr id="580" name="PlaceHolder 3"/>
+          <p:cNvPr id="574" name="PlaceHolder 3"/>
           <p:cNvSpPr>
             <a:spLocks noGrp="1"/>
           </p:cNvSpPr>
           <p:nvPr>
-            <p:ph type="sldNum" idx="81"/>
+            <p:ph type="sldNum" idx="80"/>
           </p:nvPr>
         </p:nvSpPr>
         <p:spPr>
@@ -3038,7 +2965,7 @@
                 <a:tab algn="l" pos="0"/>
               </a:tabLst>
             </a:pPr>
-            <a:fld id="{E8FA8726-9997-4EF0-930D-53CE1367DE83}" type="slidenum">
+            <a:fld id="{C60A115A-B398-4406-A51F-A0C0821EA7C3}" type="slidenum">
               <a:rPr b="0" lang="en-US" sz="1200" spc="-1" strike="noStrike">
                 <a:solidFill>
                   <a:schemeClr val="dk1"/>
@@ -3081,7 +3008,7 @@
       </p:grpSpPr>
       <p:sp>
         <p:nvSpPr>
-          <p:cNvPr id="581" name="PlaceHolder 1"/>
+          <p:cNvPr id="575" name="PlaceHolder 1"/>
           <p:cNvSpPr>
             <a:spLocks noGrp="1"/>
           </p:cNvSpPr>
@@ -3104,7 +3031,7 @@
       </p:sp>
       <p:sp>
         <p:nvSpPr>
-          <p:cNvPr id="582" name="PlaceHolder 2"/>
+          <p:cNvPr id="576" name="PlaceHolder 2"/>
           <p:cNvSpPr>
             <a:spLocks noGrp="1"/>
           </p:cNvSpPr>
@@ -3144,12 +3071,12 @@
       </p:sp>
       <p:sp>
         <p:nvSpPr>
-          <p:cNvPr id="583" name="PlaceHolder 3"/>
+          <p:cNvPr id="577" name="PlaceHolder 3"/>
           <p:cNvSpPr>
             <a:spLocks noGrp="1"/>
           </p:cNvSpPr>
           <p:nvPr>
-            <p:ph type="sldNum" idx="82"/>
+            <p:ph type="sldNum" idx="81"/>
           </p:nvPr>
         </p:nvSpPr>
         <p:spPr>
@@ -3197,7 +3124,7 @@
                 <a:tab algn="l" pos="0"/>
               </a:tabLst>
             </a:pPr>
-            <a:fld id="{38C6B61B-A305-45C7-BD5B-36892690BD84}" type="slidenum">
+            <a:fld id="{FB3CFF3E-BC52-4949-A9F2-3231C08EBEF0}" type="slidenum">
               <a:rPr b="0" lang="en-US" sz="1200" spc="-1" strike="noStrike">
                 <a:solidFill>
                   <a:schemeClr val="dk1"/>
@@ -3240,7 +3167,7 @@
       </p:grpSpPr>
       <p:sp>
         <p:nvSpPr>
-          <p:cNvPr id="584" name="PlaceHolder 1"/>
+          <p:cNvPr id="578" name="PlaceHolder 1"/>
           <p:cNvSpPr>
             <a:spLocks noGrp="1"/>
           </p:cNvSpPr>
@@ -3263,7 +3190,7 @@
       </p:sp>
       <p:sp>
         <p:nvSpPr>
-          <p:cNvPr id="585" name="PlaceHolder 2"/>
+          <p:cNvPr id="579" name="PlaceHolder 2"/>
           <p:cNvSpPr>
             <a:spLocks noGrp="1"/>
           </p:cNvSpPr>
@@ -3303,12 +3230,12 @@
       </p:sp>
       <p:sp>
         <p:nvSpPr>
-          <p:cNvPr id="586" name="PlaceHolder 3"/>
+          <p:cNvPr id="580" name="PlaceHolder 3"/>
           <p:cNvSpPr>
             <a:spLocks noGrp="1"/>
           </p:cNvSpPr>
           <p:nvPr>
-            <p:ph type="sldNum" idx="83"/>
+            <p:ph type="sldNum" idx="82"/>
           </p:nvPr>
         </p:nvSpPr>
         <p:spPr>
@@ -3356,7 +3283,7 @@
                 <a:tab algn="l" pos="0"/>
               </a:tabLst>
             </a:pPr>
-            <a:fld id="{FD7E749F-A126-4565-946B-CEF45B67BEB8}" type="slidenum">
+            <a:fld id="{E22420DF-0C5D-4BD2-BF15-EFBFA2F995BC}" type="slidenum">
               <a:rPr b="0" lang="en-US" sz="1200" spc="-1" strike="noStrike">
                 <a:solidFill>
                   <a:schemeClr val="dk1"/>
@@ -3399,7 +3326,7 @@
       </p:grpSpPr>
       <p:sp>
         <p:nvSpPr>
-          <p:cNvPr id="587" name="PlaceHolder 1"/>
+          <p:cNvPr id="581" name="PlaceHolder 1"/>
           <p:cNvSpPr>
             <a:spLocks noGrp="1"/>
           </p:cNvSpPr>
@@ -3422,7 +3349,7 @@
       </p:sp>
       <p:sp>
         <p:nvSpPr>
-          <p:cNvPr id="588" name="PlaceHolder 2"/>
+          <p:cNvPr id="582" name="PlaceHolder 2"/>
           <p:cNvSpPr>
             <a:spLocks noGrp="1"/>
           </p:cNvSpPr>
@@ -3462,12 +3389,12 @@
       </p:sp>
       <p:sp>
         <p:nvSpPr>
-          <p:cNvPr id="589" name="PlaceHolder 3"/>
+          <p:cNvPr id="583" name="PlaceHolder 3"/>
           <p:cNvSpPr>
             <a:spLocks noGrp="1"/>
           </p:cNvSpPr>
           <p:nvPr>
-            <p:ph type="sldNum" idx="84"/>
+            <p:ph type="sldNum" idx="83"/>
           </p:nvPr>
         </p:nvSpPr>
         <p:spPr>
@@ -3515,7 +3442,7 @@
                 <a:tab algn="l" pos="0"/>
               </a:tabLst>
             </a:pPr>
-            <a:fld id="{676149E0-9DDC-4DB2-A955-27E2A322E46F}" type="slidenum">
+            <a:fld id="{59B2FA70-4942-4566-B2A9-7679A55FE990}" type="slidenum">
               <a:rPr b="0" lang="en-US" sz="1200" spc="-1" strike="noStrike">
                 <a:solidFill>
                   <a:schemeClr val="dk1"/>
@@ -3558,7 +3485,7 @@
       </p:grpSpPr>
       <p:sp>
         <p:nvSpPr>
-          <p:cNvPr id="590" name="PlaceHolder 1"/>
+          <p:cNvPr id="584" name="PlaceHolder 1"/>
           <p:cNvSpPr>
             <a:spLocks noGrp="1"/>
           </p:cNvSpPr>
@@ -3581,7 +3508,7 @@
       </p:sp>
       <p:sp>
         <p:nvSpPr>
-          <p:cNvPr id="591" name="PlaceHolder 2"/>
+          <p:cNvPr id="585" name="PlaceHolder 2"/>
           <p:cNvSpPr>
             <a:spLocks noGrp="1"/>
           </p:cNvSpPr>
@@ -3621,12 +3548,12 @@
       </p:sp>
       <p:sp>
         <p:nvSpPr>
-          <p:cNvPr id="592" name="PlaceHolder 3"/>
+          <p:cNvPr id="586" name="PlaceHolder 3"/>
           <p:cNvSpPr>
             <a:spLocks noGrp="1"/>
           </p:cNvSpPr>
           <p:nvPr>
-            <p:ph type="sldNum" idx="85"/>
+            <p:ph type="sldNum" idx="84"/>
           </p:nvPr>
         </p:nvSpPr>
         <p:spPr>
@@ -3674,7 +3601,7 @@
                 <a:tab algn="l" pos="0"/>
               </a:tabLst>
             </a:pPr>
-            <a:fld id="{09A2A6FA-BBE4-4D93-9060-8B861F4B0828}" type="slidenum">
+            <a:fld id="{76AA0FE4-1DFF-4727-A49B-01FBE16FD0C7}" type="slidenum">
               <a:rPr b="0" lang="en-US" sz="1200" spc="-1" strike="noStrike">
                 <a:solidFill>
                   <a:schemeClr val="dk1"/>
@@ -3717,7 +3644,7 @@
       </p:grpSpPr>
       <p:sp>
         <p:nvSpPr>
-          <p:cNvPr id="593" name="PlaceHolder 1"/>
+          <p:cNvPr id="587" name="PlaceHolder 1"/>
           <p:cNvSpPr>
             <a:spLocks noGrp="1"/>
           </p:cNvSpPr>
@@ -3740,7 +3667,7 @@
       </p:sp>
       <p:sp>
         <p:nvSpPr>
-          <p:cNvPr id="594" name="PlaceHolder 2"/>
+          <p:cNvPr id="588" name="PlaceHolder 2"/>
           <p:cNvSpPr>
             <a:spLocks noGrp="1"/>
           </p:cNvSpPr>
@@ -3780,12 +3707,12 @@
       </p:sp>
       <p:sp>
         <p:nvSpPr>
-          <p:cNvPr id="595" name="PlaceHolder 3"/>
+          <p:cNvPr id="589" name="PlaceHolder 3"/>
           <p:cNvSpPr>
             <a:spLocks noGrp="1"/>
           </p:cNvSpPr>
           <p:nvPr>
-            <p:ph type="sldNum" idx="86"/>
+            <p:ph type="sldNum" idx="85"/>
           </p:nvPr>
         </p:nvSpPr>
         <p:spPr>
@@ -3833,7 +3760,7 @@
                 <a:tab algn="l" pos="0"/>
               </a:tabLst>
             </a:pPr>
-            <a:fld id="{81810DA1-9DAD-4045-A924-973204BB2B82}" type="slidenum">
+            <a:fld id="{F752DA5B-05CE-40B3-AD0F-76ED86BB71BD}" type="slidenum">
               <a:rPr b="0" lang="en-US" sz="1200" spc="-1" strike="noStrike">
                 <a:solidFill>
                   <a:schemeClr val="dk1"/>
@@ -3876,7 +3803,7 @@
       </p:grpSpPr>
       <p:sp>
         <p:nvSpPr>
-          <p:cNvPr id="596" name="PlaceHolder 1"/>
+          <p:cNvPr id="590" name="PlaceHolder 1"/>
           <p:cNvSpPr>
             <a:spLocks noGrp="1"/>
           </p:cNvSpPr>
@@ -3899,7 +3826,7 @@
       </p:sp>
       <p:sp>
         <p:nvSpPr>
-          <p:cNvPr id="597" name="PlaceHolder 2"/>
+          <p:cNvPr id="591" name="PlaceHolder 2"/>
           <p:cNvSpPr>
             <a:spLocks noGrp="1"/>
           </p:cNvSpPr>
@@ -3939,12 +3866,12 @@
       </p:sp>
       <p:sp>
         <p:nvSpPr>
-          <p:cNvPr id="598" name="PlaceHolder 3"/>
+          <p:cNvPr id="592" name="PlaceHolder 3"/>
           <p:cNvSpPr>
             <a:spLocks noGrp="1"/>
           </p:cNvSpPr>
           <p:nvPr>
-            <p:ph type="sldNum" idx="87"/>
+            <p:ph type="sldNum" idx="86"/>
           </p:nvPr>
         </p:nvSpPr>
         <p:spPr>
@@ -3992,7 +3919,7 @@
                 <a:tab algn="l" pos="0"/>
               </a:tabLst>
             </a:pPr>
-            <a:fld id="{2BCE7774-8AD2-443C-93D5-8A179E58A9A5}" type="slidenum">
+            <a:fld id="{0B6C33F4-45EF-4646-9982-EFE7B1737D27}" type="slidenum">
               <a:rPr b="0" lang="en-US" sz="1200" spc="-1" strike="noStrike">
                 <a:solidFill>
                   <a:schemeClr val="dk1"/>
@@ -4035,7 +3962,7 @@
       </p:grpSpPr>
       <p:sp>
         <p:nvSpPr>
-          <p:cNvPr id="518" name="PlaceHolder 1"/>
+          <p:cNvPr id="512" name="PlaceHolder 1"/>
           <p:cNvSpPr>
             <a:spLocks noGrp="1"/>
           </p:cNvSpPr>
@@ -4058,7 +3985,7 @@
       </p:sp>
       <p:sp>
         <p:nvSpPr>
-          <p:cNvPr id="519" name="PlaceHolder 2"/>
+          <p:cNvPr id="513" name="PlaceHolder 2"/>
           <p:cNvSpPr>
             <a:spLocks noGrp="1"/>
           </p:cNvSpPr>
@@ -4098,12 +4025,12 @@
       </p:sp>
       <p:sp>
         <p:nvSpPr>
-          <p:cNvPr id="520" name="PlaceHolder 3"/>
+          <p:cNvPr id="514" name="PlaceHolder 3"/>
           <p:cNvSpPr>
             <a:spLocks noGrp="1"/>
           </p:cNvSpPr>
           <p:nvPr>
-            <p:ph type="sldNum" idx="61"/>
+            <p:ph type="sldNum" idx="60"/>
           </p:nvPr>
         </p:nvSpPr>
         <p:spPr>
@@ -4151,7 +4078,7 @@
                 <a:tab algn="l" pos="0"/>
               </a:tabLst>
             </a:pPr>
-            <a:fld id="{A170C10E-FD86-4EE4-889C-B155BEA11F18}" type="slidenum">
+            <a:fld id="{A20D55CE-23B8-47AE-BCAF-34BDE65B2040}" type="slidenum">
               <a:rPr b="0" lang="en-US" sz="1200" spc="-1" strike="noStrike">
                 <a:solidFill>
                   <a:schemeClr val="dk1"/>
@@ -4194,7 +4121,7 @@
       </p:grpSpPr>
       <p:sp>
         <p:nvSpPr>
-          <p:cNvPr id="599" name="PlaceHolder 1"/>
+          <p:cNvPr id="593" name="PlaceHolder 1"/>
           <p:cNvSpPr>
             <a:spLocks noGrp="1"/>
           </p:cNvSpPr>
@@ -4217,7 +4144,7 @@
       </p:sp>
       <p:sp>
         <p:nvSpPr>
-          <p:cNvPr id="600" name="PlaceHolder 2"/>
+          <p:cNvPr id="594" name="PlaceHolder 2"/>
           <p:cNvSpPr>
             <a:spLocks noGrp="1"/>
           </p:cNvSpPr>
@@ -4257,12 +4184,12 @@
       </p:sp>
       <p:sp>
         <p:nvSpPr>
-          <p:cNvPr id="601" name="PlaceHolder 3"/>
+          <p:cNvPr id="595" name="PlaceHolder 3"/>
           <p:cNvSpPr>
             <a:spLocks noGrp="1"/>
           </p:cNvSpPr>
           <p:nvPr>
-            <p:ph type="sldNum" idx="88"/>
+            <p:ph type="sldNum" idx="87"/>
           </p:nvPr>
         </p:nvSpPr>
         <p:spPr>
@@ -4310,7 +4237,7 @@
                 <a:tab algn="l" pos="0"/>
               </a:tabLst>
             </a:pPr>
-            <a:fld id="{357830DA-9AB3-4F19-B84B-B89295D6B98B}" type="slidenum">
+            <a:fld id="{34453402-C11A-4079-B131-A28F59F430B6}" type="slidenum">
               <a:rPr b="0" lang="en-US" sz="1200" spc="-1" strike="noStrike">
                 <a:solidFill>
                   <a:schemeClr val="dk1"/>
@@ -4353,7 +4280,7 @@
       </p:grpSpPr>
       <p:sp>
         <p:nvSpPr>
-          <p:cNvPr id="602" name="PlaceHolder 1"/>
+          <p:cNvPr id="596" name="PlaceHolder 1"/>
           <p:cNvSpPr>
             <a:spLocks noGrp="1"/>
           </p:cNvSpPr>
@@ -4376,7 +4303,7 @@
       </p:sp>
       <p:sp>
         <p:nvSpPr>
-          <p:cNvPr id="603" name="PlaceHolder 2"/>
+          <p:cNvPr id="597" name="PlaceHolder 2"/>
           <p:cNvSpPr>
             <a:spLocks noGrp="1"/>
           </p:cNvSpPr>
@@ -4416,12 +4343,12 @@
       </p:sp>
       <p:sp>
         <p:nvSpPr>
-          <p:cNvPr id="604" name="PlaceHolder 3"/>
+          <p:cNvPr id="598" name="PlaceHolder 3"/>
           <p:cNvSpPr>
             <a:spLocks noGrp="1"/>
           </p:cNvSpPr>
           <p:nvPr>
-            <p:ph type="sldNum" idx="89"/>
+            <p:ph type="sldNum" idx="88"/>
           </p:nvPr>
         </p:nvSpPr>
         <p:spPr>
@@ -4469,7 +4396,7 @@
                 <a:tab algn="l" pos="0"/>
               </a:tabLst>
             </a:pPr>
-            <a:fld id="{9854661C-7173-4712-9C26-AE7EA3F99E53}" type="slidenum">
+            <a:fld id="{7604FA96-E33D-47EB-959E-E589B24C9299}" type="slidenum">
               <a:rPr b="0" lang="en-US" sz="1200" spc="-1" strike="noStrike">
                 <a:solidFill>
                   <a:schemeClr val="dk1"/>
@@ -4512,7 +4439,7 @@
       </p:grpSpPr>
       <p:sp>
         <p:nvSpPr>
-          <p:cNvPr id="605" name="PlaceHolder 1"/>
+          <p:cNvPr id="599" name="PlaceHolder 1"/>
           <p:cNvSpPr>
             <a:spLocks noGrp="1"/>
           </p:cNvSpPr>
@@ -4535,7 +4462,7 @@
       </p:sp>
       <p:sp>
         <p:nvSpPr>
-          <p:cNvPr id="606" name="PlaceHolder 2"/>
+          <p:cNvPr id="600" name="PlaceHolder 2"/>
           <p:cNvSpPr>
             <a:spLocks noGrp="1"/>
           </p:cNvSpPr>
@@ -4575,12 +4502,12 @@
       </p:sp>
       <p:sp>
         <p:nvSpPr>
-          <p:cNvPr id="607" name="PlaceHolder 3"/>
+          <p:cNvPr id="601" name="PlaceHolder 3"/>
           <p:cNvSpPr>
             <a:spLocks noGrp="1"/>
           </p:cNvSpPr>
           <p:nvPr>
-            <p:ph type="sldNum" idx="90"/>
+            <p:ph type="sldNum" idx="89"/>
           </p:nvPr>
         </p:nvSpPr>
         <p:spPr>
@@ -4628,7 +4555,7 @@
                 <a:tab algn="l" pos="0"/>
               </a:tabLst>
             </a:pPr>
-            <a:fld id="{437EA4D9-B75C-42FD-ACA3-08C84D050D5C}" type="slidenum">
+            <a:fld id="{A200DDAA-407B-4FBE-AE4B-8C77A17C9EC2}" type="slidenum">
               <a:rPr b="0" lang="en-US" sz="1200" spc="-1" strike="noStrike">
                 <a:solidFill>
                   <a:schemeClr val="dk1"/>
@@ -4671,7 +4598,7 @@
       </p:grpSpPr>
       <p:sp>
         <p:nvSpPr>
-          <p:cNvPr id="608" name="PlaceHolder 1"/>
+          <p:cNvPr id="602" name="PlaceHolder 1"/>
           <p:cNvSpPr>
             <a:spLocks noGrp="1"/>
           </p:cNvSpPr>
@@ -4694,7 +4621,7 @@
       </p:sp>
       <p:sp>
         <p:nvSpPr>
-          <p:cNvPr id="609" name="PlaceHolder 2"/>
+          <p:cNvPr id="603" name="PlaceHolder 2"/>
           <p:cNvSpPr>
             <a:spLocks noGrp="1"/>
           </p:cNvSpPr>
@@ -4734,12 +4661,12 @@
       </p:sp>
       <p:sp>
         <p:nvSpPr>
-          <p:cNvPr id="610" name="PlaceHolder 3"/>
+          <p:cNvPr id="604" name="PlaceHolder 3"/>
           <p:cNvSpPr>
             <a:spLocks noGrp="1"/>
           </p:cNvSpPr>
           <p:nvPr>
-            <p:ph type="sldNum" idx="91"/>
+            <p:ph type="sldNum" idx="90"/>
           </p:nvPr>
         </p:nvSpPr>
         <p:spPr>
@@ -4787,7 +4714,7 @@
                 <a:tab algn="l" pos="0"/>
               </a:tabLst>
             </a:pPr>
-            <a:fld id="{00B866D4-342F-4B1D-BC46-BF18924748AA}" type="slidenum">
+            <a:fld id="{341C4E7E-BEB8-4572-81D9-E6F840249F8D}" type="slidenum">
               <a:rPr b="0" lang="en-US" sz="1200" spc="-1" strike="noStrike">
                 <a:solidFill>
                   <a:schemeClr val="dk1"/>
@@ -4830,7 +4757,7 @@
       </p:grpSpPr>
       <p:sp>
         <p:nvSpPr>
-          <p:cNvPr id="611" name="PlaceHolder 1"/>
+          <p:cNvPr id="605" name="PlaceHolder 1"/>
           <p:cNvSpPr>
             <a:spLocks noGrp="1"/>
           </p:cNvSpPr>
@@ -4853,7 +4780,7 @@
       </p:sp>
       <p:sp>
         <p:nvSpPr>
-          <p:cNvPr id="612" name="PlaceHolder 2"/>
+          <p:cNvPr id="606" name="PlaceHolder 2"/>
           <p:cNvSpPr>
             <a:spLocks noGrp="1"/>
           </p:cNvSpPr>
@@ -4893,12 +4820,12 @@
       </p:sp>
       <p:sp>
         <p:nvSpPr>
-          <p:cNvPr id="613" name="PlaceHolder 3"/>
+          <p:cNvPr id="607" name="PlaceHolder 3"/>
           <p:cNvSpPr>
             <a:spLocks noGrp="1"/>
           </p:cNvSpPr>
           <p:nvPr>
-            <p:ph type="sldNum" idx="92"/>
+            <p:ph type="sldNum" idx="91"/>
           </p:nvPr>
         </p:nvSpPr>
         <p:spPr>
@@ -4946,7 +4873,7 @@
                 <a:tab algn="l" pos="0"/>
               </a:tabLst>
             </a:pPr>
-            <a:fld id="{B7445D20-7F0D-4974-9F28-DF8FC792F3BF}" type="slidenum">
+            <a:fld id="{CFD57355-67D2-4533-9D8D-08C1D6B8678F}" type="slidenum">
               <a:rPr b="0" lang="en-US" sz="1200" spc="-1" strike="noStrike">
                 <a:solidFill>
                   <a:schemeClr val="dk1"/>
@@ -4989,7 +4916,7 @@
       </p:grpSpPr>
       <p:sp>
         <p:nvSpPr>
-          <p:cNvPr id="614" name="PlaceHolder 1"/>
+          <p:cNvPr id="608" name="PlaceHolder 1"/>
           <p:cNvSpPr>
             <a:spLocks noGrp="1"/>
           </p:cNvSpPr>
@@ -5012,7 +4939,7 @@
       </p:sp>
       <p:sp>
         <p:nvSpPr>
-          <p:cNvPr id="615" name="PlaceHolder 2"/>
+          <p:cNvPr id="609" name="PlaceHolder 2"/>
           <p:cNvSpPr>
             <a:spLocks noGrp="1"/>
           </p:cNvSpPr>
@@ -5052,12 +4979,12 @@
       </p:sp>
       <p:sp>
         <p:nvSpPr>
-          <p:cNvPr id="616" name="PlaceHolder 3"/>
+          <p:cNvPr id="610" name="PlaceHolder 3"/>
           <p:cNvSpPr>
             <a:spLocks noGrp="1"/>
           </p:cNvSpPr>
           <p:nvPr>
-            <p:ph type="sldNum" idx="93"/>
+            <p:ph type="sldNum" idx="92"/>
           </p:nvPr>
         </p:nvSpPr>
         <p:spPr>
@@ -5105,7 +5032,7 @@
                 <a:tab algn="l" pos="0"/>
               </a:tabLst>
             </a:pPr>
-            <a:fld id="{8E187319-FA40-4D74-ABF8-7E0FC8624D44}" type="slidenum">
+            <a:fld id="{224079D2-7723-4934-9850-AB3861A89A33}" type="slidenum">
               <a:rPr b="0" lang="en-US" sz="1200" spc="-1" strike="noStrike">
                 <a:solidFill>
                   <a:schemeClr val="dk1"/>
@@ -5148,7 +5075,7 @@
       </p:grpSpPr>
       <p:sp>
         <p:nvSpPr>
-          <p:cNvPr id="617" name="PlaceHolder 1"/>
+          <p:cNvPr id="611" name="PlaceHolder 1"/>
           <p:cNvSpPr>
             <a:spLocks noGrp="1"/>
           </p:cNvSpPr>
@@ -5171,7 +5098,7 @@
       </p:sp>
       <p:sp>
         <p:nvSpPr>
-          <p:cNvPr id="618" name="PlaceHolder 2"/>
+          <p:cNvPr id="612" name="PlaceHolder 2"/>
           <p:cNvSpPr>
             <a:spLocks noGrp="1"/>
           </p:cNvSpPr>
@@ -5211,12 +5138,12 @@
       </p:sp>
       <p:sp>
         <p:nvSpPr>
-          <p:cNvPr id="619" name="PlaceHolder 3"/>
+          <p:cNvPr id="613" name="PlaceHolder 3"/>
           <p:cNvSpPr>
             <a:spLocks noGrp="1"/>
           </p:cNvSpPr>
           <p:nvPr>
-            <p:ph type="sldNum" idx="94"/>
+            <p:ph type="sldNum" idx="93"/>
           </p:nvPr>
         </p:nvSpPr>
         <p:spPr>
@@ -5264,7 +5191,7 @@
                 <a:tab algn="l" pos="0"/>
               </a:tabLst>
             </a:pPr>
-            <a:fld id="{EADCD6FA-BA2A-43AD-8318-9ED2CAD08AA5}" type="slidenum">
+            <a:fld id="{768A6A65-3ACB-4223-8A98-BEE4650FD05C}" type="slidenum">
               <a:rPr b="0" lang="en-US" sz="1200" spc="-1" strike="noStrike">
                 <a:solidFill>
                   <a:schemeClr val="dk1"/>
@@ -5307,7 +5234,7 @@
       </p:grpSpPr>
       <p:sp>
         <p:nvSpPr>
-          <p:cNvPr id="620" name="PlaceHolder 1"/>
+          <p:cNvPr id="614" name="PlaceHolder 1"/>
           <p:cNvSpPr>
             <a:spLocks noGrp="1"/>
           </p:cNvSpPr>
@@ -5330,7 +5257,7 @@
       </p:sp>
       <p:sp>
         <p:nvSpPr>
-          <p:cNvPr id="621" name="PlaceHolder 2"/>
+          <p:cNvPr id="615" name="PlaceHolder 2"/>
           <p:cNvSpPr>
             <a:spLocks noGrp="1"/>
           </p:cNvSpPr>
@@ -5370,12 +5297,12 @@
       </p:sp>
       <p:sp>
         <p:nvSpPr>
-          <p:cNvPr id="622" name="PlaceHolder 3"/>
+          <p:cNvPr id="616" name="PlaceHolder 3"/>
           <p:cNvSpPr>
             <a:spLocks noGrp="1"/>
           </p:cNvSpPr>
           <p:nvPr>
-            <p:ph type="sldNum" idx="95"/>
+            <p:ph type="sldNum" idx="94"/>
           </p:nvPr>
         </p:nvSpPr>
         <p:spPr>
@@ -5423,7 +5350,7 @@
                 <a:tab algn="l" pos="0"/>
               </a:tabLst>
             </a:pPr>
-            <a:fld id="{0FA530D7-FBB7-405F-A9D9-5EEB81D1B051}" type="slidenum">
+            <a:fld id="{277DE069-1061-487C-8083-BBE5D7BB61D6}" type="slidenum">
               <a:rPr b="0" lang="en-US" sz="1200" spc="-1" strike="noStrike">
                 <a:solidFill>
                   <a:schemeClr val="dk1"/>
@@ -5466,7 +5393,7 @@
       </p:grpSpPr>
       <p:sp>
         <p:nvSpPr>
-          <p:cNvPr id="623" name="PlaceHolder 1"/>
+          <p:cNvPr id="617" name="PlaceHolder 1"/>
           <p:cNvSpPr>
             <a:spLocks noGrp="1"/>
           </p:cNvSpPr>
@@ -5489,7 +5416,7 @@
       </p:sp>
       <p:sp>
         <p:nvSpPr>
-          <p:cNvPr id="624" name="PlaceHolder 2"/>
+          <p:cNvPr id="618" name="PlaceHolder 2"/>
           <p:cNvSpPr>
             <a:spLocks noGrp="1"/>
           </p:cNvSpPr>
@@ -5529,12 +5456,12 @@
       </p:sp>
       <p:sp>
         <p:nvSpPr>
-          <p:cNvPr id="625" name="PlaceHolder 3"/>
+          <p:cNvPr id="619" name="PlaceHolder 3"/>
           <p:cNvSpPr>
             <a:spLocks noGrp="1"/>
           </p:cNvSpPr>
           <p:nvPr>
-            <p:ph type="sldNum" idx="96"/>
+            <p:ph type="sldNum" idx="95"/>
           </p:nvPr>
         </p:nvSpPr>
         <p:spPr>
@@ -5582,7 +5509,7 @@
                 <a:tab algn="l" pos="0"/>
               </a:tabLst>
             </a:pPr>
-            <a:fld id="{AD56CA70-ADE7-451B-9C98-92937F8DD44D}" type="slidenum">
+            <a:fld id="{47ED1B6F-80A0-46C3-ACD7-15D1C6C0C79B}" type="slidenum">
               <a:rPr b="0" lang="en-US" sz="1200" spc="-1" strike="noStrike">
                 <a:solidFill>
                   <a:schemeClr val="dk1"/>
@@ -5625,7 +5552,7 @@
       </p:grpSpPr>
       <p:sp>
         <p:nvSpPr>
-          <p:cNvPr id="626" name="PlaceHolder 1"/>
+          <p:cNvPr id="620" name="PlaceHolder 1"/>
           <p:cNvSpPr>
             <a:spLocks noGrp="1"/>
           </p:cNvSpPr>
@@ -5648,7 +5575,7 @@
       </p:sp>
       <p:sp>
         <p:nvSpPr>
-          <p:cNvPr id="627" name="PlaceHolder 2"/>
+          <p:cNvPr id="621" name="PlaceHolder 2"/>
           <p:cNvSpPr>
             <a:spLocks noGrp="1"/>
           </p:cNvSpPr>
@@ -5688,12 +5615,12 @@
       </p:sp>
       <p:sp>
         <p:nvSpPr>
-          <p:cNvPr id="628" name="PlaceHolder 3"/>
+          <p:cNvPr id="622" name="PlaceHolder 3"/>
           <p:cNvSpPr>
             <a:spLocks noGrp="1"/>
           </p:cNvSpPr>
           <p:nvPr>
-            <p:ph type="sldNum" idx="97"/>
+            <p:ph type="sldNum" idx="96"/>
           </p:nvPr>
         </p:nvSpPr>
         <p:spPr>
@@ -5741,7 +5668,7 @@
                 <a:tab algn="l" pos="0"/>
               </a:tabLst>
             </a:pPr>
-            <a:fld id="{473056B6-1628-48D9-AB26-07A52633DC4B}" type="slidenum">
+            <a:fld id="{EEEC6E21-C0E7-450A-99DC-45B538214361}" type="slidenum">
               <a:rPr b="0" lang="en-US" sz="1200" spc="-1" strike="noStrike">
                 <a:solidFill>
                   <a:schemeClr val="dk1"/>
@@ -5784,7 +5711,7 @@
       </p:grpSpPr>
       <p:sp>
         <p:nvSpPr>
-          <p:cNvPr id="521" name="PlaceHolder 1"/>
+          <p:cNvPr id="515" name="PlaceHolder 1"/>
           <p:cNvSpPr>
             <a:spLocks noGrp="1"/>
           </p:cNvSpPr>
@@ -5807,7 +5734,7 @@
       </p:sp>
       <p:sp>
         <p:nvSpPr>
-          <p:cNvPr id="522" name="PlaceHolder 2"/>
+          <p:cNvPr id="516" name="PlaceHolder 2"/>
           <p:cNvSpPr>
             <a:spLocks noGrp="1"/>
           </p:cNvSpPr>
@@ -5847,12 +5774,12 @@
       </p:sp>
       <p:sp>
         <p:nvSpPr>
-          <p:cNvPr id="523" name="PlaceHolder 3"/>
+          <p:cNvPr id="517" name="PlaceHolder 3"/>
           <p:cNvSpPr>
             <a:spLocks noGrp="1"/>
           </p:cNvSpPr>
           <p:nvPr>
-            <p:ph type="sldNum" idx="62"/>
+            <p:ph type="sldNum" idx="61"/>
           </p:nvPr>
         </p:nvSpPr>
         <p:spPr>
@@ -5900,7 +5827,7 @@
                 <a:tab algn="l" pos="0"/>
               </a:tabLst>
             </a:pPr>
-            <a:fld id="{03A330B7-3CB6-4B08-A46B-DE6B4582A695}" type="slidenum">
+            <a:fld id="{6B893C7A-90CA-4E36-A3A7-B4A6F91B76B3}" type="slidenum">
               <a:rPr b="0" lang="en-US" sz="1200" spc="-1" strike="noStrike">
                 <a:solidFill>
                   <a:schemeClr val="dk1"/>
@@ -5943,7 +5870,7 @@
       </p:grpSpPr>
       <p:sp>
         <p:nvSpPr>
-          <p:cNvPr id="629" name="PlaceHolder 1"/>
+          <p:cNvPr id="623" name="PlaceHolder 1"/>
           <p:cNvSpPr>
             <a:spLocks noGrp="1"/>
           </p:cNvSpPr>
@@ -5966,7 +5893,7 @@
       </p:sp>
       <p:sp>
         <p:nvSpPr>
-          <p:cNvPr id="630" name="PlaceHolder 2"/>
+          <p:cNvPr id="624" name="PlaceHolder 2"/>
           <p:cNvSpPr>
             <a:spLocks noGrp="1"/>
           </p:cNvSpPr>
@@ -6006,12 +5933,12 @@
       </p:sp>
       <p:sp>
         <p:nvSpPr>
-          <p:cNvPr id="631" name="PlaceHolder 3"/>
+          <p:cNvPr id="625" name="PlaceHolder 3"/>
           <p:cNvSpPr>
             <a:spLocks noGrp="1"/>
           </p:cNvSpPr>
           <p:nvPr>
-            <p:ph type="sldNum" idx="98"/>
+            <p:ph type="sldNum" idx="97"/>
           </p:nvPr>
         </p:nvSpPr>
         <p:spPr>
@@ -6059,7 +5986,7 @@
                 <a:tab algn="l" pos="0"/>
               </a:tabLst>
             </a:pPr>
-            <a:fld id="{A6104359-EB44-49BB-888A-7F58C2682805}" type="slidenum">
+            <a:fld id="{4F2B5BFF-E367-4E26-BA8C-65B4DE72E165}" type="slidenum">
               <a:rPr b="0" lang="en-US" sz="1200" spc="-1" strike="noStrike">
                 <a:solidFill>
                   <a:schemeClr val="dk1"/>
@@ -6102,7 +6029,7 @@
       </p:grpSpPr>
       <p:sp>
         <p:nvSpPr>
-          <p:cNvPr id="632" name="PlaceHolder 1"/>
+          <p:cNvPr id="626" name="PlaceHolder 1"/>
           <p:cNvSpPr>
             <a:spLocks noGrp="1"/>
           </p:cNvSpPr>
@@ -6125,7 +6052,7 @@
       </p:sp>
       <p:sp>
         <p:nvSpPr>
-          <p:cNvPr id="633" name="PlaceHolder 2"/>
+          <p:cNvPr id="627" name="PlaceHolder 2"/>
           <p:cNvSpPr>
             <a:spLocks noGrp="1"/>
           </p:cNvSpPr>
@@ -6165,12 +6092,12 @@
       </p:sp>
       <p:sp>
         <p:nvSpPr>
-          <p:cNvPr id="634" name="PlaceHolder 3"/>
+          <p:cNvPr id="628" name="PlaceHolder 3"/>
           <p:cNvSpPr>
             <a:spLocks noGrp="1"/>
           </p:cNvSpPr>
           <p:nvPr>
-            <p:ph type="sldNum" idx="99"/>
+            <p:ph type="sldNum" idx="98"/>
           </p:nvPr>
         </p:nvSpPr>
         <p:spPr>
@@ -6218,7 +6145,7 @@
                 <a:tab algn="l" pos="0"/>
               </a:tabLst>
             </a:pPr>
-            <a:fld id="{F57E54FA-0E84-472F-A152-5988B2F8ACED}" type="slidenum">
+            <a:fld id="{C15CE618-65D0-4E4D-888C-A288B05D8267}" type="slidenum">
               <a:rPr b="0" lang="en-US" sz="1200" spc="-1" strike="noStrike">
                 <a:solidFill>
                   <a:schemeClr val="dk1"/>
@@ -6261,7 +6188,7 @@
       </p:grpSpPr>
       <p:sp>
         <p:nvSpPr>
-          <p:cNvPr id="635" name="PlaceHolder 1"/>
+          <p:cNvPr id="629" name="PlaceHolder 1"/>
           <p:cNvSpPr>
             <a:spLocks noGrp="1"/>
           </p:cNvSpPr>
@@ -6284,7 +6211,7 @@
       </p:sp>
       <p:sp>
         <p:nvSpPr>
-          <p:cNvPr id="636" name="PlaceHolder 2"/>
+          <p:cNvPr id="630" name="PlaceHolder 2"/>
           <p:cNvSpPr>
             <a:spLocks noGrp="1"/>
           </p:cNvSpPr>
@@ -6324,12 +6251,12 @@
       </p:sp>
       <p:sp>
         <p:nvSpPr>
-          <p:cNvPr id="637" name="PlaceHolder 3"/>
+          <p:cNvPr id="631" name="PlaceHolder 3"/>
           <p:cNvSpPr>
             <a:spLocks noGrp="1"/>
           </p:cNvSpPr>
           <p:nvPr>
-            <p:ph type="sldNum" idx="100"/>
+            <p:ph type="sldNum" idx="99"/>
           </p:nvPr>
         </p:nvSpPr>
         <p:spPr>
@@ -6377,7 +6304,7 @@
                 <a:tab algn="l" pos="0"/>
               </a:tabLst>
             </a:pPr>
-            <a:fld id="{CC798F2E-2709-4968-BA4C-68C102024DE9}" type="slidenum">
+            <a:fld id="{ECC8F4AB-7ED1-43F5-9A68-CA26F04940B0}" type="slidenum">
               <a:rPr b="0" lang="en-US" sz="1200" spc="-1" strike="noStrike">
                 <a:solidFill>
                   <a:schemeClr val="dk1"/>
@@ -6420,7 +6347,7 @@
       </p:grpSpPr>
       <p:sp>
         <p:nvSpPr>
-          <p:cNvPr id="638" name="PlaceHolder 1"/>
+          <p:cNvPr id="632" name="PlaceHolder 1"/>
           <p:cNvSpPr>
             <a:spLocks noGrp="1"/>
           </p:cNvSpPr>
@@ -6443,7 +6370,7 @@
       </p:sp>
       <p:sp>
         <p:nvSpPr>
-          <p:cNvPr id="639" name="PlaceHolder 2"/>
+          <p:cNvPr id="633" name="PlaceHolder 2"/>
           <p:cNvSpPr>
             <a:spLocks noGrp="1"/>
           </p:cNvSpPr>
@@ -6483,12 +6410,12 @@
       </p:sp>
       <p:sp>
         <p:nvSpPr>
-          <p:cNvPr id="640" name="PlaceHolder 3"/>
+          <p:cNvPr id="634" name="PlaceHolder 3"/>
           <p:cNvSpPr>
             <a:spLocks noGrp="1"/>
           </p:cNvSpPr>
           <p:nvPr>
-            <p:ph type="sldNum" idx="101"/>
+            <p:ph type="sldNum" idx="100"/>
           </p:nvPr>
         </p:nvSpPr>
         <p:spPr>
@@ -6536,7 +6463,7 @@
                 <a:tab algn="l" pos="0"/>
               </a:tabLst>
             </a:pPr>
-            <a:fld id="{3C46B009-8D27-4866-B129-85748A900686}" type="slidenum">
+            <a:fld id="{B051D6DF-BA17-4E46-BAB8-29E43C8793BE}" type="slidenum">
               <a:rPr b="0" lang="en-US" sz="1200" spc="-1" strike="noStrike">
                 <a:solidFill>
                   <a:schemeClr val="dk1"/>
@@ -6579,7 +6506,7 @@
       </p:grpSpPr>
       <p:sp>
         <p:nvSpPr>
-          <p:cNvPr id="641" name="PlaceHolder 1"/>
+          <p:cNvPr id="635" name="PlaceHolder 1"/>
           <p:cNvSpPr>
             <a:spLocks noGrp="1"/>
           </p:cNvSpPr>
@@ -6602,7 +6529,7 @@
       </p:sp>
       <p:sp>
         <p:nvSpPr>
-          <p:cNvPr id="642" name="PlaceHolder 2"/>
+          <p:cNvPr id="636" name="PlaceHolder 2"/>
           <p:cNvSpPr>
             <a:spLocks noGrp="1"/>
           </p:cNvSpPr>
@@ -6642,12 +6569,12 @@
       </p:sp>
       <p:sp>
         <p:nvSpPr>
-          <p:cNvPr id="643" name="PlaceHolder 3"/>
+          <p:cNvPr id="637" name="PlaceHolder 3"/>
           <p:cNvSpPr>
             <a:spLocks noGrp="1"/>
           </p:cNvSpPr>
           <p:nvPr>
-            <p:ph type="sldNum" idx="102"/>
+            <p:ph type="sldNum" idx="101"/>
           </p:nvPr>
         </p:nvSpPr>
         <p:spPr>
@@ -6695,7 +6622,7 @@
                 <a:tab algn="l" pos="0"/>
               </a:tabLst>
             </a:pPr>
-            <a:fld id="{9C34F5DF-1D97-4618-BD8B-BAEC3E44B34C}" type="slidenum">
+            <a:fld id="{DB566D7B-746E-4585-A72D-043E69245FD9}" type="slidenum">
               <a:rPr b="0" lang="en-US" sz="1200" spc="-1" strike="noStrike">
                 <a:solidFill>
                   <a:schemeClr val="dk1"/>
@@ -6738,7 +6665,7 @@
       </p:grpSpPr>
       <p:sp>
         <p:nvSpPr>
-          <p:cNvPr id="644" name="PlaceHolder 1"/>
+          <p:cNvPr id="638" name="PlaceHolder 1"/>
           <p:cNvSpPr>
             <a:spLocks noGrp="1"/>
           </p:cNvSpPr>
@@ -6761,7 +6688,7 @@
       </p:sp>
       <p:sp>
         <p:nvSpPr>
-          <p:cNvPr id="645" name="PlaceHolder 2"/>
+          <p:cNvPr id="639" name="PlaceHolder 2"/>
           <p:cNvSpPr>
             <a:spLocks noGrp="1"/>
           </p:cNvSpPr>
@@ -6801,12 +6728,12 @@
       </p:sp>
       <p:sp>
         <p:nvSpPr>
-          <p:cNvPr id="646" name="PlaceHolder 3"/>
+          <p:cNvPr id="640" name="PlaceHolder 3"/>
           <p:cNvSpPr>
             <a:spLocks noGrp="1"/>
           </p:cNvSpPr>
           <p:nvPr>
-            <p:ph type="sldNum" idx="103"/>
+            <p:ph type="sldNum" idx="102"/>
           </p:nvPr>
         </p:nvSpPr>
         <p:spPr>
@@ -6854,7 +6781,7 @@
                 <a:tab algn="l" pos="0"/>
               </a:tabLst>
             </a:pPr>
-            <a:fld id="{983509AE-DCDB-4C72-89AE-58F9B94AA70E}" type="slidenum">
+            <a:fld id="{642D8849-C05E-4FD2-9874-F42FEB19CE14}" type="slidenum">
               <a:rPr b="0" lang="en-US" sz="1200" spc="-1" strike="noStrike">
                 <a:solidFill>
                   <a:schemeClr val="dk1"/>
@@ -6897,7 +6824,7 @@
       </p:grpSpPr>
       <p:sp>
         <p:nvSpPr>
-          <p:cNvPr id="647" name="PlaceHolder 1"/>
+          <p:cNvPr id="641" name="PlaceHolder 1"/>
           <p:cNvSpPr>
             <a:spLocks noGrp="1"/>
           </p:cNvSpPr>
@@ -6920,7 +6847,7 @@
       </p:sp>
       <p:sp>
         <p:nvSpPr>
-          <p:cNvPr id="648" name="PlaceHolder 2"/>
+          <p:cNvPr id="642" name="PlaceHolder 2"/>
           <p:cNvSpPr>
             <a:spLocks noGrp="1"/>
           </p:cNvSpPr>
@@ -6960,12 +6887,12 @@
       </p:sp>
       <p:sp>
         <p:nvSpPr>
-          <p:cNvPr id="649" name="PlaceHolder 3"/>
+          <p:cNvPr id="643" name="PlaceHolder 3"/>
           <p:cNvSpPr>
             <a:spLocks noGrp="1"/>
           </p:cNvSpPr>
           <p:nvPr>
-            <p:ph type="sldNum" idx="104"/>
+            <p:ph type="sldNum" idx="103"/>
           </p:nvPr>
         </p:nvSpPr>
         <p:spPr>
@@ -7013,7 +6940,7 @@
                 <a:tab algn="l" pos="0"/>
               </a:tabLst>
             </a:pPr>
-            <a:fld id="{7271FADE-BE53-4D36-A8BA-92353FEB4382}" type="slidenum">
+            <a:fld id="{118F3DE9-3738-4103-BEAF-C4D79F5509FC}" type="slidenum">
               <a:rPr b="0" lang="en-US" sz="1200" spc="-1" strike="noStrike">
                 <a:solidFill>
                   <a:schemeClr val="dk1"/>
@@ -7056,7 +6983,7 @@
       </p:grpSpPr>
       <p:sp>
         <p:nvSpPr>
-          <p:cNvPr id="650" name="PlaceHolder 1"/>
+          <p:cNvPr id="644" name="PlaceHolder 1"/>
           <p:cNvSpPr>
             <a:spLocks noGrp="1"/>
           </p:cNvSpPr>
@@ -7079,7 +7006,7 @@
       </p:sp>
       <p:sp>
         <p:nvSpPr>
-          <p:cNvPr id="651" name="PlaceHolder 2"/>
+          <p:cNvPr id="645" name="PlaceHolder 2"/>
           <p:cNvSpPr>
             <a:spLocks noGrp="1"/>
           </p:cNvSpPr>
@@ -7119,12 +7046,12 @@
       </p:sp>
       <p:sp>
         <p:nvSpPr>
-          <p:cNvPr id="652" name="PlaceHolder 3"/>
+          <p:cNvPr id="646" name="PlaceHolder 3"/>
           <p:cNvSpPr>
             <a:spLocks noGrp="1"/>
           </p:cNvSpPr>
           <p:nvPr>
-            <p:ph type="sldNum" idx="105"/>
+            <p:ph type="sldNum" idx="104"/>
           </p:nvPr>
         </p:nvSpPr>
         <p:spPr>
@@ -7172,7 +7099,7 @@
                 <a:tab algn="l" pos="0"/>
               </a:tabLst>
             </a:pPr>
-            <a:fld id="{69714D6A-1057-429F-9A57-AAF571FD971A}" type="slidenum">
+            <a:fld id="{1927AA84-14B5-4C25-98DA-ACE7153EE9DA}" type="slidenum">
               <a:rPr b="0" lang="en-US" sz="1200" spc="-1" strike="noStrike">
                 <a:solidFill>
                   <a:schemeClr val="dk1"/>
@@ -7215,7 +7142,7 @@
       </p:grpSpPr>
       <p:sp>
         <p:nvSpPr>
-          <p:cNvPr id="653" name="PlaceHolder 1"/>
+          <p:cNvPr id="647" name="PlaceHolder 1"/>
           <p:cNvSpPr>
             <a:spLocks noGrp="1"/>
           </p:cNvSpPr>
@@ -7238,7 +7165,7 @@
       </p:sp>
       <p:sp>
         <p:nvSpPr>
-          <p:cNvPr id="654" name="PlaceHolder 2"/>
+          <p:cNvPr id="648" name="PlaceHolder 2"/>
           <p:cNvSpPr>
             <a:spLocks noGrp="1"/>
           </p:cNvSpPr>
@@ -7278,12 +7205,12 @@
       </p:sp>
       <p:sp>
         <p:nvSpPr>
-          <p:cNvPr id="655" name="PlaceHolder 3"/>
+          <p:cNvPr id="649" name="PlaceHolder 3"/>
           <p:cNvSpPr>
             <a:spLocks noGrp="1"/>
           </p:cNvSpPr>
           <p:nvPr>
-            <p:ph type="sldNum" idx="106"/>
+            <p:ph type="sldNum" idx="105"/>
           </p:nvPr>
         </p:nvSpPr>
         <p:spPr>
@@ -7331,7 +7258,7 @@
                 <a:tab algn="l" pos="0"/>
               </a:tabLst>
             </a:pPr>
-            <a:fld id="{BEFEDEC9-340D-4CE2-9528-0D9ECB1762CF}" type="slidenum">
+            <a:fld id="{2C8F8D3B-7F73-4C7D-8C4E-2762B4C19A21}" type="slidenum">
               <a:rPr b="0" lang="en-US" sz="1200" spc="-1" strike="noStrike">
                 <a:solidFill>
                   <a:schemeClr val="dk1"/>
@@ -7374,7 +7301,7 @@
       </p:grpSpPr>
       <p:sp>
         <p:nvSpPr>
-          <p:cNvPr id="656" name="PlaceHolder 1"/>
+          <p:cNvPr id="650" name="PlaceHolder 1"/>
           <p:cNvSpPr>
             <a:spLocks noGrp="1"/>
           </p:cNvSpPr>
@@ -7397,7 +7324,7 @@
       </p:sp>
       <p:sp>
         <p:nvSpPr>
-          <p:cNvPr id="657" name="PlaceHolder 2"/>
+          <p:cNvPr id="651" name="PlaceHolder 2"/>
           <p:cNvSpPr>
             <a:spLocks noGrp="1"/>
           </p:cNvSpPr>
@@ -7437,12 +7364,12 @@
       </p:sp>
       <p:sp>
         <p:nvSpPr>
-          <p:cNvPr id="658" name="PlaceHolder 3"/>
+          <p:cNvPr id="652" name="PlaceHolder 3"/>
           <p:cNvSpPr>
             <a:spLocks noGrp="1"/>
           </p:cNvSpPr>
           <p:nvPr>
-            <p:ph type="sldNum" idx="107"/>
+            <p:ph type="sldNum" idx="106"/>
           </p:nvPr>
         </p:nvSpPr>
         <p:spPr>
@@ -7490,7 +7417,7 @@
                 <a:tab algn="l" pos="0"/>
               </a:tabLst>
             </a:pPr>
-            <a:fld id="{1B60E098-ADFD-45AE-8EA3-43F4A7EBBC6C}" type="slidenum">
+            <a:fld id="{372F65B2-D41E-4FA9-85BE-A50E60928380}" type="slidenum">
               <a:rPr b="0" lang="en-US" sz="1200" spc="-1" strike="noStrike">
                 <a:solidFill>
                   <a:schemeClr val="dk1"/>
@@ -7533,7 +7460,7 @@
       </p:grpSpPr>
       <p:sp>
         <p:nvSpPr>
-          <p:cNvPr id="524" name="PlaceHolder 1"/>
+          <p:cNvPr id="518" name="PlaceHolder 1"/>
           <p:cNvSpPr>
             <a:spLocks noGrp="1"/>
           </p:cNvSpPr>
@@ -7556,7 +7483,7 @@
       </p:sp>
       <p:sp>
         <p:nvSpPr>
-          <p:cNvPr id="525" name="PlaceHolder 2"/>
+          <p:cNvPr id="519" name="PlaceHolder 2"/>
           <p:cNvSpPr>
             <a:spLocks noGrp="1"/>
           </p:cNvSpPr>
@@ -7596,12 +7523,12 @@
       </p:sp>
       <p:sp>
         <p:nvSpPr>
-          <p:cNvPr id="526" name="PlaceHolder 3"/>
+          <p:cNvPr id="520" name="PlaceHolder 3"/>
           <p:cNvSpPr>
             <a:spLocks noGrp="1"/>
           </p:cNvSpPr>
           <p:nvPr>
-            <p:ph type="sldNum" idx="63"/>
+            <p:ph type="sldNum" idx="62"/>
           </p:nvPr>
         </p:nvSpPr>
         <p:spPr>
@@ -7649,7 +7576,7 @@
                 <a:tab algn="l" pos="0"/>
               </a:tabLst>
             </a:pPr>
-            <a:fld id="{BF42A4A3-66AB-466E-8187-264F20AEE1C2}" type="slidenum">
+            <a:fld id="{719C935A-BE49-4376-B9EB-211EFF9665C1}" type="slidenum">
               <a:rPr b="0" lang="en-US" sz="1200" spc="-1" strike="noStrike">
                 <a:solidFill>
                   <a:schemeClr val="dk1"/>
@@ -7692,7 +7619,7 @@
       </p:grpSpPr>
       <p:sp>
         <p:nvSpPr>
-          <p:cNvPr id="659" name="PlaceHolder 1"/>
+          <p:cNvPr id="653" name="PlaceHolder 1"/>
           <p:cNvSpPr>
             <a:spLocks noGrp="1"/>
           </p:cNvSpPr>
@@ -7715,7 +7642,7 @@
       </p:sp>
       <p:sp>
         <p:nvSpPr>
-          <p:cNvPr id="660" name="PlaceHolder 2"/>
+          <p:cNvPr id="654" name="PlaceHolder 2"/>
           <p:cNvSpPr>
             <a:spLocks noGrp="1"/>
           </p:cNvSpPr>
@@ -7755,12 +7682,12 @@
       </p:sp>
       <p:sp>
         <p:nvSpPr>
-          <p:cNvPr id="661" name="PlaceHolder 3"/>
+          <p:cNvPr id="655" name="PlaceHolder 3"/>
           <p:cNvSpPr>
             <a:spLocks noGrp="1"/>
           </p:cNvSpPr>
           <p:nvPr>
-            <p:ph type="sldNum" idx="108"/>
+            <p:ph type="sldNum" idx="107"/>
           </p:nvPr>
         </p:nvSpPr>
         <p:spPr>
@@ -7808,7 +7735,7 @@
                 <a:tab algn="l" pos="0"/>
               </a:tabLst>
             </a:pPr>
-            <a:fld id="{58070B92-1E4D-447E-AD16-C8C08B2AB5DD}" type="slidenum">
+            <a:fld id="{B376721E-17CC-427D-96E5-0FCDFFDAD45D}" type="slidenum">
               <a:rPr b="0" lang="en-US" sz="1200" spc="-1" strike="noStrike">
                 <a:solidFill>
                   <a:schemeClr val="dk1"/>
@@ -7851,7 +7778,7 @@
       </p:grpSpPr>
       <p:sp>
         <p:nvSpPr>
-          <p:cNvPr id="662" name="PlaceHolder 1"/>
+          <p:cNvPr id="656" name="PlaceHolder 1"/>
           <p:cNvSpPr>
             <a:spLocks noGrp="1"/>
           </p:cNvSpPr>
@@ -7874,7 +7801,7 @@
       </p:sp>
       <p:sp>
         <p:nvSpPr>
-          <p:cNvPr id="663" name="PlaceHolder 2"/>
+          <p:cNvPr id="657" name="PlaceHolder 2"/>
           <p:cNvSpPr>
             <a:spLocks noGrp="1"/>
           </p:cNvSpPr>
@@ -7914,12 +7841,12 @@
       </p:sp>
       <p:sp>
         <p:nvSpPr>
-          <p:cNvPr id="664" name="PlaceHolder 3"/>
+          <p:cNvPr id="658" name="PlaceHolder 3"/>
           <p:cNvSpPr>
             <a:spLocks noGrp="1"/>
           </p:cNvSpPr>
           <p:nvPr>
-            <p:ph type="sldNum" idx="109"/>
+            <p:ph type="sldNum" idx="108"/>
           </p:nvPr>
         </p:nvSpPr>
         <p:spPr>
@@ -7967,7 +7894,7 @@
                 <a:tab algn="l" pos="0"/>
               </a:tabLst>
             </a:pPr>
-            <a:fld id="{6EBAC98D-8747-4C42-87ED-A3707737D076}" type="slidenum">
+            <a:fld id="{E97701D6-D05E-4977-9C5A-60B98427AA8E}" type="slidenum">
               <a:rPr b="0" lang="en-US" sz="1200" spc="-1" strike="noStrike">
                 <a:solidFill>
                   <a:schemeClr val="dk1"/>
@@ -8010,7 +7937,7 @@
       </p:grpSpPr>
       <p:sp>
         <p:nvSpPr>
-          <p:cNvPr id="665" name="PlaceHolder 1"/>
+          <p:cNvPr id="659" name="PlaceHolder 1"/>
           <p:cNvSpPr>
             <a:spLocks noGrp="1"/>
           </p:cNvSpPr>
@@ -8033,7 +7960,7 @@
       </p:sp>
       <p:sp>
         <p:nvSpPr>
-          <p:cNvPr id="666" name="PlaceHolder 2"/>
+          <p:cNvPr id="660" name="PlaceHolder 2"/>
           <p:cNvSpPr>
             <a:spLocks noGrp="1"/>
           </p:cNvSpPr>
@@ -8073,12 +8000,12 @@
       </p:sp>
       <p:sp>
         <p:nvSpPr>
-          <p:cNvPr id="667" name="PlaceHolder 3"/>
+          <p:cNvPr id="661" name="PlaceHolder 3"/>
           <p:cNvSpPr>
             <a:spLocks noGrp="1"/>
           </p:cNvSpPr>
           <p:nvPr>
-            <p:ph type="sldNum" idx="110"/>
+            <p:ph type="sldNum" idx="109"/>
           </p:nvPr>
         </p:nvSpPr>
         <p:spPr>
@@ -8126,7 +8053,7 @@
                 <a:tab algn="l" pos="0"/>
               </a:tabLst>
             </a:pPr>
-            <a:fld id="{2B3518BD-86C5-475C-94A3-2B6F5DB95999}" type="slidenum">
+            <a:fld id="{09692CB8-C0DA-44D4-A8AA-E6A0010CC97D}" type="slidenum">
               <a:rPr b="0" lang="en-US" sz="1200" spc="-1" strike="noStrike">
                 <a:solidFill>
                   <a:schemeClr val="dk1"/>
@@ -8169,7 +8096,7 @@
       </p:grpSpPr>
       <p:sp>
         <p:nvSpPr>
-          <p:cNvPr id="668" name="PlaceHolder 1"/>
+          <p:cNvPr id="662" name="PlaceHolder 1"/>
           <p:cNvSpPr>
             <a:spLocks noGrp="1"/>
           </p:cNvSpPr>
@@ -8192,7 +8119,7 @@
       </p:sp>
       <p:sp>
         <p:nvSpPr>
-          <p:cNvPr id="669" name="PlaceHolder 2"/>
+          <p:cNvPr id="663" name="PlaceHolder 2"/>
           <p:cNvSpPr>
             <a:spLocks noGrp="1"/>
           </p:cNvSpPr>
@@ -8232,12 +8159,12 @@
       </p:sp>
       <p:sp>
         <p:nvSpPr>
-          <p:cNvPr id="670" name="PlaceHolder 3"/>
+          <p:cNvPr id="664" name="PlaceHolder 3"/>
           <p:cNvSpPr>
             <a:spLocks noGrp="1"/>
           </p:cNvSpPr>
           <p:nvPr>
-            <p:ph type="sldNum" idx="111"/>
+            <p:ph type="sldNum" idx="110"/>
           </p:nvPr>
         </p:nvSpPr>
         <p:spPr>
@@ -8285,166 +8212,7 @@
                 <a:tab algn="l" pos="0"/>
               </a:tabLst>
             </a:pPr>
-            <a:fld id="{6A961152-950A-4C35-9EFA-305068CC959D}" type="slidenum">
-              <a:rPr b="0" lang="en-US" sz="1200" spc="-1" strike="noStrike">
-                <a:solidFill>
-                  <a:schemeClr val="dk1"/>
-                </a:solidFill>
-                <a:latin typeface="+mn-lt"/>
-                <a:ea typeface="+mn-ea"/>
-              </a:rPr>
-              <a:t>&lt;número&gt;</a:t>
-            </a:fld>
-            <a:endParaRPr b="0" lang="pt-BR" sz="1200" spc="-1" strike="noStrike">
-              <a:solidFill>
-                <a:srgbClr val="000000"/>
-              </a:solidFill>
-              <a:latin typeface="Times New Roman"/>
-            </a:endParaRPr>
-          </a:p>
-        </p:txBody>
-      </p:sp>
-    </p:spTree>
-  </p:cSld>
-</p:notes>
-</file>
-
-<file path=ppt/notesSlides/notesSlide54.xml><?xml version="1.0" encoding="utf-8"?>
-<p:notes xmlns:a="http://schemas.openxmlformats.org/drawingml/2006/main" xmlns:p="http://schemas.openxmlformats.org/presentationml/2006/main" xmlns:r="http://schemas.openxmlformats.org/officeDocument/2006/relationships" xmlns:p14="http://schemas.microsoft.com/office/powerpoint/2010/main" xmlns:p15="http://schemas.microsoft.com/office/powerpoint/2012/main" xmlns:mc="http://schemas.openxmlformats.org/markup-compatibility/2006">
-  <p:cSld>
-    <p:spTree>
-      <p:nvGrpSpPr>
-        <p:cNvPr id="1" name=""/>
-        <p:cNvGrpSpPr/>
-        <p:nvPr/>
-      </p:nvGrpSpPr>
-      <p:grpSpPr>
-        <a:xfrm>
-          <a:off x="0" y="0"/>
-          <a:ext cx="0" cy="0"/>
-          <a:chOff x="0" y="0"/>
-          <a:chExt cx="0" cy="0"/>
-        </a:xfrm>
-      </p:grpSpPr>
-      <p:sp>
-        <p:nvSpPr>
-          <p:cNvPr id="671" name="PlaceHolder 1"/>
-          <p:cNvSpPr>
-            <a:spLocks noGrp="1"/>
-          </p:cNvSpPr>
-          <p:nvPr>
-            <p:ph type="sldImg"/>
-          </p:nvPr>
-        </p:nvSpPr>
-        <p:spPr>
-          <a:xfrm>
-            <a:off x="685800" y="1143000"/>
-            <a:ext cx="5485320" cy="3085200"/>
-          </a:xfrm>
-          <a:prstGeom prst="rect">
-            <a:avLst/>
-          </a:prstGeom>
-          <a:ln w="0">
-            <a:noFill/>
-          </a:ln>
-        </p:spPr>
-      </p:sp>
-      <p:sp>
-        <p:nvSpPr>
-          <p:cNvPr id="672" name="PlaceHolder 2"/>
-          <p:cNvSpPr>
-            <a:spLocks noGrp="1"/>
-          </p:cNvSpPr>
-          <p:nvPr>
-            <p:ph type="body"/>
-          </p:nvPr>
-        </p:nvSpPr>
-        <p:spPr>
-          <a:xfrm>
-            <a:off x="685800" y="4400640"/>
-            <a:ext cx="5485320" cy="3599280"/>
-          </a:xfrm>
-          <a:prstGeom prst="rect">
-            <a:avLst/>
-          </a:prstGeom>
-          <a:noFill/>
-          <a:ln w="0">
-            <a:noFill/>
-          </a:ln>
-        </p:spPr>
-        <p:txBody>
-          <a:bodyPr lIns="91440" rIns="91440" tIns="45720" bIns="45720" anchor="t">
-            <a:noAutofit/>
-          </a:bodyPr>
-          <a:p>
-            <a:pPr marL="216000" indent="-216000">
-              <a:buNone/>
-            </a:pPr>
-            <a:endParaRPr b="0" lang="pt-BR" sz="1800" spc="-1" strike="noStrike">
-              <a:solidFill>
-                <a:srgbClr val="000000"/>
-              </a:solidFill>
-              <a:latin typeface="Arial"/>
-            </a:endParaRPr>
-          </a:p>
-        </p:txBody>
-      </p:sp>
-      <p:sp>
-        <p:nvSpPr>
-          <p:cNvPr id="673" name="PlaceHolder 3"/>
-          <p:cNvSpPr>
-            <a:spLocks noGrp="1"/>
-          </p:cNvSpPr>
-          <p:nvPr>
-            <p:ph type="sldNum" idx="112"/>
-          </p:nvPr>
-        </p:nvSpPr>
-        <p:spPr>
-          <a:xfrm>
-            <a:off x="3884760" y="8685360"/>
-            <a:ext cx="2970720" cy="457560"/>
-          </a:xfrm>
-          <a:prstGeom prst="rect">
-            <a:avLst/>
-          </a:prstGeom>
-          <a:noFill/>
-          <a:ln w="0">
-            <a:noFill/>
-          </a:ln>
-        </p:spPr>
-        <p:txBody>
-          <a:bodyPr lIns="91440" rIns="91440" tIns="45720" bIns="45720" anchor="b">
-            <a:noAutofit/>
-          </a:bodyPr>
-          <a:lstStyle>
-            <a:lvl1pPr indent="0" algn="r" defTabSz="914400">
-              <a:lnSpc>
-                <a:spcPct val="100000"/>
-              </a:lnSpc>
-              <a:buNone/>
-              <a:tabLst>
-                <a:tab algn="l" pos="0"/>
-              </a:tabLst>
-              <a:defRPr b="0" lang="en-US" sz="1200" spc="-1" strike="noStrike">
-                <a:solidFill>
-                  <a:schemeClr val="dk1"/>
-                </a:solidFill>
-                <a:latin typeface="+mn-lt"/>
-                <a:ea typeface="+mn-ea"/>
-              </a:defRPr>
-            </a:lvl1pPr>
-          </a:lstStyle>
-          <a:p>
-            <a:pPr indent="0" algn="r" defTabSz="914400">
-              <a:lnSpc>
-                <a:spcPct val="100000"/>
-              </a:lnSpc>
-              <a:buNone/>
-              <a:tabLst>
-                <a:tab algn="l" pos="0"/>
-              </a:tabLst>
-            </a:pPr>
-            <a:fld id="{3846A847-E3A1-45D5-976D-C4B2AFC343AF}" type="slidenum">
+            <a:fld id="{70CEECF5-8140-47DA-B7C0-42A891F909A6}" type="slidenum">
               <a:rPr b="0" lang="en-US" sz="1200" spc="-1" strike="noStrike">
                 <a:solidFill>
                   <a:schemeClr val="dk1"/>
@@ -8487,7 +8255,7 @@
       </p:grpSpPr>
       <p:sp>
         <p:nvSpPr>
-          <p:cNvPr id="527" name="PlaceHolder 1"/>
+          <p:cNvPr id="521" name="PlaceHolder 1"/>
           <p:cNvSpPr>
             <a:spLocks noGrp="1"/>
           </p:cNvSpPr>
@@ -8510,7 +8278,7 @@
       </p:sp>
       <p:sp>
         <p:nvSpPr>
-          <p:cNvPr id="528" name="PlaceHolder 2"/>
+          <p:cNvPr id="522" name="PlaceHolder 2"/>
           <p:cNvSpPr>
             <a:spLocks noGrp="1"/>
           </p:cNvSpPr>
@@ -8550,12 +8318,12 @@
       </p:sp>
       <p:sp>
         <p:nvSpPr>
-          <p:cNvPr id="529" name="PlaceHolder 3"/>
+          <p:cNvPr id="523" name="PlaceHolder 3"/>
           <p:cNvSpPr>
             <a:spLocks noGrp="1"/>
           </p:cNvSpPr>
           <p:nvPr>
-            <p:ph type="sldNum" idx="64"/>
+            <p:ph type="sldNum" idx="63"/>
           </p:nvPr>
         </p:nvSpPr>
         <p:spPr>
@@ -8603,7 +8371,7 @@
                 <a:tab algn="l" pos="0"/>
               </a:tabLst>
             </a:pPr>
-            <a:fld id="{07245E88-A600-4E85-9CF4-22C62CF7439C}" type="slidenum">
+            <a:fld id="{123B52E0-3EA0-4646-ABF9-337DFBA7D9C3}" type="slidenum">
               <a:rPr b="0" lang="en-US" sz="1200" spc="-1" strike="noStrike">
                 <a:solidFill>
                   <a:schemeClr val="dk1"/>
@@ -8646,7 +8414,7 @@
       </p:grpSpPr>
       <p:sp>
         <p:nvSpPr>
-          <p:cNvPr id="530" name="PlaceHolder 1"/>
+          <p:cNvPr id="524" name="PlaceHolder 1"/>
           <p:cNvSpPr>
             <a:spLocks noGrp="1"/>
           </p:cNvSpPr>
@@ -8669,7 +8437,7 @@
       </p:sp>
       <p:sp>
         <p:nvSpPr>
-          <p:cNvPr id="531" name="PlaceHolder 2"/>
+          <p:cNvPr id="525" name="PlaceHolder 2"/>
           <p:cNvSpPr>
             <a:spLocks noGrp="1"/>
           </p:cNvSpPr>
@@ -8709,12 +8477,12 @@
       </p:sp>
       <p:sp>
         <p:nvSpPr>
-          <p:cNvPr id="532" name="PlaceHolder 3"/>
+          <p:cNvPr id="526" name="PlaceHolder 3"/>
           <p:cNvSpPr>
             <a:spLocks noGrp="1"/>
           </p:cNvSpPr>
           <p:nvPr>
-            <p:ph type="sldNum" idx="65"/>
+            <p:ph type="sldNum" idx="64"/>
           </p:nvPr>
         </p:nvSpPr>
         <p:spPr>
@@ -8762,7 +8530,7 @@
                 <a:tab algn="l" pos="0"/>
               </a:tabLst>
             </a:pPr>
-            <a:fld id="{5E8608A6-0416-4D21-B1CF-395F4242B72F}" type="slidenum">
+            <a:fld id="{932DD745-4216-4241-B8A0-D405F6179FF6}" type="slidenum">
               <a:rPr b="0" lang="en-US" sz="1200" spc="-1" strike="noStrike">
                 <a:solidFill>
                   <a:schemeClr val="dk1"/>
@@ -8805,7 +8573,7 @@
       </p:grpSpPr>
       <p:sp>
         <p:nvSpPr>
-          <p:cNvPr id="533" name="PlaceHolder 1"/>
+          <p:cNvPr id="527" name="PlaceHolder 1"/>
           <p:cNvSpPr>
             <a:spLocks noGrp="1"/>
           </p:cNvSpPr>
@@ -8828,7 +8596,7 @@
       </p:sp>
       <p:sp>
         <p:nvSpPr>
-          <p:cNvPr id="534" name="PlaceHolder 2"/>
+          <p:cNvPr id="528" name="PlaceHolder 2"/>
           <p:cNvSpPr>
             <a:spLocks noGrp="1"/>
           </p:cNvSpPr>
@@ -8868,12 +8636,12 @@
       </p:sp>
       <p:sp>
         <p:nvSpPr>
-          <p:cNvPr id="535" name="PlaceHolder 3"/>
+          <p:cNvPr id="529" name="PlaceHolder 3"/>
           <p:cNvSpPr>
             <a:spLocks noGrp="1"/>
           </p:cNvSpPr>
           <p:nvPr>
-            <p:ph type="sldNum" idx="66"/>
+            <p:ph type="sldNum" idx="65"/>
           </p:nvPr>
         </p:nvSpPr>
         <p:spPr>
@@ -8921,7 +8689,7 @@
                 <a:tab algn="l" pos="0"/>
               </a:tabLst>
             </a:pPr>
-            <a:fld id="{44610C0E-D5E2-406E-BC0E-553058583DF3}" type="slidenum">
+            <a:fld id="{7C4A5457-FF9E-47E2-AFA1-46DCA42F9BC2}" type="slidenum">
               <a:rPr b="0" lang="en-US" sz="1200" spc="-1" strike="noStrike">
                 <a:solidFill>
                   <a:schemeClr val="dk1"/>
@@ -8964,7 +8732,7 @@
       </p:grpSpPr>
       <p:sp>
         <p:nvSpPr>
-          <p:cNvPr id="536" name="PlaceHolder 1"/>
+          <p:cNvPr id="530" name="PlaceHolder 1"/>
           <p:cNvSpPr>
             <a:spLocks noGrp="1"/>
           </p:cNvSpPr>
@@ -8987,7 +8755,7 @@
       </p:sp>
       <p:sp>
         <p:nvSpPr>
-          <p:cNvPr id="537" name="PlaceHolder 2"/>
+          <p:cNvPr id="531" name="PlaceHolder 2"/>
           <p:cNvSpPr>
             <a:spLocks noGrp="1"/>
           </p:cNvSpPr>
@@ -9027,12 +8795,12 @@
       </p:sp>
       <p:sp>
         <p:nvSpPr>
-          <p:cNvPr id="538" name="PlaceHolder 3"/>
+          <p:cNvPr id="532" name="PlaceHolder 3"/>
           <p:cNvSpPr>
             <a:spLocks noGrp="1"/>
           </p:cNvSpPr>
           <p:nvPr>
-            <p:ph type="sldNum" idx="67"/>
+            <p:ph type="sldNum" idx="66"/>
           </p:nvPr>
         </p:nvSpPr>
         <p:spPr>
@@ -9080,7 +8848,7 @@
                 <a:tab algn="l" pos="0"/>
               </a:tabLst>
             </a:pPr>
-            <a:fld id="{699F55C2-7A05-431C-A0A2-B4B659F07C0F}" type="slidenum">
+            <a:fld id="{6AB90D4B-80F7-4BB1-B16C-F98503F56D49}" type="slidenum">
               <a:rPr b="0" lang="en-US" sz="1200" spc="-1" strike="noStrike">
                 <a:solidFill>
                   <a:schemeClr val="dk1"/>
@@ -9179,7 +8947,7 @@
         <p:txBody>
           <a:bodyPr/>
           <a:p>
-            <a:fld id="{189B968A-F740-4EC6-88BD-C5E0E4B2931A}" type="slidenum">
+            <a:fld id="{FFCF03BE-9528-46CC-99DD-D7851F90E483}" type="slidenum">
               <a:t>&lt;#&gt;</a:t>
             </a:fld>
           </a:p>
@@ -9221,7 +8989,7 @@
         <p:txBody>
           <a:bodyPr/>
           <a:p>
-            <a:fld id="{D2BA623B-46CE-4E4A-9A29-DE001576D4EC}" type="slidenum">
+            <a:fld id="{199B4E7C-7D1F-4084-8F05-AA362F06B16A}" type="slidenum">
               <a:t>&lt;#&gt;</a:t>
             </a:fld>
           </a:p>
@@ -9327,7 +9095,7 @@
                 </a:solidFill>
                 <a:latin typeface="Arial"/>
               </a:rPr>
-              <a:t>Cli</a:t>
+              <a:t>Clique para </a:t>
             </a:r>
             <a:r>
               <a:rPr b="0" lang="pt-BR" sz="4400" spc="-1" strike="noStrike">
@@ -9336,7 +9104,7 @@
                 </a:solidFill>
                 <a:latin typeface="Arial"/>
               </a:rPr>
-              <a:t>qu</a:t>
+              <a:t>editar o </a:t>
             </a:r>
             <a:r>
               <a:rPr b="0" lang="pt-BR" sz="4400" spc="-1" strike="noStrike">
@@ -9345,7 +9113,7 @@
                 </a:solidFill>
                 <a:latin typeface="Arial"/>
               </a:rPr>
-              <a:t>e </a:t>
+              <a:t>formato do </a:t>
             </a:r>
             <a:r>
               <a:rPr b="0" lang="pt-BR" sz="4400" spc="-1" strike="noStrike">
@@ -9354,7 +9122,7 @@
                 </a:solidFill>
                 <a:latin typeface="Arial"/>
               </a:rPr>
-              <a:t>par</a:t>
+              <a:t>texto do </a:t>
             </a:r>
             <a:r>
               <a:rPr b="0" lang="pt-BR" sz="4400" spc="-1" strike="noStrike">
@@ -9363,115 +9131,7 @@
                 </a:solidFill>
                 <a:latin typeface="Arial"/>
               </a:rPr>
-              <a:t>a </a:t>
-            </a:r>
-            <a:r>
-              <a:rPr b="0" lang="pt-BR" sz="4400" spc="-1" strike="noStrike">
-                <a:solidFill>
-                  <a:srgbClr val="ffffff"/>
-                </a:solidFill>
-                <a:latin typeface="Arial"/>
-              </a:rPr>
-              <a:t>edit</a:t>
-            </a:r>
-            <a:r>
-              <a:rPr b="0" lang="pt-BR" sz="4400" spc="-1" strike="noStrike">
-                <a:solidFill>
-                  <a:srgbClr val="ffffff"/>
-                </a:solidFill>
-                <a:latin typeface="Arial"/>
-              </a:rPr>
-              <a:t>ar </a:t>
-            </a:r>
-            <a:r>
-              <a:rPr b="0" lang="pt-BR" sz="4400" spc="-1" strike="noStrike">
-                <a:solidFill>
-                  <a:srgbClr val="ffffff"/>
-                </a:solidFill>
-                <a:latin typeface="Arial"/>
-              </a:rPr>
-              <a:t>o </a:t>
-            </a:r>
-            <a:r>
-              <a:rPr b="0" lang="pt-BR" sz="4400" spc="-1" strike="noStrike">
-                <a:solidFill>
-                  <a:srgbClr val="ffffff"/>
-                </a:solidFill>
-                <a:latin typeface="Arial"/>
-              </a:rPr>
-              <a:t>for</a:t>
-            </a:r>
-            <a:r>
-              <a:rPr b="0" lang="pt-BR" sz="4400" spc="-1" strike="noStrike">
-                <a:solidFill>
-                  <a:srgbClr val="ffffff"/>
-                </a:solidFill>
-                <a:latin typeface="Arial"/>
-              </a:rPr>
-              <a:t>ma</a:t>
-            </a:r>
-            <a:r>
-              <a:rPr b="0" lang="pt-BR" sz="4400" spc="-1" strike="noStrike">
-                <a:solidFill>
-                  <a:srgbClr val="ffffff"/>
-                </a:solidFill>
-                <a:latin typeface="Arial"/>
-              </a:rPr>
-              <a:t>to </a:t>
-            </a:r>
-            <a:r>
-              <a:rPr b="0" lang="pt-BR" sz="4400" spc="-1" strike="noStrike">
-                <a:solidFill>
-                  <a:srgbClr val="ffffff"/>
-                </a:solidFill>
-                <a:latin typeface="Arial"/>
-              </a:rPr>
-              <a:t>do </a:t>
-            </a:r>
-            <a:r>
-              <a:rPr b="0" lang="pt-BR" sz="4400" spc="-1" strike="noStrike">
-                <a:solidFill>
-                  <a:srgbClr val="ffffff"/>
-                </a:solidFill>
-                <a:latin typeface="Arial"/>
-              </a:rPr>
-              <a:t>text</a:t>
-            </a:r>
-            <a:r>
-              <a:rPr b="0" lang="pt-BR" sz="4400" spc="-1" strike="noStrike">
-                <a:solidFill>
-                  <a:srgbClr val="ffffff"/>
-                </a:solidFill>
-                <a:latin typeface="Arial"/>
-              </a:rPr>
-              <a:t>o </a:t>
-            </a:r>
-            <a:r>
-              <a:rPr b="0" lang="pt-BR" sz="4400" spc="-1" strike="noStrike">
-                <a:solidFill>
-                  <a:srgbClr val="ffffff"/>
-                </a:solidFill>
-                <a:latin typeface="Arial"/>
-              </a:rPr>
-              <a:t>do </a:t>
-            </a:r>
-            <a:r>
-              <a:rPr b="0" lang="pt-BR" sz="4400" spc="-1" strike="noStrike">
-                <a:solidFill>
-                  <a:srgbClr val="ffffff"/>
-                </a:solidFill>
-                <a:latin typeface="Arial"/>
-              </a:rPr>
-              <a:t>títul</a:t>
-            </a:r>
-            <a:r>
-              <a:rPr b="0" lang="pt-BR" sz="4400" spc="-1" strike="noStrike">
-                <a:solidFill>
-                  <a:srgbClr val="ffffff"/>
-                </a:solidFill>
-                <a:latin typeface="Arial"/>
-              </a:rPr>
-              <a:t>o</a:t>
+              <a:t>título</a:t>
             </a:r>
             <a:endParaRPr b="0" lang="pt-BR" sz="4400" spc="-1" strike="noStrike">
               <a:solidFill>
@@ -9528,16 +9188,7 @@
                 </a:solidFill>
                 <a:latin typeface="Arial"/>
               </a:rPr>
-              <a:t>Clique para editar o formato de </a:t>
-            </a:r>
-            <a:r>
-              <a:rPr b="0" lang="pt-BR" sz="3200" spc="-1" strike="noStrike">
-                <a:solidFill>
-                  <a:srgbClr val="ffffff"/>
-                </a:solidFill>
-                <a:latin typeface="Arial"/>
-              </a:rPr>
-              <a:t>texto dos tópicos</a:t>
+              <a:t>Clique para editar o formato de texto dos tópicos</a:t>
             </a:r>
             <a:endParaRPr b="0" lang="pt-BR" sz="3200" spc="-1" strike="noStrike">
               <a:solidFill>
@@ -9859,7 +9510,7 @@
                 <a:tab algn="l" pos="0"/>
               </a:tabLst>
             </a:pPr>
-            <a:fld id="{52F6889E-0A50-4CF2-A8E2-64D5BE4CACC0}" type="slidenum">
+            <a:fld id="{D148E06B-2BC7-485B-A40F-BBF7F39211F9}" type="slidenum">
               <a:rPr b="0" lang="en-US" sz="1000" spc="-1" strike="noStrike">
                 <a:solidFill>
                   <a:schemeClr val="accent6"/>
@@ -9915,7 +9566,7 @@
                 </a:solidFill>
                 <a:latin typeface="Arial"/>
               </a:rPr>
-              <a:t>Clique para editar o </a:t>
+              <a:t>Clique para </a:t>
             </a:r>
             <a:r>
               <a:rPr b="0" lang="pt-BR" sz="4400" spc="-1" strike="noStrike">
@@ -9924,7 +9575,25 @@
                 </a:solidFill>
                 <a:latin typeface="Arial"/>
               </a:rPr>
-              <a:t>formato do texto do </a:t>
+              <a:t>editar o </a:t>
+            </a:r>
+            <a:r>
+              <a:rPr b="0" lang="pt-BR" sz="4400" spc="-1" strike="noStrike">
+                <a:solidFill>
+                  <a:srgbClr val="000000"/>
+                </a:solidFill>
+                <a:latin typeface="Arial"/>
+              </a:rPr>
+              <a:t>formato do </a:t>
+            </a:r>
+            <a:r>
+              <a:rPr b="0" lang="pt-BR" sz="4400" spc="-1" strike="noStrike">
+                <a:solidFill>
+                  <a:srgbClr val="000000"/>
+                </a:solidFill>
+                <a:latin typeface="Arial"/>
+              </a:rPr>
+              <a:t>texto do </a:t>
             </a:r>
             <a:r>
               <a:rPr b="0" lang="pt-BR" sz="4400" spc="-1" strike="noStrike">
@@ -9990,7 +9659,16 @@
                 </a:solidFill>
                 <a:latin typeface="Arial"/>
               </a:rPr>
-              <a:t>Clique para editar o formato de texto dos tópicos</a:t>
+              <a:t>Clique para editar o formato de </a:t>
+            </a:r>
+            <a:r>
+              <a:rPr b="0" lang="pt-BR" sz="3200" spc="-1" strike="noStrike">
+                <a:solidFill>
+                  <a:srgbClr val="000000"/>
+                </a:solidFill>
+                <a:latin typeface="Arial"/>
+              </a:rPr>
+              <a:t>texto dos tópicos</a:t>
             </a:r>
             <a:endParaRPr b="0" lang="pt-BR" sz="3200" spc="-1" strike="noStrike">
               <a:solidFill>
@@ -10312,7 +9990,7 @@
                 <a:tab algn="l" pos="0"/>
               </a:tabLst>
             </a:pPr>
-            <a:fld id="{3DE9006C-537B-4EDA-9D99-0F94689829AF}" type="slidenum">
+            <a:fld id="{43A98913-BAE8-4D99-8788-50CB09342467}" type="slidenum">
               <a:rPr b="0" lang="en-US" sz="1000" spc="-1" strike="noStrike">
                 <a:solidFill>
                   <a:schemeClr val="accent6"/>
@@ -10368,7 +10046,7 @@
                 </a:solidFill>
                 <a:latin typeface="Arial"/>
               </a:rPr>
-              <a:t>Clique para editar o formato do </a:t>
+              <a:t>Clique para </a:t>
             </a:r>
             <a:r>
               <a:rPr b="0" lang="pt-BR" sz="4400" spc="-1" strike="noStrike">
@@ -10377,7 +10055,34 @@
                 </a:solidFill>
                 <a:latin typeface="Arial"/>
               </a:rPr>
-              <a:t>texto do título</a:t>
+              <a:t>editar o </a:t>
+            </a:r>
+            <a:r>
+              <a:rPr b="0" lang="pt-BR" sz="4400" spc="-1" strike="noStrike">
+                <a:solidFill>
+                  <a:srgbClr val="000000"/>
+                </a:solidFill>
+                <a:latin typeface="Arial"/>
+              </a:rPr>
+              <a:t>formato do </a:t>
+            </a:r>
+            <a:r>
+              <a:rPr b="0" lang="pt-BR" sz="4400" spc="-1" strike="noStrike">
+                <a:solidFill>
+                  <a:srgbClr val="000000"/>
+                </a:solidFill>
+                <a:latin typeface="Arial"/>
+              </a:rPr>
+              <a:t>texto do </a:t>
+            </a:r>
+            <a:r>
+              <a:rPr b="0" lang="pt-BR" sz="4400" spc="-1" strike="noStrike">
+                <a:solidFill>
+                  <a:srgbClr val="000000"/>
+                </a:solidFill>
+                <a:latin typeface="Arial"/>
+              </a:rPr>
+              <a:t>título</a:t>
             </a:r>
             <a:endParaRPr b="0" lang="pt-BR" sz="4400" spc="-1" strike="noStrike">
               <a:solidFill>
@@ -10683,16 +10388,7 @@
                 </a:solidFill>
                 <a:latin typeface="Calibri"/>
               </a:rPr>
-              <a:t>Execução manual: cenários </a:t>
-            </a:r>
-            <a:r>
-              <a:rPr b="1" lang="en-US" sz="4400" spc="-1" strike="noStrike">
-                <a:solidFill>
-                  <a:schemeClr val="lt1"/>
-                </a:solidFill>
-                <a:latin typeface="Calibri"/>
-              </a:rPr>
-              <a:t>exploratórios</a:t>
+              <a:t>Execução manual: cenários exploratórios</a:t>
             </a:r>
             <a:endParaRPr b="0" lang="pt-BR" sz="4400" spc="-1" strike="noStrike">
               <a:solidFill>
@@ -11165,7 +10861,7 @@
                 <a:tab algn="l" pos="0"/>
               </a:tabLst>
             </a:pPr>
-            <a:fld id="{5EEA388A-D019-4BFF-8255-791ADDB07EA5}" type="slidenum">
+            <a:fld id="{CAE6EA3C-DF9E-4257-9FB6-36ED86B8A5AF}" type="slidenum">
               <a:rPr b="0" lang="en-US" sz="1000" spc="-1" strike="noStrike">
                 <a:solidFill>
                   <a:schemeClr val="accent6"/>
@@ -12047,7 +11743,7 @@
                 <a:tab algn="l" pos="0"/>
               </a:tabLst>
             </a:pPr>
-            <a:fld id="{52C7CD99-17A6-4550-B146-E6D7ACF9B972}" type="slidenum">
+            <a:fld id="{7D45B239-F1B2-4B4C-A3A6-B8E315C62FC1}" type="slidenum">
               <a:rPr b="0" lang="en-US" sz="1000" spc="-1" strike="noStrike">
                 <a:solidFill>
                   <a:schemeClr val="accent6"/>
@@ -12380,7 +12076,7 @@
                 <a:tab algn="l" pos="0"/>
               </a:tabLst>
             </a:pPr>
-            <a:fld id="{205077CA-AFE0-4990-A960-9D89EE5E546C}" type="slidenum">
+            <a:fld id="{A54AC040-C9BF-4F3D-B885-9A3F6B7A354E}" type="slidenum">
               <a:rPr b="0" lang="en-US" sz="1000" spc="-1" strike="noStrike">
                 <a:solidFill>
                   <a:schemeClr val="accent6"/>
@@ -13262,7 +12958,7 @@
                 <a:tab algn="l" pos="0"/>
               </a:tabLst>
             </a:pPr>
-            <a:fld id="{4019C170-38F0-4107-8723-DF5CD388E01C}" type="slidenum">
+            <a:fld id="{B88A42EB-81C8-4748-BE47-E0634323CB1D}" type="slidenum">
               <a:rPr b="0" lang="en-US" sz="1000" spc="-1" strike="noStrike">
                 <a:solidFill>
                   <a:schemeClr val="accent6"/>
@@ -13595,7 +13291,7 @@
                 <a:tab algn="l" pos="0"/>
               </a:tabLst>
             </a:pPr>
-            <a:fld id="{FC5CA257-DB6B-4CF5-B3F4-65881BC35D33}" type="slidenum">
+            <a:fld id="{405CF359-C14C-41B1-8EC4-C38D45064BF1}" type="slidenum">
               <a:rPr b="0" lang="en-US" sz="1000" spc="-1" strike="noStrike">
                 <a:solidFill>
                   <a:schemeClr val="accent6"/>
@@ -14477,7 +14173,7 @@
                 <a:tab algn="l" pos="0"/>
               </a:tabLst>
             </a:pPr>
-            <a:fld id="{6F93CA9E-F918-4799-BC7E-21C301168670}" type="slidenum">
+            <a:fld id="{A0381D98-E631-4CB0-8CA4-9D64EEF74ABA}" type="slidenum">
               <a:rPr b="0" lang="en-US" sz="1000" spc="-1" strike="noStrike">
                 <a:solidFill>
                   <a:schemeClr val="accent6"/>
@@ -14745,7 +14441,25 @@
                 </a:solidFill>
                 <a:latin typeface="Calibri"/>
               </a:rPr>
-              <a:t>Corpo do cálculo com campos atípicos</a:t>
+              <a:t>Corpo do cálculo </a:t>
+            </a:r>
+            <a:r>
+              <a:rPr b="1" lang="en-US" sz="3000" spc="-1" strike="noStrike">
+                <a:solidFill>
+                  <a:schemeClr val="dk2"/>
+                </a:solidFill>
+                <a:latin typeface="Calibri"/>
+              </a:rPr>
+              <a:t>com campos </a:t>
+            </a:r>
+            <a:r>
+              <a:rPr b="1" lang="en-US" sz="3000" spc="-1" strike="noStrike">
+                <a:solidFill>
+                  <a:schemeClr val="dk2"/>
+                </a:solidFill>
+                <a:latin typeface="Calibri"/>
+              </a:rPr>
+              <a:t>atípicos</a:t>
             </a:r>
             <a:endParaRPr b="0" lang="pt-BR" sz="3000" spc="-1" strike="noStrike">
               <a:solidFill>
@@ -14810,7 +14524,7 @@
                 <a:tab algn="l" pos="0"/>
               </a:tabLst>
             </a:pPr>
-            <a:fld id="{7B70B340-A4AF-4768-9EBF-08704279CD83}" type="slidenum">
+            <a:fld id="{B9C8FABD-3252-45BC-A8C4-B3B571499BAD}" type="slidenum">
               <a:rPr b="0" lang="en-US" sz="1000" spc="-1" strike="noStrike">
                 <a:solidFill>
                   <a:schemeClr val="accent6"/>
@@ -15101,7 +14815,16 @@
                 </a:solidFill>
                 <a:latin typeface="Calibri"/>
               </a:rPr>
-              <a:t>Corpo do cálculo com campos atípicos</a:t>
+              <a:t>Corpo do cálculo com </a:t>
+            </a:r>
+            <a:r>
+              <a:rPr b="1" lang="en-US" sz="3000" spc="-1" strike="noStrike">
+                <a:solidFill>
+                  <a:schemeClr val="dk2"/>
+                </a:solidFill>
+                <a:latin typeface="Calibri"/>
+              </a:rPr>
+              <a:t>campos atípicos</a:t>
             </a:r>
             <a:endParaRPr b="0" lang="pt-BR" sz="3000" spc="-1" strike="noStrike">
               <a:solidFill>
@@ -15692,7 +15415,7 @@
                 <a:tab algn="l" pos="0"/>
               </a:tabLst>
             </a:pPr>
-            <a:fld id="{E5DAA57A-D49A-4B81-9E9A-95046027BD3E}" type="slidenum">
+            <a:fld id="{EB64595B-FFAD-45D6-8ACA-057DA8783946}" type="slidenum">
               <a:rPr b="0" lang="en-US" sz="1000" spc="-1" strike="noStrike">
                 <a:solidFill>
                   <a:schemeClr val="accent6"/>
@@ -16025,7 +15748,7 @@
                 <a:tab algn="l" pos="0"/>
               </a:tabLst>
             </a:pPr>
-            <a:fld id="{60EAC12A-AECF-4BB4-A000-446D06F65F80}" type="slidenum">
+            <a:fld id="{7C31BCD7-5CF7-41F3-8A4C-BC958305A67E}" type="slidenum">
               <a:rPr b="0" lang="en-US" sz="1000" spc="-1" strike="noStrike">
                 <a:solidFill>
                   <a:schemeClr val="accent6"/>
@@ -16907,7 +16630,7 @@
                 <a:tab algn="l" pos="0"/>
               </a:tabLst>
             </a:pPr>
-            <a:fld id="{38D3A0B2-A1D3-45AA-95F3-7D20A22DFA88}" type="slidenum">
+            <a:fld id="{32F8FC45-5232-4786-B727-83B17DE33901}" type="slidenum">
               <a:rPr b="0" lang="en-US" sz="1000" spc="-1" strike="noStrike">
                 <a:solidFill>
                   <a:schemeClr val="accent6"/>
@@ -16999,88 +16722,7 @@
                 </a:solidFill>
                 <a:latin typeface="Calibri"/>
               </a:rPr>
-              <a:t>Co</a:t>
-            </a:r>
-            <a:r>
-              <a:rPr b="1" lang="en-US" sz="3200" spc="-1" strike="noStrike">
-                <a:solidFill>
-                  <a:schemeClr val="dk2"/>
-                </a:solidFill>
-                <a:latin typeface="Calibri"/>
-              </a:rPr>
-              <a:t>m</a:t>
-            </a:r>
-            <a:r>
-              <a:rPr b="1" lang="en-US" sz="3200" spc="-1" strike="noStrike">
-                <a:solidFill>
-                  <a:schemeClr val="dk2"/>
-                </a:solidFill>
-                <a:latin typeface="Calibri"/>
-              </a:rPr>
-              <a:t>o </a:t>
-            </a:r>
-            <a:r>
-              <a:rPr b="1" lang="en-US" sz="3200" spc="-1" strike="noStrike">
-                <a:solidFill>
-                  <a:schemeClr val="dk2"/>
-                </a:solidFill>
-                <a:latin typeface="Calibri"/>
-              </a:rPr>
-              <a:t>us</a:t>
-            </a:r>
-            <a:r>
-              <a:rPr b="1" lang="en-US" sz="3200" spc="-1" strike="noStrike">
-                <a:solidFill>
-                  <a:schemeClr val="dk2"/>
-                </a:solidFill>
-                <a:latin typeface="Calibri"/>
-              </a:rPr>
-              <a:t>ar </a:t>
-            </a:r>
-            <a:r>
-              <a:rPr b="1" lang="en-US" sz="3200" spc="-1" strike="noStrike">
-                <a:solidFill>
-                  <a:schemeClr val="dk2"/>
-                </a:solidFill>
-                <a:latin typeface="Calibri"/>
-              </a:rPr>
-              <a:t>es</a:t>
-            </a:r>
-            <a:r>
-              <a:rPr b="1" lang="en-US" sz="3200" spc="-1" strike="noStrike">
-                <a:solidFill>
-                  <a:schemeClr val="dk2"/>
-                </a:solidFill>
-                <a:latin typeface="Calibri"/>
-              </a:rPr>
-              <a:t>te </a:t>
-            </a:r>
-            <a:r>
-              <a:rPr b="1" lang="en-US" sz="3200" spc="-1" strike="noStrike">
-                <a:solidFill>
-                  <a:schemeClr val="dk2"/>
-                </a:solidFill>
-                <a:latin typeface="Calibri"/>
-              </a:rPr>
-              <a:t>ro</a:t>
-            </a:r>
-            <a:r>
-              <a:rPr b="1" lang="en-US" sz="3200" spc="-1" strike="noStrike">
-                <a:solidFill>
-                  <a:schemeClr val="dk2"/>
-                </a:solidFill>
-                <a:latin typeface="Calibri"/>
-              </a:rPr>
-              <a:t>tei</a:t>
-            </a:r>
-            <a:r>
-              <a:rPr b="1" lang="en-US" sz="3200" spc="-1" strike="noStrike">
-                <a:solidFill>
-                  <a:schemeClr val="dk2"/>
-                </a:solidFill>
-                <a:latin typeface="Calibri"/>
-              </a:rPr>
-              <a:t>ro</a:t>
+              <a:t>Como usar este roteiro</a:t>
             </a:r>
             <a:endParaRPr b="0" lang="pt-BR" sz="3200" spc="-1" strike="noStrike">
               <a:solidFill>
@@ -18569,7 +18211,7 @@
                 <a:tab algn="l" pos="0"/>
               </a:tabLst>
             </a:pPr>
-            <a:fld id="{13487225-269B-4510-A2CC-FC098228E78D}" type="slidenum">
+            <a:fld id="{6474075A-64AD-4A45-AFB4-EAD821E7E99E}" type="slidenum">
               <a:rPr b="0" lang="en-US" sz="1000" spc="-1" strike="noStrike">
                 <a:solidFill>
                   <a:schemeClr val="accent6"/>
@@ -18902,7 +18544,7 @@
                 <a:tab algn="l" pos="0"/>
               </a:tabLst>
             </a:pPr>
-            <a:fld id="{1964A1A4-1A5E-4EC5-8E4A-8DF83030CF5A}" type="slidenum">
+            <a:fld id="{BBF429AB-9195-4F0E-AE98-C773B5423642}" type="slidenum">
               <a:rPr b="0" lang="en-US" sz="1000" spc="-1" strike="noStrike">
                 <a:solidFill>
                   <a:schemeClr val="accent6"/>
@@ -19931,7 +19573,7 @@
                 <a:tab algn="l" pos="0"/>
               </a:tabLst>
             </a:pPr>
-            <a:fld id="{6DCE99B3-551D-4FFA-B3F5-42D6B4B51176}" type="slidenum">
+            <a:fld id="{AC4B3401-C26A-45D6-9359-371B02BCF9FD}" type="slidenum">
               <a:rPr b="0" lang="en-US" sz="1000" spc="-1" strike="noStrike">
                 <a:solidFill>
                   <a:schemeClr val="accent6"/>
@@ -20199,7 +19841,133 @@
                 </a:solidFill>
                 <a:latin typeface="Calibri"/>
               </a:rPr>
-              <a:t>Corpo do cálculo com campos atípicos</a:t>
+              <a:t>Co</a:t>
+            </a:r>
+            <a:r>
+              <a:rPr b="1" lang="en-US" sz="3000" spc="-1" strike="noStrike">
+                <a:solidFill>
+                  <a:schemeClr val="dk2"/>
+                </a:solidFill>
+                <a:latin typeface="Calibri"/>
+              </a:rPr>
+              <a:t>rp</a:t>
+            </a:r>
+            <a:r>
+              <a:rPr b="1" lang="en-US" sz="3000" spc="-1" strike="noStrike">
+                <a:solidFill>
+                  <a:schemeClr val="dk2"/>
+                </a:solidFill>
+                <a:latin typeface="Calibri"/>
+              </a:rPr>
+              <a:t>o </a:t>
+            </a:r>
+            <a:r>
+              <a:rPr b="1" lang="en-US" sz="3000" spc="-1" strike="noStrike">
+                <a:solidFill>
+                  <a:schemeClr val="dk2"/>
+                </a:solidFill>
+                <a:latin typeface="Calibri"/>
+              </a:rPr>
+              <a:t>do </a:t>
+            </a:r>
+            <a:r>
+              <a:rPr b="1" lang="en-US" sz="3000" spc="-1" strike="noStrike">
+                <a:solidFill>
+                  <a:schemeClr val="dk2"/>
+                </a:solidFill>
+                <a:latin typeface="Calibri"/>
+              </a:rPr>
+              <a:t>cál</a:t>
+            </a:r>
+            <a:r>
+              <a:rPr b="1" lang="en-US" sz="3000" spc="-1" strike="noStrike">
+                <a:solidFill>
+                  <a:schemeClr val="dk2"/>
+                </a:solidFill>
+                <a:latin typeface="Calibri"/>
+              </a:rPr>
+              <a:t>cul</a:t>
+            </a:r>
+            <a:r>
+              <a:rPr b="1" lang="en-US" sz="3000" spc="-1" strike="noStrike">
+                <a:solidFill>
+                  <a:schemeClr val="dk2"/>
+                </a:solidFill>
+                <a:latin typeface="Calibri"/>
+              </a:rPr>
+              <a:t>o </a:t>
+            </a:r>
+            <a:r>
+              <a:rPr b="1" lang="en-US" sz="3000" spc="-1" strike="noStrike">
+                <a:solidFill>
+                  <a:schemeClr val="dk2"/>
+                </a:solidFill>
+                <a:latin typeface="Calibri"/>
+              </a:rPr>
+              <a:t>co</a:t>
+            </a:r>
+            <a:r>
+              <a:rPr b="1" lang="en-US" sz="3000" spc="-1" strike="noStrike">
+                <a:solidFill>
+                  <a:schemeClr val="dk2"/>
+                </a:solidFill>
+                <a:latin typeface="Calibri"/>
+              </a:rPr>
+              <a:t>m </a:t>
+            </a:r>
+            <a:r>
+              <a:rPr b="1" lang="en-US" sz="3000" spc="-1" strike="noStrike">
+                <a:solidFill>
+                  <a:schemeClr val="dk2"/>
+                </a:solidFill>
+                <a:latin typeface="Calibri"/>
+              </a:rPr>
+              <a:t>ca</a:t>
+            </a:r>
+            <a:r>
+              <a:rPr b="1" lang="en-US" sz="3000" spc="-1" strike="noStrike">
+                <a:solidFill>
+                  <a:schemeClr val="dk2"/>
+                </a:solidFill>
+                <a:latin typeface="Calibri"/>
+              </a:rPr>
+              <a:t>mp</a:t>
+            </a:r>
+            <a:r>
+              <a:rPr b="1" lang="en-US" sz="3000" spc="-1" strike="noStrike">
+                <a:solidFill>
+                  <a:schemeClr val="dk2"/>
+                </a:solidFill>
+                <a:latin typeface="Calibri"/>
+              </a:rPr>
+              <a:t>os </a:t>
+            </a:r>
+            <a:r>
+              <a:rPr b="1" lang="en-US" sz="3000" spc="-1" strike="noStrike">
+                <a:solidFill>
+                  <a:schemeClr val="dk2"/>
+                </a:solidFill>
+                <a:latin typeface="Calibri"/>
+              </a:rPr>
+              <a:t>atí</a:t>
+            </a:r>
+            <a:r>
+              <a:rPr b="1" lang="en-US" sz="3000" spc="-1" strike="noStrike">
+                <a:solidFill>
+                  <a:schemeClr val="dk2"/>
+                </a:solidFill>
+                <a:latin typeface="Calibri"/>
+              </a:rPr>
+              <a:t>pic</a:t>
+            </a:r>
+            <a:r>
+              <a:rPr b="1" lang="en-US" sz="3000" spc="-1" strike="noStrike">
+                <a:solidFill>
+                  <a:schemeClr val="dk2"/>
+                </a:solidFill>
+                <a:latin typeface="Calibri"/>
+              </a:rPr>
+              <a:t>os</a:t>
             </a:r>
             <a:endParaRPr b="0" lang="pt-BR" sz="3000" spc="-1" strike="noStrike">
               <a:solidFill>
@@ -20264,7 +20032,7 @@
                 <a:tab algn="l" pos="0"/>
               </a:tabLst>
             </a:pPr>
-            <a:fld id="{D53F9E97-8C9A-43E3-998A-08F144961F01}" type="slidenum">
+            <a:fld id="{0168B21F-7A2C-4CFA-BDA9-EDA4B8C21FC8}" type="slidenum">
               <a:rPr b="0" lang="en-US" sz="1000" spc="-1" strike="noStrike">
                 <a:solidFill>
                   <a:schemeClr val="accent6"/>
@@ -21146,7 +20914,7 @@
                 <a:tab algn="l" pos="0"/>
               </a:tabLst>
             </a:pPr>
-            <a:fld id="{E4356394-EB7A-471B-9C1A-1324E73AA926}" type="slidenum">
+            <a:fld id="{FCB0150C-BC17-4225-ADBB-46E0E7B1EAF0}" type="slidenum">
               <a:rPr b="0" lang="en-US" sz="1000" spc="-1" strike="noStrike">
                 <a:solidFill>
                   <a:schemeClr val="accent6"/>
@@ -21479,7 +21247,7 @@
                 <a:tab algn="l" pos="0"/>
               </a:tabLst>
             </a:pPr>
-            <a:fld id="{4492DC65-A241-4966-954D-9A236E64BF68}" type="slidenum">
+            <a:fld id="{1D2641A1-2BBC-498C-990D-FD244F564409}" type="slidenum">
               <a:rPr b="0" lang="en-US" sz="1000" spc="-1" strike="noStrike">
                 <a:solidFill>
                   <a:schemeClr val="accent6"/>
@@ -22361,7 +22129,7 @@
                 <a:tab algn="l" pos="0"/>
               </a:tabLst>
             </a:pPr>
-            <a:fld id="{44C752A2-E21E-4A78-BBFB-EA9CD7D464C4}" type="slidenum">
+            <a:fld id="{3F739657-DBB1-4D0B-A47D-58FAD391E445}" type="slidenum">
               <a:rPr b="0" lang="en-US" sz="1000" spc="-1" strike="noStrike">
                 <a:solidFill>
                   <a:schemeClr val="accent6"/>
@@ -22694,7 +22462,7 @@
                 <a:tab algn="l" pos="0"/>
               </a:tabLst>
             </a:pPr>
-            <a:fld id="{46B2C996-65A4-48E4-8DA6-F6D44E495A6C}" type="slidenum">
+            <a:fld id="{92D87FC6-E177-4E53-BB42-CF2A4102C299}" type="slidenum">
               <a:rPr b="0" lang="en-US" sz="1000" spc="-1" strike="noStrike">
                 <a:solidFill>
                   <a:schemeClr val="accent6"/>
@@ -23576,7 +23344,7 @@
                 <a:tab algn="l" pos="0"/>
               </a:tabLst>
             </a:pPr>
-            <a:fld id="{A9ACC438-F4D3-4038-AC50-3A1605F0EDE1}" type="slidenum">
+            <a:fld id="{34E5367F-A34B-46F6-BFC8-79D23EE156CF}" type="slidenum">
               <a:rPr b="0" lang="en-US" sz="1000" spc="-1" strike="noStrike">
                 <a:solidFill>
                   <a:schemeClr val="accent6"/>
@@ -23844,7 +23612,151 @@
                 </a:solidFill>
                 <a:latin typeface="Calibri"/>
               </a:rPr>
-              <a:t>Corpo do cálculo com campos atípicos</a:t>
+              <a:t>Co</a:t>
+            </a:r>
+            <a:r>
+              <a:rPr b="1" lang="en-US" sz="3000" spc="-1" strike="noStrike">
+                <a:solidFill>
+                  <a:schemeClr val="dk2"/>
+                </a:solidFill>
+                <a:latin typeface="Calibri"/>
+              </a:rPr>
+              <a:t>rp</a:t>
+            </a:r>
+            <a:r>
+              <a:rPr b="1" lang="en-US" sz="3000" spc="-1" strike="noStrike">
+                <a:solidFill>
+                  <a:schemeClr val="dk2"/>
+                </a:solidFill>
+                <a:latin typeface="Calibri"/>
+              </a:rPr>
+              <a:t>o </a:t>
+            </a:r>
+            <a:r>
+              <a:rPr b="1" lang="en-US" sz="3000" spc="-1" strike="noStrike">
+                <a:solidFill>
+                  <a:schemeClr val="dk2"/>
+                </a:solidFill>
+                <a:latin typeface="Calibri"/>
+              </a:rPr>
+              <a:t>do </a:t>
+            </a:r>
+            <a:r>
+              <a:rPr b="1" lang="en-US" sz="3000" spc="-1" strike="noStrike">
+                <a:solidFill>
+                  <a:schemeClr val="dk2"/>
+                </a:solidFill>
+                <a:latin typeface="Calibri"/>
+              </a:rPr>
+              <a:t>cál</a:t>
+            </a:r>
+            <a:r>
+              <a:rPr b="1" lang="en-US" sz="3000" spc="-1" strike="noStrike">
+                <a:solidFill>
+                  <a:schemeClr val="dk2"/>
+                </a:solidFill>
+                <a:latin typeface="Calibri"/>
+              </a:rPr>
+              <a:t>cu</a:t>
+            </a:r>
+            <a:r>
+              <a:rPr b="1" lang="en-US" sz="3000" spc="-1" strike="noStrike">
+                <a:solidFill>
+                  <a:schemeClr val="dk2"/>
+                </a:solidFill>
+                <a:latin typeface="Calibri"/>
+              </a:rPr>
+              <a:t>lo </a:t>
+            </a:r>
+            <a:r>
+              <a:rPr b="1" lang="en-US" sz="3000" spc="-1" strike="noStrike">
+                <a:solidFill>
+                  <a:schemeClr val="dk2"/>
+                </a:solidFill>
+                <a:latin typeface="Calibri"/>
+              </a:rPr>
+              <a:t>co</a:t>
+            </a:r>
+            <a:r>
+              <a:rPr b="1" lang="en-US" sz="3000" spc="-1" strike="noStrike">
+                <a:solidFill>
+                  <a:schemeClr val="dk2"/>
+                </a:solidFill>
+                <a:latin typeface="Calibri"/>
+              </a:rPr>
+              <a:t>m </a:t>
+            </a:r>
+            <a:r>
+              <a:rPr b="1" lang="en-US" sz="3000" spc="-1" strike="noStrike">
+                <a:solidFill>
+                  <a:schemeClr val="dk2"/>
+                </a:solidFill>
+                <a:latin typeface="Calibri"/>
+              </a:rPr>
+              <a:t>ca</a:t>
+            </a:r>
+            <a:r>
+              <a:rPr b="1" lang="en-US" sz="3000" spc="-1" strike="noStrike">
+                <a:solidFill>
+                  <a:schemeClr val="dk2"/>
+                </a:solidFill>
+                <a:latin typeface="Calibri"/>
+              </a:rPr>
+              <a:t>m</a:t>
+            </a:r>
+            <a:r>
+              <a:rPr b="1" lang="en-US" sz="3000" spc="-1" strike="noStrike">
+                <a:solidFill>
+                  <a:schemeClr val="dk2"/>
+                </a:solidFill>
+                <a:latin typeface="Calibri"/>
+              </a:rPr>
+              <a:t>po</a:t>
+            </a:r>
+            <a:r>
+              <a:rPr b="1" lang="en-US" sz="3000" spc="-1" strike="noStrike">
+                <a:solidFill>
+                  <a:schemeClr val="dk2"/>
+                </a:solidFill>
+                <a:latin typeface="Calibri"/>
+              </a:rPr>
+              <a:t>s </a:t>
+            </a:r>
+            <a:r>
+              <a:rPr b="1" lang="en-US" sz="3000" spc="-1" strike="noStrike">
+                <a:solidFill>
+                  <a:schemeClr val="dk2"/>
+                </a:solidFill>
+                <a:latin typeface="Calibri"/>
+              </a:rPr>
+              <a:t>atí</a:t>
+            </a:r>
+            <a:r>
+              <a:rPr b="1" lang="en-US" sz="3000" spc="-1" strike="noStrike">
+                <a:solidFill>
+                  <a:schemeClr val="dk2"/>
+                </a:solidFill>
+                <a:latin typeface="Calibri"/>
+              </a:rPr>
+              <a:t>pi</a:t>
+            </a:r>
+            <a:r>
+              <a:rPr b="1" lang="en-US" sz="3000" spc="-1" strike="noStrike">
+                <a:solidFill>
+                  <a:schemeClr val="dk2"/>
+                </a:solidFill>
+                <a:latin typeface="Calibri"/>
+              </a:rPr>
+              <a:t>co</a:t>
+            </a:r>
+            <a:r>
+              <a:rPr b="1" lang="en-US" sz="3000" spc="-1" strike="noStrike">
+                <a:solidFill>
+                  <a:schemeClr val="dk2"/>
+                </a:solidFill>
+                <a:latin typeface="Calibri"/>
+              </a:rPr>
+              <a:t>s</a:t>
             </a:r>
             <a:endParaRPr b="0" lang="pt-BR" sz="3000" spc="-1" strike="noStrike">
               <a:solidFill>
@@ -23909,7 +23821,7 @@
                 <a:tab algn="l" pos="0"/>
               </a:tabLst>
             </a:pPr>
-            <a:fld id="{08590B49-65E5-41F1-876E-9BFA69C0F7A3}" type="slidenum">
+            <a:fld id="{8DFEFC74-CE46-4A84-A524-E75AE44F0AF6}" type="slidenum">
               <a:rPr b="0" lang="en-US" sz="1000" spc="-1" strike="noStrike">
                 <a:solidFill>
                   <a:schemeClr val="accent6"/>
@@ -24200,7 +24112,142 @@
                 </a:solidFill>
                 <a:latin typeface="Calibri"/>
               </a:rPr>
-              <a:t>Pedido com dados do cliente atípicos</a:t>
+              <a:t>Pe</a:t>
+            </a:r>
+            <a:r>
+              <a:rPr b="1" lang="en-US" sz="3000" spc="-1" strike="noStrike">
+                <a:solidFill>
+                  <a:schemeClr val="dk2"/>
+                </a:solidFill>
+                <a:latin typeface="Calibri"/>
+              </a:rPr>
+              <a:t>di</a:t>
+            </a:r>
+            <a:r>
+              <a:rPr b="1" lang="en-US" sz="3000" spc="-1" strike="noStrike">
+                <a:solidFill>
+                  <a:schemeClr val="dk2"/>
+                </a:solidFill>
+                <a:latin typeface="Calibri"/>
+              </a:rPr>
+              <a:t>do </a:t>
+            </a:r>
+            <a:r>
+              <a:rPr b="1" lang="en-US" sz="3000" spc="-1" strike="noStrike">
+                <a:solidFill>
+                  <a:schemeClr val="dk2"/>
+                </a:solidFill>
+                <a:latin typeface="Calibri"/>
+              </a:rPr>
+              <a:t>co</a:t>
+            </a:r>
+            <a:r>
+              <a:rPr b="1" lang="en-US" sz="3000" spc="-1" strike="noStrike">
+                <a:solidFill>
+                  <a:schemeClr val="dk2"/>
+                </a:solidFill>
+                <a:latin typeface="Calibri"/>
+              </a:rPr>
+              <a:t>m </a:t>
+            </a:r>
+            <a:r>
+              <a:rPr b="1" lang="en-US" sz="3000" spc="-1" strike="noStrike">
+                <a:solidFill>
+                  <a:schemeClr val="dk2"/>
+                </a:solidFill>
+                <a:latin typeface="Calibri"/>
+              </a:rPr>
+              <a:t>da</a:t>
+            </a:r>
+            <a:r>
+              <a:rPr b="1" lang="en-US" sz="3000" spc="-1" strike="noStrike">
+                <a:solidFill>
+                  <a:schemeClr val="dk2"/>
+                </a:solidFill>
+                <a:latin typeface="Calibri"/>
+              </a:rPr>
+              <a:t>do</a:t>
+            </a:r>
+            <a:r>
+              <a:rPr b="1" lang="en-US" sz="3000" spc="-1" strike="noStrike">
+                <a:solidFill>
+                  <a:schemeClr val="dk2"/>
+                </a:solidFill>
+                <a:latin typeface="Calibri"/>
+              </a:rPr>
+              <a:t>s </a:t>
+            </a:r>
+            <a:r>
+              <a:rPr b="1" lang="en-US" sz="3000" spc="-1" strike="noStrike">
+                <a:solidFill>
+                  <a:schemeClr val="dk2"/>
+                </a:solidFill>
+                <a:latin typeface="Calibri"/>
+              </a:rPr>
+              <a:t>do </a:t>
+            </a:r>
+            <a:r>
+              <a:rPr b="1" lang="en-US" sz="3000" spc="-1" strike="noStrike">
+                <a:solidFill>
+                  <a:schemeClr val="dk2"/>
+                </a:solidFill>
+                <a:latin typeface="Calibri"/>
+              </a:rPr>
+              <a:t>cli</a:t>
+            </a:r>
+            <a:r>
+              <a:rPr b="1" lang="en-US" sz="3000" spc="-1" strike="noStrike">
+                <a:solidFill>
+                  <a:schemeClr val="dk2"/>
+                </a:solidFill>
+                <a:latin typeface="Calibri"/>
+              </a:rPr>
+              <a:t>en</a:t>
+            </a:r>
+            <a:r>
+              <a:rPr b="1" lang="en-US" sz="3000" spc="-1" strike="noStrike">
+                <a:solidFill>
+                  <a:schemeClr val="dk2"/>
+                </a:solidFill>
+                <a:latin typeface="Calibri"/>
+              </a:rPr>
+              <a:t>te </a:t>
+            </a:r>
+            <a:r>
+              <a:rPr b="1" lang="en-US" sz="3000" spc="-1" strike="noStrike">
+                <a:solidFill>
+                  <a:schemeClr val="dk2"/>
+                </a:solidFill>
+                <a:latin typeface="Calibri"/>
+              </a:rPr>
+              <a:t>atí</a:t>
+            </a:r>
+            <a:r>
+              <a:rPr b="1" lang="en-US" sz="3000" spc="-1" strike="noStrike">
+                <a:solidFill>
+                  <a:schemeClr val="dk2"/>
+                </a:solidFill>
+                <a:latin typeface="Calibri"/>
+              </a:rPr>
+              <a:t>pi</a:t>
+            </a:r>
+            <a:r>
+              <a:rPr b="1" lang="en-US" sz="3000" spc="-1" strike="noStrike">
+                <a:solidFill>
+                  <a:schemeClr val="dk2"/>
+                </a:solidFill>
+                <a:latin typeface="Calibri"/>
+              </a:rPr>
+              <a:t>co</a:t>
+            </a:r>
+            <a:r>
+              <a:rPr b="1" lang="en-US" sz="3000" spc="-1" strike="noStrike">
+                <a:solidFill>
+                  <a:schemeClr val="dk2"/>
+                </a:solidFill>
+                <a:latin typeface="Calibri"/>
+              </a:rPr>
+              <a:t>s</a:t>
             </a:r>
             <a:endParaRPr b="0" lang="pt-BR" sz="3000" spc="-1" strike="noStrike">
               <a:solidFill>
@@ -24791,7 +24838,7 @@
                 <a:tab algn="l" pos="0"/>
               </a:tabLst>
             </a:pPr>
-            <a:fld id="{555BA613-C018-4BED-812B-FE756E19A5F8}" type="slidenum">
+            <a:fld id="{0882204A-D622-464D-8435-D290104189B8}" type="slidenum">
               <a:rPr b="0" lang="en-US" sz="1000" spc="-1" strike="noStrike">
                 <a:solidFill>
                   <a:schemeClr val="accent6"/>
@@ -24883,115 +24930,7 @@
                 </a:solidFill>
                 <a:latin typeface="Calibri"/>
               </a:rPr>
-              <a:t>Da</a:t>
-            </a:r>
-            <a:r>
-              <a:rPr b="1" lang="en-US" sz="3200" spc="-1" strike="noStrike">
-                <a:solidFill>
-                  <a:schemeClr val="dk2"/>
-                </a:solidFill>
-                <a:latin typeface="Calibri"/>
-              </a:rPr>
-              <a:t>do</a:t>
-            </a:r>
-            <a:r>
-              <a:rPr b="1" lang="en-US" sz="3200" spc="-1" strike="noStrike">
-                <a:solidFill>
-                  <a:schemeClr val="dk2"/>
-                </a:solidFill>
-                <a:latin typeface="Calibri"/>
-              </a:rPr>
-              <a:t>s </a:t>
-            </a:r>
-            <a:r>
-              <a:rPr b="1" lang="en-US" sz="3200" spc="-1" strike="noStrike">
-                <a:solidFill>
-                  <a:schemeClr val="dk2"/>
-                </a:solidFill>
-                <a:latin typeface="Calibri"/>
-              </a:rPr>
-              <a:t>de </a:t>
-            </a:r>
-            <a:r>
-              <a:rPr b="1" lang="en-US" sz="3200" spc="-1" strike="noStrike">
-                <a:solidFill>
-                  <a:schemeClr val="dk2"/>
-                </a:solidFill>
-                <a:latin typeface="Calibri"/>
-              </a:rPr>
-              <a:t>tes</a:t>
-            </a:r>
-            <a:r>
-              <a:rPr b="1" lang="en-US" sz="3200" spc="-1" strike="noStrike">
-                <a:solidFill>
-                  <a:schemeClr val="dk2"/>
-                </a:solidFill>
-                <a:latin typeface="Calibri"/>
-              </a:rPr>
-              <a:t>te </a:t>
-            </a:r>
-            <a:r>
-              <a:rPr b="1" lang="en-US" sz="3200" spc="-1" strike="noStrike">
-                <a:solidFill>
-                  <a:schemeClr val="dk2"/>
-                </a:solidFill>
-                <a:latin typeface="Calibri"/>
-              </a:rPr>
-              <a:t>e </a:t>
-            </a:r>
-            <a:r>
-              <a:rPr b="1" lang="en-US" sz="3200" spc="-1" strike="noStrike">
-                <a:solidFill>
-                  <a:schemeClr val="dk2"/>
-                </a:solidFill>
-                <a:latin typeface="Calibri"/>
-              </a:rPr>
-              <a:t>re</a:t>
-            </a:r>
-            <a:r>
-              <a:rPr b="1" lang="en-US" sz="3200" spc="-1" strike="noStrike">
-                <a:solidFill>
-                  <a:schemeClr val="dk2"/>
-                </a:solidFill>
-                <a:latin typeface="Calibri"/>
-              </a:rPr>
-              <a:t>gr</a:t>
-            </a:r>
-            <a:r>
-              <a:rPr b="1" lang="en-US" sz="3200" spc="-1" strike="noStrike">
-                <a:solidFill>
-                  <a:schemeClr val="dk2"/>
-                </a:solidFill>
-                <a:latin typeface="Calibri"/>
-              </a:rPr>
-              <a:t>as-</a:t>
-            </a:r>
-            <a:r>
-              <a:rPr b="1" lang="en-US" sz="3200" spc="-1" strike="noStrike">
-                <a:solidFill>
-                  <a:schemeClr val="dk2"/>
-                </a:solidFill>
-                <a:latin typeface="Calibri"/>
-              </a:rPr>
-              <a:t>ch</a:t>
-            </a:r>
-            <a:r>
-              <a:rPr b="1" lang="en-US" sz="3200" spc="-1" strike="noStrike">
-                <a:solidFill>
-                  <a:schemeClr val="dk2"/>
-                </a:solidFill>
-                <a:latin typeface="Calibri"/>
-              </a:rPr>
-              <a:t>av</a:t>
-            </a:r>
-            <a:r>
-              <a:rPr b="1" lang="en-US" sz="3200" spc="-1" strike="noStrike">
-                <a:solidFill>
-                  <a:schemeClr val="dk2"/>
-                </a:solidFill>
-                <a:latin typeface="Calibri"/>
-              </a:rPr>
-              <a:t>e</a:t>
+              <a:t>Dados de teste e regras-chave</a:t>
             </a:r>
             <a:endParaRPr b="0" lang="pt-BR" sz="3200" spc="-1" strike="noStrike">
               <a:solidFill>
@@ -27471,7 +27410,7 @@
                 <a:tab algn="l" pos="0"/>
               </a:tabLst>
             </a:pPr>
-            <a:fld id="{F3FDBAA8-E0E8-4B74-B0FB-F19D0459D135}" type="slidenum">
+            <a:fld id="{EA4AAF6A-9165-4ABC-805C-EF9E9DCE5E9B}" type="slidenum">
               <a:rPr b="0" lang="en-US" sz="1000" spc="-1" strike="noStrike">
                 <a:solidFill>
                   <a:schemeClr val="accent6"/>
@@ -27804,7 +27743,7 @@
                 <a:tab algn="l" pos="0"/>
               </a:tabLst>
             </a:pPr>
-            <a:fld id="{BCD17800-A104-40CC-821B-25154BC5FE2D}" type="slidenum">
+            <a:fld id="{EF922A78-E18A-4E36-BEE8-13DA21548A84}" type="slidenum">
               <a:rPr b="0" lang="en-US" sz="1000" spc="-1" strike="noStrike">
                 <a:solidFill>
                   <a:schemeClr val="accent6"/>
@@ -28686,7 +28625,7 @@
                 <a:tab algn="l" pos="0"/>
               </a:tabLst>
             </a:pPr>
-            <a:fld id="{19C21422-5AB3-4AC7-A665-189442EDF7CD}" type="slidenum">
+            <a:fld id="{4B84510B-3844-4062-BDA8-E2213B2A0DCC}" type="slidenum">
               <a:rPr b="0" lang="en-US" sz="1000" spc="-1" strike="noStrike">
                 <a:solidFill>
                   <a:schemeClr val="accent6"/>
@@ -29019,7 +28958,7 @@
                 <a:tab algn="l" pos="0"/>
               </a:tabLst>
             </a:pPr>
-            <a:fld id="{91351570-ADF6-43AD-9A06-4E440399B79A}" type="slidenum">
+            <a:fld id="{19E3022F-72BE-4A69-A67E-81E925E43E4A}" type="slidenum">
               <a:rPr b="0" lang="en-US" sz="1000" spc="-1" strike="noStrike">
                 <a:solidFill>
                   <a:schemeClr val="accent6"/>
@@ -29910,7 +29849,7 @@
                 <a:tab algn="l" pos="0"/>
               </a:tabLst>
             </a:pPr>
-            <a:fld id="{82BA3597-87A5-43AA-9A0A-EF856EF60005}" type="slidenum">
+            <a:fld id="{8FDF90EF-04D5-4E5C-B291-B87954AD060D}" type="slidenum">
               <a:rPr b="0" lang="en-US" sz="1000" spc="-1" strike="noStrike">
                 <a:solidFill>
                   <a:schemeClr val="accent6"/>
@@ -30243,7 +30182,7 @@
                 <a:tab algn="l" pos="0"/>
               </a:tabLst>
             </a:pPr>
-            <a:fld id="{F873A696-70B8-4BF0-ACA1-5ECF1CA9C40C}" type="slidenum">
+            <a:fld id="{096DD3CC-DA6F-4C6E-8695-9E57A18795EA}" type="slidenum">
               <a:rPr b="0" lang="en-US" sz="1000" spc="-1" strike="noStrike">
                 <a:solidFill>
                   <a:schemeClr val="accent6"/>
@@ -31134,7 +31073,7 @@
                 <a:tab algn="l" pos="0"/>
               </a:tabLst>
             </a:pPr>
-            <a:fld id="{8BD3FE25-CBF4-41F7-9D98-41A9FA8EBCC0}" type="slidenum">
+            <a:fld id="{0B146458-9563-4B0D-B7FC-D405BB7C8C49}" type="slidenum">
               <a:rPr b="0" lang="en-US" sz="1000" spc="-1" strike="noStrike">
                 <a:solidFill>
                   <a:schemeClr val="accent6"/>
@@ -31467,7 +31406,7 @@
                 <a:tab algn="l" pos="0"/>
               </a:tabLst>
             </a:pPr>
-            <a:fld id="{0A395896-C2A1-4D84-833C-3E64406BE436}" type="slidenum">
+            <a:fld id="{7DC32A45-26DF-4CD2-B87E-7638C5853018}" type="slidenum">
               <a:rPr b="0" lang="en-US" sz="1000" spc="-1" strike="noStrike">
                 <a:solidFill>
                   <a:schemeClr val="accent6"/>
@@ -32358,7 +32297,7 @@
                 <a:tab algn="l" pos="0"/>
               </a:tabLst>
             </a:pPr>
-            <a:fld id="{5401306F-ACA1-4822-83F8-909CDDE54274}" type="slidenum">
+            <a:fld id="{0C15441B-E052-46E0-891C-F1EF11AB65D6}" type="slidenum">
               <a:rPr b="0" lang="en-US" sz="1000" spc="-1" strike="noStrike">
                 <a:solidFill>
                   <a:schemeClr val="accent6"/>
@@ -32691,7 +32630,7 @@
                 <a:tab algn="l" pos="0"/>
               </a:tabLst>
             </a:pPr>
-            <a:fld id="{6A063533-27D0-46D0-8305-C2A24F6986FB}" type="slidenum">
+            <a:fld id="{0BBFD999-8D3C-4F1B-8042-0998ECE07AC5}" type="slidenum">
               <a:rPr b="0" lang="en-US" sz="1000" spc="-1" strike="noStrike">
                 <a:solidFill>
                   <a:schemeClr val="accent6"/>
@@ -33582,7 +33521,7 @@
                 <a:tab algn="l" pos="0"/>
               </a:tabLst>
             </a:pPr>
-            <a:fld id="{BF5B14BD-E68B-476B-9BAB-B57AF3D7801B}" type="slidenum">
+            <a:fld id="{A2118DB3-53F0-4D86-AA85-77AA2A00F325}" type="slidenum">
               <a:rPr b="0" lang="en-US" sz="1000" spc="-1" strike="noStrike">
                 <a:solidFill>
                   <a:schemeClr val="accent6"/>
@@ -33674,16 +33613,7 @@
                 </a:solidFill>
                 <a:latin typeface="Calibri"/>
               </a:rPr>
-              <a:t>Mapa dos </a:t>
-            </a:r>
-            <a:r>
-              <a:rPr b="1" lang="en-US" sz="3200" spc="-1" strike="noStrike">
-                <a:solidFill>
-                  <a:schemeClr val="dk2"/>
-                </a:solidFill>
-                <a:latin typeface="Calibri"/>
-              </a:rPr>
-              <a:t>exploratórios</a:t>
+              <a:t>Mapa dos exploratórios</a:t>
             </a:r>
             <a:endParaRPr b="0" lang="pt-BR" sz="3200" spc="-1" strike="noStrike">
               <a:solidFill>
@@ -34684,7 +34614,7 @@
                 <a:tab algn="l" pos="0"/>
               </a:tabLst>
             </a:pPr>
-            <a:fld id="{F17B3458-4C42-47F3-8739-0E9F215AA983}" type="slidenum">
+            <a:fld id="{739344AA-F35A-4D05-B032-64DD54C5C6D0}" type="slidenum">
               <a:rPr b="0" lang="en-US" sz="1000" spc="-1" strike="noStrike">
                 <a:solidFill>
                   <a:schemeClr val="accent6"/>
@@ -35017,7 +34947,7 @@
                 <a:tab algn="l" pos="0"/>
               </a:tabLst>
             </a:pPr>
-            <a:fld id="{A2C69677-A125-4EEE-95F3-00A35D23DFD5}" type="slidenum">
+            <a:fld id="{C7C9C7E1-FA54-46C8-A322-3F2F682FC3C7}" type="slidenum">
               <a:rPr b="0" lang="en-US" sz="1000" spc="-1" strike="noStrike">
                 <a:solidFill>
                   <a:schemeClr val="accent6"/>
@@ -35899,7 +35829,7 @@
                 <a:tab algn="l" pos="0"/>
               </a:tabLst>
             </a:pPr>
-            <a:fld id="{4F298C1B-B685-47F9-9787-4C35CDA159BA}" type="slidenum">
+            <a:fld id="{3AFF2240-964C-41A4-BFD4-B7BB26A54127}" type="slidenum">
               <a:rPr b="0" lang="en-US" sz="1000" spc="-1" strike="noStrike">
                 <a:solidFill>
                   <a:schemeClr val="accent6"/>
@@ -36232,7 +36162,7 @@
                 <a:tab algn="l" pos="0"/>
               </a:tabLst>
             </a:pPr>
-            <a:fld id="{28877C82-B437-416F-A496-16DB44CCDFD8}" type="slidenum">
+            <a:fld id="{A34068BA-2F8B-4717-A476-5A9EBCD16048}" type="slidenum">
               <a:rPr b="0" lang="en-US" sz="1000" spc="-1" strike="noStrike">
                 <a:solidFill>
                   <a:schemeClr val="accent6"/>
@@ -37032,7 +36962,7 @@
                 <a:tab algn="l" pos="0"/>
               </a:tabLst>
             </a:pPr>
-            <a:fld id="{F3F099A3-8296-4338-B5C8-D5BE68139CC1}" type="slidenum">
+            <a:fld id="{2672C94F-CCF7-4955-A719-85287B8C60E2}" type="slidenum">
               <a:rPr b="0" lang="en-US" sz="1000" spc="-1" strike="noStrike">
                 <a:solidFill>
                   <a:schemeClr val="accent6"/>
@@ -37365,7 +37295,7 @@
                 <a:tab algn="l" pos="0"/>
               </a:tabLst>
             </a:pPr>
-            <a:fld id="{D1B35A46-63A1-4550-97AC-BD0B7209A02F}" type="slidenum">
+            <a:fld id="{446D494A-A082-4FD8-921F-30209F81CCF9}" type="slidenum">
               <a:rPr b="0" lang="en-US" sz="1000" spc="-1" strike="noStrike">
                 <a:solidFill>
                   <a:schemeClr val="accent6"/>
@@ -37721,7 +37651,7 @@
                 <a:tab algn="l" pos="0"/>
               </a:tabLst>
             </a:pPr>
-            <a:fld id="{A7243D8A-53CA-4BA9-B4DD-0672678F9E6C}" type="slidenum">
+            <a:fld id="{58F6092D-C163-4584-ADDF-C079BA307FFD}" type="slidenum">
               <a:rPr b="0" lang="en-US" sz="1000" spc="-1" strike="noStrike">
                 <a:solidFill>
                   <a:schemeClr val="accent6"/>
@@ -38484,7 +38414,7 @@
                 <a:tab algn="l" pos="0"/>
               </a:tabLst>
             </a:pPr>
-            <a:fld id="{3FDFA5C3-4501-485B-946C-5891AAFC403D}" type="slidenum">
+            <a:fld id="{61A922BB-FF0F-4EDB-8E14-79BFBE76BA22}" type="slidenum">
               <a:rPr b="0" lang="en-US" sz="1000" spc="-1" strike="noStrike">
                 <a:solidFill>
                   <a:schemeClr val="accent6"/>
@@ -38752,7 +38682,16 @@
                 </a:solidFill>
                 <a:latin typeface="Calibri"/>
               </a:rPr>
-              <a:t>Consistência entre endpoints</a:t>
+              <a:t>Consistência entre </a:t>
+            </a:r>
+            <a:r>
+              <a:rPr b="1" lang="en-US" sz="3000" spc="-1" strike="noStrike">
+                <a:solidFill>
+                  <a:schemeClr val="dk2"/>
+                </a:solidFill>
+                <a:latin typeface="Calibri"/>
+              </a:rPr>
+              <a:t>endpoints</a:t>
             </a:r>
             <a:endParaRPr b="0" lang="pt-BR" sz="3000" spc="-1" strike="noStrike">
               <a:solidFill>
@@ -38817,7 +38756,7 @@
                 <a:tab algn="l" pos="0"/>
               </a:tabLst>
             </a:pPr>
-            <a:fld id="{279A3F11-195F-439E-83A6-25FDACEF3DEA}" type="slidenum">
+            <a:fld id="{219DE641-165F-468E-998E-D14D94603074}" type="slidenum">
               <a:rPr b="0" lang="en-US" sz="1000" spc="-1" strike="noStrike">
                 <a:solidFill>
                   <a:schemeClr val="accent6"/>
@@ -39173,7 +39112,7 @@
                 <a:tab algn="l" pos="0"/>
               </a:tabLst>
             </a:pPr>
-            <a:fld id="{353165C8-E511-4F4C-BF29-C86E5D1C80AA}" type="slidenum">
+            <a:fld id="{836B4A23-1B85-48B2-AE4D-2175F98D2BE0}" type="slidenum">
               <a:rPr b="0" lang="en-US" sz="1000" spc="-1" strike="noStrike">
                 <a:solidFill>
                   <a:schemeClr val="accent6"/>
@@ -39936,7 +39875,7 @@
                 <a:tab algn="l" pos="0"/>
               </a:tabLst>
             </a:pPr>
-            <a:fld id="{35FC3DAC-7175-41E6-BE6F-7D08C3FC38AC}" type="slidenum">
+            <a:fld id="{E0A5A8CC-7E33-4923-8B3A-69B23805DA7E}" type="slidenum">
               <a:rPr b="0" lang="en-US" sz="1000" spc="-1" strike="noStrike">
                 <a:solidFill>
                   <a:schemeClr val="accent6"/>
@@ -40267,7 +40206,7 @@
                 </a:solidFill>
                 <a:latin typeface="Calibri"/>
               </a:rPr>
-              <a:t>in</a:t>
+              <a:t>inv</a:t>
             </a:r>
             <a:r>
               <a:rPr b="1" lang="en-US" sz="3000" spc="-1" strike="noStrike">
@@ -40276,7 +40215,7 @@
                 </a:solidFill>
                 <a:latin typeface="Calibri"/>
               </a:rPr>
-              <a:t>vá</a:t>
+              <a:t>áli</a:t>
             </a:r>
             <a:r>
               <a:rPr b="1" lang="en-US" sz="3000" spc="-1" strike="noStrike">
@@ -40285,7 +40224,7 @@
                 </a:solidFill>
                 <a:latin typeface="Calibri"/>
               </a:rPr>
-              <a:t>lid</a:t>
+              <a:t>do</a:t>
             </a:r>
             <a:r>
               <a:rPr b="1" lang="en-US" sz="3000" spc="-1" strike="noStrike">
@@ -40294,7 +40233,7 @@
                 </a:solidFill>
                 <a:latin typeface="Calibri"/>
               </a:rPr>
-              <a:t>os </a:t>
+              <a:t>s </a:t>
             </a:r>
             <a:r>
               <a:rPr b="1" lang="en-US" sz="3000" spc="-1" strike="noStrike">
@@ -40321,7 +40260,7 @@
                 </a:solidFill>
                 <a:latin typeface="Calibri"/>
               </a:rPr>
-              <a:t>cu</a:t>
+              <a:t>cul</a:t>
             </a:r>
             <a:r>
               <a:rPr b="1" lang="en-US" sz="3000" spc="-1" strike="noStrike">
@@ -40330,7 +40269,7 @@
                 </a:solidFill>
                 <a:latin typeface="Calibri"/>
               </a:rPr>
-              <a:t>lo</a:t>
+              <a:t>o</a:t>
             </a:r>
             <a:endParaRPr b="0" lang="pt-BR" sz="3000" spc="-1" strike="noStrike">
               <a:solidFill>
@@ -40884,7 +40823,7 @@
                 <a:tab algn="l" pos="0"/>
               </a:tabLst>
             </a:pPr>
-            <a:fld id="{F92140D8-9263-413E-9AB5-8CFA84E062A0}" type="slidenum">
+            <a:fld id="{5C2B2E6B-09FD-48D9-8803-AF4E92570134}" type="slidenum">
               <a:rPr b="0" lang="en-US" sz="1000" spc="-1" strike="noStrike">
                 <a:solidFill>
                   <a:schemeClr val="accent6"/>
@@ -41217,7 +41156,7 @@
                 <a:tab algn="l" pos="0"/>
               </a:tabLst>
             </a:pPr>
-            <a:fld id="{4A603E46-8EB0-409B-8BD2-C3AC075FCF12}" type="slidenum">
+            <a:fld id="{CF8154F6-BED4-4FD2-87C4-827AB8CDAB31}" type="slidenum">
               <a:rPr b="0" lang="en-US" sz="1000" spc="-1" strike="noStrike">
                 <a:solidFill>
                   <a:schemeClr val="accent6"/>
@@ -41573,7 +41512,7 @@
                 <a:tab algn="l" pos="0"/>
               </a:tabLst>
             </a:pPr>
-            <a:fld id="{C9D02FC9-870F-490F-9846-5CFFFE6F7247}" type="slidenum">
+            <a:fld id="{16F61E86-4348-406F-820F-D7F4AA86CE61}" type="slidenum">
               <a:rPr b="0" lang="en-US" sz="1000" spc="-1" strike="noStrike">
                 <a:solidFill>
                   <a:schemeClr val="accent6"/>
@@ -42299,7 +42238,7 @@
                 <a:tab algn="l" pos="0"/>
               </a:tabLst>
             </a:pPr>
-            <a:fld id="{191DF67D-58FE-48A9-94CC-F0008AA9E53B}" type="slidenum">
+            <a:fld id="{02A41C81-BE07-46F3-86A4-69AA760275C8}" type="slidenum">
               <a:rPr b="0" lang="en-US" sz="1000" spc="-1" strike="noStrike">
                 <a:solidFill>
                   <a:schemeClr val="accent6"/>
@@ -42632,7 +42571,7 @@
                 <a:tab algn="l" pos="0"/>
               </a:tabLst>
             </a:pPr>
-            <a:fld id="{99C2ABEE-2C88-4143-9198-A21A25D5EFFF}" type="slidenum">
+            <a:fld id="{2604C834-B51C-4222-8A15-96C8CC094DB3}" type="slidenum">
               <a:rPr b="0" lang="en-US" sz="1000" spc="-1" strike="noStrike">
                 <a:solidFill>
                   <a:schemeClr val="accent6"/>
@@ -42673,1055 +42612,6 @@
           </a:ln>
         </p:spPr>
       </p:pic>
-    </p:spTree>
-  </p:cSld>
-  <mc:AlternateContent>
-    <mc:Choice Requires="p14">
-      <p:transition spd="slow" p14:dur="2000"/>
-    </mc:Choice>
-    <mc:Fallback>
-      <p:transition spd="slow"/>
-    </mc:Fallback>
-  </mc:AlternateContent>
-</p:sld>
-</file>
-
-<file path=ppt/slides/slide54.xml><?xml version="1.0" encoding="utf-8"?>
-<p:sld xmlns:a="http://schemas.openxmlformats.org/drawingml/2006/main" xmlns:p="http://schemas.openxmlformats.org/presentationml/2006/main" xmlns:r="http://schemas.openxmlformats.org/officeDocument/2006/relationships" xmlns:p14="http://schemas.microsoft.com/office/powerpoint/2010/main" xmlns:p15="http://schemas.microsoft.com/office/powerpoint/2012/main" xmlns:mc="http://schemas.openxmlformats.org/markup-compatibility/2006">
-  <p:cSld>
-    <p:spTree>
-      <p:nvGrpSpPr>
-        <p:cNvPr id="1" name=""/>
-        <p:cNvGrpSpPr/>
-        <p:nvPr/>
-      </p:nvGrpSpPr>
-      <p:grpSpPr>
-        <a:xfrm>
-          <a:off x="0" y="0"/>
-          <a:ext cx="0" cy="0"/>
-          <a:chOff x="0" y="0"/>
-          <a:chExt cx="0" cy="0"/>
-        </a:xfrm>
-      </p:grpSpPr>
-      <p:sp>
-        <p:nvSpPr>
-          <p:cNvPr id="506" name="PlaceHolder 1"/>
-          <p:cNvSpPr>
-            <a:spLocks noGrp="1"/>
-          </p:cNvSpPr>
-          <p:nvPr>
-            <p:ph type="title"/>
-          </p:nvPr>
-        </p:nvSpPr>
-        <p:spPr>
-          <a:xfrm>
-            <a:off x="457200" y="502920"/>
-            <a:ext cx="11246040" cy="730440"/>
-          </a:xfrm>
-          <a:prstGeom prst="rect">
-            <a:avLst/>
-          </a:prstGeom>
-          <a:noFill/>
-          <a:ln w="0">
-            <a:noFill/>
-          </a:ln>
-        </p:spPr>
-        <p:txBody>
-          <a:bodyPr lIns="0" rIns="0" tIns="0" bIns="0" anchor="ctr">
-            <a:noAutofit/>
-          </a:bodyPr>
-          <a:p>
-            <a:pPr indent="0" defTabSz="914400">
-              <a:lnSpc>
-                <a:spcPct val="100000"/>
-              </a:lnSpc>
-              <a:buNone/>
-              <a:tabLst>
-                <a:tab algn="l" pos="0"/>
-              </a:tabLst>
-            </a:pPr>
-            <a:r>
-              <a:rPr b="1" lang="en-US" sz="3200" spc="-1" strike="noStrike">
-                <a:solidFill>
-                  <a:schemeClr val="dk2"/>
-                </a:solidFill>
-                <a:latin typeface="Calibri"/>
-              </a:rPr>
-              <a:t>Fechamento da execução</a:t>
-            </a:r>
-            <a:endParaRPr b="0" lang="pt-BR" sz="3200" spc="-1" strike="noStrike">
-              <a:solidFill>
-                <a:srgbClr val="000000"/>
-              </a:solidFill>
-              <a:latin typeface="Arial"/>
-            </a:endParaRPr>
-          </a:p>
-        </p:txBody>
-      </p:sp>
-      <p:sp>
-        <p:nvSpPr>
-          <p:cNvPr id="507" name="Checklist"/>
-          <p:cNvSpPr/>
-          <p:nvPr/>
-        </p:nvSpPr>
-        <p:spPr>
-          <a:xfrm>
-            <a:off x="457200" y="1600200"/>
-            <a:ext cx="6308280" cy="4570920"/>
-          </a:xfrm>
-          <a:prstGeom prst="roundRect">
-            <a:avLst>
-              <a:gd name="adj" fmla="val 1600"/>
-            </a:avLst>
-          </a:prstGeom>
-          <a:solidFill>
-            <a:schemeClr val="bg2"/>
-          </a:solidFill>
-          <a:ln w="12700">
-            <a:solidFill>
-              <a:srgbClr val="eef1f7"/>
-            </a:solidFill>
-            <a:round/>
-          </a:ln>
-        </p:spPr>
-        <p:style>
-          <a:lnRef idx="0"/>
-          <a:fillRef idx="0"/>
-          <a:effectRef idx="0"/>
-          <a:fontRef idx="minor"/>
-        </p:style>
-        <p:txBody>
-          <a:bodyPr lIns="90000" rIns="90000" tIns="45000" bIns="45000" anchor="t">
-            <a:noAutofit/>
-          </a:bodyPr>
-          <a:p>
-            <a:pPr>
-              <a:lnSpc>
-                <a:spcPct val="100000"/>
-              </a:lnSpc>
-            </a:pPr>
-            <a:endParaRPr b="0" lang="pt-BR" sz="1800" spc="-1" strike="noStrike">
-              <a:solidFill>
-                <a:srgbClr val="000000"/>
-              </a:solidFill>
-              <a:latin typeface="Arial"/>
-            </a:endParaRPr>
-          </a:p>
-        </p:txBody>
-      </p:sp>
-      <p:sp>
-        <p:nvSpPr>
-          <p:cNvPr id="508" name="Text 2"/>
-          <p:cNvSpPr/>
-          <p:nvPr/>
-        </p:nvSpPr>
-        <p:spPr>
-          <a:xfrm>
-            <a:off x="685800" y="1737360"/>
-            <a:ext cx="5851080" cy="254880"/>
-          </a:xfrm>
-          <a:prstGeom prst="rect">
-            <a:avLst/>
-          </a:prstGeom>
-          <a:noFill/>
-          <a:ln w="0">
-            <a:noFill/>
-          </a:ln>
-        </p:spPr>
-        <p:style>
-          <a:lnRef idx="0"/>
-          <a:fillRef idx="0"/>
-          <a:effectRef idx="0"/>
-          <a:fontRef idx="minor"/>
-        </p:style>
-        <p:txBody>
-          <a:bodyPr lIns="0" rIns="0" tIns="0" bIns="0" anchor="ctr">
-            <a:noAutofit/>
-          </a:bodyPr>
-          <a:p>
-            <a:pPr defTabSz="914400">
-              <a:lnSpc>
-                <a:spcPct val="100000"/>
-              </a:lnSpc>
-              <a:tabLst>
-                <a:tab algn="l" pos="0"/>
-              </a:tabLst>
-            </a:pPr>
-            <a:r>
-              <a:rPr b="1" lang="en-US" sz="1100" spc="92" strike="noStrike">
-                <a:solidFill>
-                  <a:schemeClr val="accent1"/>
-                </a:solidFill>
-                <a:latin typeface="Calibri"/>
-              </a:rPr>
-              <a:t>CHECKLIST DE ENTREGA</a:t>
-            </a:r>
-            <a:endParaRPr b="0" lang="pt-BR" sz="1100" spc="-1" strike="noStrike">
-              <a:solidFill>
-                <a:srgbClr val="000000"/>
-              </a:solidFill>
-              <a:latin typeface="Arial"/>
-            </a:endParaRPr>
-          </a:p>
-        </p:txBody>
-      </p:sp>
-      <p:sp>
-        <p:nvSpPr>
-          <p:cNvPr id="509" name="Text 3"/>
-          <p:cNvSpPr/>
-          <p:nvPr/>
-        </p:nvSpPr>
-        <p:spPr>
-          <a:xfrm>
-            <a:off x="685800" y="2103120"/>
-            <a:ext cx="5851080" cy="3930840"/>
-          </a:xfrm>
-          <a:prstGeom prst="rect">
-            <a:avLst/>
-          </a:prstGeom>
-          <a:noFill/>
-          <a:ln w="0">
-            <a:noFill/>
-          </a:ln>
-        </p:spPr>
-        <p:style>
-          <a:lnRef idx="0"/>
-          <a:fillRef idx="0"/>
-          <a:effectRef idx="0"/>
-          <a:fontRef idx="minor"/>
-        </p:style>
-        <p:txBody>
-          <a:bodyPr lIns="0" rIns="0" tIns="0" bIns="0" anchor="t">
-            <a:noAutofit/>
-          </a:bodyPr>
-          <a:p>
-            <a:pPr marL="343080" indent="-343080" defTabSz="914400">
-              <a:lnSpc>
-                <a:spcPct val="100000"/>
-              </a:lnSpc>
-              <a:spcAft>
-                <a:spcPts val="1199"/>
-              </a:spcAft>
-              <a:buClr>
-                <a:srgbClr val="0b1b33"/>
-              </a:buClr>
-              <a:buFont typeface="OpenSymbol"/>
-              <a:buChar char="☐"/>
-            </a:pPr>
-            <a:r>
-              <a:rPr b="0" lang="en-US" sz="1600" spc="-1" strike="noStrike">
-                <a:solidFill>
-                  <a:schemeClr val="dk1"/>
-                </a:solidFill>
-                <a:latin typeface="Calibri"/>
-              </a:rPr>
-              <a:t>Os 56 cartões têm print em docs/evidencias/screenshots/</a:t>
-            </a:r>
-            <a:endParaRPr b="0" lang="pt-BR" sz="1600" spc="-1" strike="noStrike">
-              <a:solidFill>
-                <a:srgbClr val="000000"/>
-              </a:solidFill>
-              <a:latin typeface="Arial"/>
-            </a:endParaRPr>
-          </a:p>
-          <a:p>
-            <a:pPr marL="343080" indent="-343080" defTabSz="914400">
-              <a:lnSpc>
-                <a:spcPct val="100000"/>
-              </a:lnSpc>
-              <a:spcAft>
-                <a:spcPts val="1199"/>
-              </a:spcAft>
-              <a:buClr>
-                <a:srgbClr val="0b1b33"/>
-              </a:buClr>
-              <a:buFont typeface="OpenSymbol"/>
-              <a:buChar char="☐"/>
-            </a:pPr>
-            <a:r>
-              <a:rPr b="0" lang="en-US" sz="1600" spc="-1" strike="noStrike">
-                <a:solidFill>
-                  <a:schemeClr val="dk1"/>
-                </a:solidFill>
-                <a:latin typeface="Calibri"/>
-              </a:rPr>
-              <a:t>Observações registradas em docs/CENARIOS.xlsx (aba Exploratórias)</a:t>
-            </a:r>
-            <a:endParaRPr b="0" lang="pt-BR" sz="1600" spc="-1" strike="noStrike">
-              <a:solidFill>
-                <a:srgbClr val="000000"/>
-              </a:solidFill>
-              <a:latin typeface="Arial"/>
-            </a:endParaRPr>
-          </a:p>
-          <a:p>
-            <a:pPr marL="343080" indent="-343080" defTabSz="914400">
-              <a:lnSpc>
-                <a:spcPct val="100000"/>
-              </a:lnSpc>
-              <a:spcAft>
-                <a:spcPts val="1199"/>
-              </a:spcAft>
-              <a:buClr>
-                <a:srgbClr val="0b1b33"/>
-              </a:buClr>
-              <a:buFont typeface="OpenSymbol"/>
-              <a:buChar char="☐"/>
-            </a:pPr>
-            <a:r>
-              <a:rPr b="0" lang="en-US" sz="1600" spc="-1" strike="noStrike">
-                <a:solidFill>
-                  <a:schemeClr val="dk1"/>
-                </a:solidFill>
-                <a:latin typeface="Calibri"/>
-              </a:rPr>
-              <a:t>Cada divergência está em docs/BUGS.md com passos e print</a:t>
-            </a:r>
-            <a:endParaRPr b="0" lang="pt-BR" sz="1600" spc="-1" strike="noStrike">
-              <a:solidFill>
-                <a:srgbClr val="000000"/>
-              </a:solidFill>
-              <a:latin typeface="Arial"/>
-            </a:endParaRPr>
-          </a:p>
-          <a:p>
-            <a:pPr marL="343080" indent="-343080" defTabSz="914400">
-              <a:lnSpc>
-                <a:spcPct val="100000"/>
-              </a:lnSpc>
-              <a:spcAft>
-                <a:spcPts val="1199"/>
-              </a:spcAft>
-              <a:buClr>
-                <a:srgbClr val="0b1b33"/>
-              </a:buClr>
-              <a:buFont typeface="OpenSymbol"/>
-              <a:buChar char="☐"/>
-            </a:pPr>
-            <a:r>
-              <a:rPr b="0" lang="en-US" sz="1600" spc="-1" strike="noStrike">
-                <a:solidFill>
-                  <a:schemeClr val="dk1"/>
-                </a:solidFill>
-                <a:latin typeface="Calibri"/>
-              </a:rPr>
-              <a:t>Ambiguidades registradas em docs/AMBIGUIDADES.md</a:t>
-            </a:r>
-            <a:endParaRPr b="0" lang="pt-BR" sz="1600" spc="-1" strike="noStrike">
-              <a:solidFill>
-                <a:srgbClr val="000000"/>
-              </a:solidFill>
-              <a:latin typeface="Arial"/>
-            </a:endParaRPr>
-          </a:p>
-          <a:p>
-            <a:pPr marL="343080" indent="-343080" defTabSz="914400">
-              <a:lnSpc>
-                <a:spcPct val="100000"/>
-              </a:lnSpc>
-              <a:spcAft>
-                <a:spcPts val="1199"/>
-              </a:spcAft>
-              <a:buClr>
-                <a:srgbClr val="0b1b33"/>
-              </a:buClr>
-              <a:buFont typeface="OpenSymbol"/>
-              <a:buChar char="☐"/>
-            </a:pPr>
-            <a:r>
-              <a:rPr b="0" lang="en-US" sz="1600" spc="-1" strike="noStrike">
-                <a:solidFill>
-                  <a:schemeClr val="dk1"/>
-                </a:solidFill>
-                <a:latin typeface="Calibri"/>
-              </a:rPr>
-              <a:t>Repositório público no GitHub e formulário enviado (prazo: 5 dias corridos)</a:t>
-            </a:r>
-            <a:endParaRPr b="0" lang="pt-BR" sz="1600" spc="-1" strike="noStrike">
-              <a:solidFill>
-                <a:srgbClr val="000000"/>
-              </a:solidFill>
-              <a:latin typeface="Arial"/>
-            </a:endParaRPr>
-          </a:p>
-          <a:p>
-            <a:pPr marL="343080" indent="-343080" defTabSz="914400">
-              <a:lnSpc>
-                <a:spcPct val="100000"/>
-              </a:lnSpc>
-              <a:spcAft>
-                <a:spcPts val="1199"/>
-              </a:spcAft>
-              <a:buClr>
-                <a:srgbClr val="0b1b33"/>
-              </a:buClr>
-              <a:buFont typeface="OpenSymbol"/>
-              <a:buChar char="☐"/>
-            </a:pPr>
-            <a:r>
-              <a:rPr b="0" lang="en-US" sz="1600" spc="-1" strike="noStrike">
-                <a:solidFill>
-                  <a:schemeClr val="dk1"/>
-                </a:solidFill>
-                <a:latin typeface="Calibri"/>
-              </a:rPr>
-              <a:t>Campo "Uso de IA" do formulário preenchido</a:t>
-            </a:r>
-            <a:endParaRPr b="0" lang="pt-BR" sz="1600" spc="-1" strike="noStrike">
-              <a:solidFill>
-                <a:srgbClr val="000000"/>
-              </a:solidFill>
-              <a:latin typeface="Arial"/>
-            </a:endParaRPr>
-          </a:p>
-        </p:txBody>
-      </p:sp>
-      <p:graphicFrame>
-        <p:nvGraphicFramePr>
-          <p:cNvPr id="510" name="Tabela de contagem"/>
-          <p:cNvGraphicFramePr/>
-          <p:nvPr/>
-        </p:nvGraphicFramePr>
-        <p:xfrm>
-          <a:off x="7132320" y="1600200"/>
-          <a:ext cx="4571640" cy="2833200"/>
-        </p:xfrm>
-        <a:graphic>
-          <a:graphicData uri="http://schemas.openxmlformats.org/drawingml/2006/table">
-            <a:tbl>
-              <a:tblPr/>
-              <a:tblGrid>
-                <a:gridCol w="3200400"/>
-                <a:gridCol w="1371600"/>
-              </a:tblGrid>
-              <a:tr h="566640">
-                <a:tc>
-                  <a:txBody>
-                    <a:bodyPr lIns="109440" rIns="109440" anchor="ctr">
-                      <a:noAutofit/>
-                    </a:bodyPr>
-                    <a:p>
-                      <a:pPr defTabSz="914400">
-                        <a:lnSpc>
-                          <a:spcPct val="100000"/>
-                        </a:lnSpc>
-                        <a:tabLst>
-                          <a:tab algn="l" pos="0"/>
-                        </a:tabLst>
-                      </a:pPr>
-                      <a:r>
-                        <a:rPr b="1" lang="en-US" sz="1400" spc="-1" strike="noStrike">
-                          <a:solidFill>
-                            <a:schemeClr val="lt1"/>
-                          </a:solidFill>
-                          <a:latin typeface="Calibri"/>
-                        </a:rPr>
-                        <a:t>Contagem</a:t>
-                      </a:r>
-                      <a:endParaRPr b="0" lang="pt-BR" sz="1400" spc="-1" strike="noStrike">
-                        <a:solidFill>
-                          <a:srgbClr val="ffffff"/>
-                        </a:solidFill>
-                        <a:latin typeface="Arial"/>
-                      </a:endParaRPr>
-                    </a:p>
-                  </a:txBody>
-                  <a:tcPr anchor="ctr" marL="109440" marR="109440">
-                    <a:lnL w="6480">
-                      <a:solidFill>
-                        <a:srgbClr val="eef1f7"/>
-                      </a:solidFill>
-                      <a:prstDash val="solid"/>
-                    </a:lnL>
-                    <a:lnR w="6480">
-                      <a:solidFill>
-                        <a:srgbClr val="eef1f7"/>
-                      </a:solidFill>
-                      <a:prstDash val="solid"/>
-                    </a:lnR>
-                    <a:lnT w="6480">
-                      <a:solidFill>
-                        <a:srgbClr val="eef1f7"/>
-                      </a:solidFill>
-                      <a:prstDash val="solid"/>
-                    </a:lnT>
-                    <a:lnB w="6480">
-                      <a:solidFill>
-                        <a:srgbClr val="eef1f7"/>
-                      </a:solidFill>
-                      <a:prstDash val="solid"/>
-                    </a:lnB>
-                    <a:solidFill>
-                      <a:schemeClr val="dk2"/>
-                    </a:solidFill>
-                  </a:tcPr>
-                </a:tc>
-                <a:tc>
-                  <a:txBody>
-                    <a:bodyPr lIns="109440" rIns="109440" anchor="ctr">
-                      <a:noAutofit/>
-                    </a:bodyPr>
-                    <a:p>
-                      <a:pPr defTabSz="914400">
-                        <a:lnSpc>
-                          <a:spcPct val="100000"/>
-                        </a:lnSpc>
-                        <a:tabLst>
-                          <a:tab algn="l" pos="0"/>
-                        </a:tabLst>
-                      </a:pPr>
-                      <a:r>
-                        <a:rPr b="1" lang="en-US" sz="1400" spc="-1" strike="noStrike">
-                          <a:solidFill>
-                            <a:schemeClr val="lt1"/>
-                          </a:solidFill>
-                          <a:latin typeface="Calibri"/>
-                        </a:rPr>
-                        <a:t>Total</a:t>
-                      </a:r>
-                      <a:endParaRPr b="0" lang="pt-BR" sz="1400" spc="-1" strike="noStrike">
-                        <a:solidFill>
-                          <a:srgbClr val="ffffff"/>
-                        </a:solidFill>
-                        <a:latin typeface="Arial"/>
-                      </a:endParaRPr>
-                    </a:p>
-                  </a:txBody>
-                  <a:tcPr anchor="ctr" marL="109440" marR="109440">
-                    <a:lnL w="6480">
-                      <a:solidFill>
-                        <a:srgbClr val="eef1f7"/>
-                      </a:solidFill>
-                      <a:prstDash val="solid"/>
-                    </a:lnL>
-                    <a:lnR w="6480">
-                      <a:solidFill>
-                        <a:srgbClr val="eef1f7"/>
-                      </a:solidFill>
-                      <a:prstDash val="solid"/>
-                    </a:lnR>
-                    <a:lnT w="6480">
-                      <a:solidFill>
-                        <a:srgbClr val="eef1f7"/>
-                      </a:solidFill>
-                      <a:prstDash val="solid"/>
-                    </a:lnT>
-                    <a:lnB w="6480">
-                      <a:solidFill>
-                        <a:srgbClr val="eef1f7"/>
-                      </a:solidFill>
-                      <a:prstDash val="solid"/>
-                    </a:lnB>
-                    <a:solidFill>
-                      <a:schemeClr val="dk2"/>
-                    </a:solidFill>
-                  </a:tcPr>
-                </a:tc>
-              </a:tr>
-              <a:tr h="566640">
-                <a:tc>
-                  <a:txBody>
-                    <a:bodyPr lIns="109440" rIns="109440" anchor="ctr">
-                      <a:noAutofit/>
-                    </a:bodyPr>
-                    <a:p>
-                      <a:pPr defTabSz="914400">
-                        <a:lnSpc>
-                          <a:spcPct val="100000"/>
-                        </a:lnSpc>
-                        <a:tabLst>
-                          <a:tab algn="l" pos="0"/>
-                        </a:tabLst>
-                      </a:pPr>
-                      <a:r>
-                        <a:rPr b="1" lang="en-US" sz="1500" spc="-1" strike="noStrike">
-                          <a:solidFill>
-                            <a:schemeClr val="dk1"/>
-                          </a:solidFill>
-                          <a:latin typeface="Calibri"/>
-                        </a:rPr>
-                        <a:t>Evidências de UI (de 33)</a:t>
-                      </a:r>
-                      <a:endParaRPr b="0" lang="pt-BR" sz="1500" spc="-1" strike="noStrike">
-                        <a:solidFill>
-                          <a:srgbClr val="000000"/>
-                        </a:solidFill>
-                        <a:latin typeface="Arial"/>
-                      </a:endParaRPr>
-                    </a:p>
-                  </a:txBody>
-                  <a:tcPr anchor="ctr" marL="109440" marR="109440">
-                    <a:lnL w="6480">
-                      <a:solidFill>
-                        <a:srgbClr val="eef1f7"/>
-                      </a:solidFill>
-                      <a:prstDash val="solid"/>
-                    </a:lnL>
-                    <a:lnR w="6480">
-                      <a:solidFill>
-                        <a:srgbClr val="eef1f7"/>
-                      </a:solidFill>
-                      <a:prstDash val="solid"/>
-                    </a:lnR>
-                    <a:lnT w="6480">
-                      <a:solidFill>
-                        <a:srgbClr val="eef1f7"/>
-                      </a:solidFill>
-                      <a:prstDash val="solid"/>
-                    </a:lnT>
-                    <a:lnB w="6480">
-                      <a:solidFill>
-                        <a:srgbClr val="eef1f7"/>
-                      </a:solidFill>
-                      <a:prstDash val="solid"/>
-                    </a:lnB>
-                    <a:solidFill>
-                      <a:schemeClr val="lt1"/>
-                    </a:solidFill>
-                  </a:tcPr>
-                </a:tc>
-                <a:tc>
-                  <a:txBody>
-                    <a:bodyPr lIns="109440" rIns="109440" anchor="ctr">
-                      <a:noAutofit/>
-                    </a:bodyPr>
-                    <a:p>
-                      <a:endParaRPr b="0" lang="en-US" sz="1500" spc="-1" strike="noStrike">
-                        <a:solidFill>
-                          <a:schemeClr val="dk1"/>
-                        </a:solidFill>
-                        <a:latin typeface="Calibri"/>
-                      </a:endParaRPr>
-                    </a:p>
-                  </a:txBody>
-                  <a:tcPr anchor="ctr" marL="109440" marR="109440">
-                    <a:lnL w="6480">
-                      <a:solidFill>
-                        <a:srgbClr val="eef1f7"/>
-                      </a:solidFill>
-                      <a:prstDash val="solid"/>
-                    </a:lnL>
-                    <a:lnR w="6480">
-                      <a:solidFill>
-                        <a:srgbClr val="eef1f7"/>
-                      </a:solidFill>
-                      <a:prstDash val="solid"/>
-                    </a:lnR>
-                    <a:lnT w="6480">
-                      <a:solidFill>
-                        <a:srgbClr val="eef1f7"/>
-                      </a:solidFill>
-                      <a:prstDash val="solid"/>
-                    </a:lnT>
-                    <a:lnB w="6480">
-                      <a:solidFill>
-                        <a:srgbClr val="eef1f7"/>
-                      </a:solidFill>
-                      <a:prstDash val="solid"/>
-                    </a:lnB>
-                    <a:solidFill>
-                      <a:schemeClr val="lt1"/>
-                    </a:solidFill>
-                  </a:tcPr>
-                </a:tc>
-              </a:tr>
-              <a:tr h="566640">
-                <a:tc>
-                  <a:txBody>
-                    <a:bodyPr lIns="109440" rIns="109440" anchor="ctr">
-                      <a:noAutofit/>
-                    </a:bodyPr>
-                    <a:p>
-                      <a:pPr defTabSz="914400">
-                        <a:lnSpc>
-                          <a:spcPct val="100000"/>
-                        </a:lnSpc>
-                        <a:tabLst>
-                          <a:tab algn="l" pos="0"/>
-                        </a:tabLst>
-                      </a:pPr>
-                      <a:r>
-                        <a:rPr b="1" lang="en-US" sz="1500" spc="-1" strike="noStrike">
-                          <a:solidFill>
-                            <a:schemeClr val="dk1"/>
-                          </a:solidFill>
-                          <a:latin typeface="Calibri"/>
-                        </a:rPr>
-                        <a:t>Evidências de API (de 23)</a:t>
-                      </a:r>
-                      <a:endParaRPr b="0" lang="pt-BR" sz="1500" spc="-1" strike="noStrike">
-                        <a:solidFill>
-                          <a:srgbClr val="000000"/>
-                        </a:solidFill>
-                        <a:latin typeface="Arial"/>
-                      </a:endParaRPr>
-                    </a:p>
-                  </a:txBody>
-                  <a:tcPr anchor="ctr" marL="109440" marR="109440">
-                    <a:lnL w="6480">
-                      <a:solidFill>
-                        <a:srgbClr val="eef1f7"/>
-                      </a:solidFill>
-                      <a:prstDash val="solid"/>
-                    </a:lnL>
-                    <a:lnR w="6480">
-                      <a:solidFill>
-                        <a:srgbClr val="eef1f7"/>
-                      </a:solidFill>
-                      <a:prstDash val="solid"/>
-                    </a:lnR>
-                    <a:lnT w="6480">
-                      <a:solidFill>
-                        <a:srgbClr val="eef1f7"/>
-                      </a:solidFill>
-                      <a:prstDash val="solid"/>
-                    </a:lnT>
-                    <a:lnB w="6480">
-                      <a:solidFill>
-                        <a:srgbClr val="eef1f7"/>
-                      </a:solidFill>
-                      <a:prstDash val="solid"/>
-                    </a:lnB>
-                    <a:solidFill>
-                      <a:schemeClr val="lt2"/>
-                    </a:solidFill>
-                  </a:tcPr>
-                </a:tc>
-                <a:tc>
-                  <a:txBody>
-                    <a:bodyPr lIns="109440" rIns="109440" anchor="ctr">
-                      <a:noAutofit/>
-                    </a:bodyPr>
-                    <a:p>
-                      <a:endParaRPr b="0" lang="en-US" sz="1500" spc="-1" strike="noStrike">
-                        <a:solidFill>
-                          <a:schemeClr val="dk1"/>
-                        </a:solidFill>
-                        <a:latin typeface="Calibri"/>
-                      </a:endParaRPr>
-                    </a:p>
-                  </a:txBody>
-                  <a:tcPr anchor="ctr" marL="109440" marR="109440">
-                    <a:lnL w="6480">
-                      <a:solidFill>
-                        <a:srgbClr val="eef1f7"/>
-                      </a:solidFill>
-                      <a:prstDash val="solid"/>
-                    </a:lnL>
-                    <a:lnR w="6480">
-                      <a:solidFill>
-                        <a:srgbClr val="eef1f7"/>
-                      </a:solidFill>
-                      <a:prstDash val="solid"/>
-                    </a:lnR>
-                    <a:lnT w="6480">
-                      <a:solidFill>
-                        <a:srgbClr val="eef1f7"/>
-                      </a:solidFill>
-                      <a:prstDash val="solid"/>
-                    </a:lnT>
-                    <a:lnB w="6480">
-                      <a:solidFill>
-                        <a:srgbClr val="eef1f7"/>
-                      </a:solidFill>
-                      <a:prstDash val="solid"/>
-                    </a:lnB>
-                    <a:solidFill>
-                      <a:schemeClr val="lt2"/>
-                    </a:solidFill>
-                  </a:tcPr>
-                </a:tc>
-              </a:tr>
-              <a:tr h="566640">
-                <a:tc>
-                  <a:txBody>
-                    <a:bodyPr lIns="109440" rIns="109440" anchor="ctr">
-                      <a:noAutofit/>
-                    </a:bodyPr>
-                    <a:p>
-                      <a:pPr defTabSz="914400">
-                        <a:lnSpc>
-                          <a:spcPct val="100000"/>
-                        </a:lnSpc>
-                        <a:tabLst>
-                          <a:tab algn="l" pos="0"/>
-                        </a:tabLst>
-                      </a:pPr>
-                      <a:r>
-                        <a:rPr b="1" lang="en-US" sz="1500" spc="-1" strike="noStrike">
-                          <a:solidFill>
-                            <a:schemeClr val="dk1"/>
-                          </a:solidFill>
-                          <a:latin typeface="Calibri"/>
-                        </a:rPr>
-                        <a:t>Sem achados</a:t>
-                      </a:r>
-                      <a:endParaRPr b="0" lang="pt-BR" sz="1500" spc="-1" strike="noStrike">
-                        <a:solidFill>
-                          <a:srgbClr val="000000"/>
-                        </a:solidFill>
-                        <a:latin typeface="Arial"/>
-                      </a:endParaRPr>
-                    </a:p>
-                  </a:txBody>
-                  <a:tcPr anchor="ctr" marL="109440" marR="109440">
-                    <a:lnL w="6480">
-                      <a:solidFill>
-                        <a:srgbClr val="eef1f7"/>
-                      </a:solidFill>
-                      <a:prstDash val="solid"/>
-                    </a:lnL>
-                    <a:lnR w="6480">
-                      <a:solidFill>
-                        <a:srgbClr val="eef1f7"/>
-                      </a:solidFill>
-                      <a:prstDash val="solid"/>
-                    </a:lnR>
-                    <a:lnT w="6480">
-                      <a:solidFill>
-                        <a:srgbClr val="eef1f7"/>
-                      </a:solidFill>
-                      <a:prstDash val="solid"/>
-                    </a:lnT>
-                    <a:lnB w="6480">
-                      <a:solidFill>
-                        <a:srgbClr val="eef1f7"/>
-                      </a:solidFill>
-                      <a:prstDash val="solid"/>
-                    </a:lnB>
-                    <a:solidFill>
-                      <a:schemeClr val="lt1"/>
-                    </a:solidFill>
-                  </a:tcPr>
-                </a:tc>
-                <a:tc>
-                  <a:txBody>
-                    <a:bodyPr lIns="109440" rIns="109440" anchor="ctr">
-                      <a:noAutofit/>
-                    </a:bodyPr>
-                    <a:p>
-                      <a:endParaRPr b="0" lang="en-US" sz="1500" spc="-1" strike="noStrike">
-                        <a:solidFill>
-                          <a:schemeClr val="dk1"/>
-                        </a:solidFill>
-                        <a:latin typeface="Calibri"/>
-                      </a:endParaRPr>
-                    </a:p>
-                  </a:txBody>
-                  <a:tcPr anchor="ctr" marL="109440" marR="109440">
-                    <a:lnL w="6480">
-                      <a:solidFill>
-                        <a:srgbClr val="eef1f7"/>
-                      </a:solidFill>
-                      <a:prstDash val="solid"/>
-                    </a:lnL>
-                    <a:lnR w="6480">
-                      <a:solidFill>
-                        <a:srgbClr val="eef1f7"/>
-                      </a:solidFill>
-                      <a:prstDash val="solid"/>
-                    </a:lnR>
-                    <a:lnT w="6480">
-                      <a:solidFill>
-                        <a:srgbClr val="eef1f7"/>
-                      </a:solidFill>
-                      <a:prstDash val="solid"/>
-                    </a:lnT>
-                    <a:lnB w="6480">
-                      <a:solidFill>
-                        <a:srgbClr val="eef1f7"/>
-                      </a:solidFill>
-                      <a:prstDash val="solid"/>
-                    </a:lnB>
-                    <a:solidFill>
-                      <a:schemeClr val="lt1"/>
-                    </a:solidFill>
-                  </a:tcPr>
-                </a:tc>
-              </a:tr>
-              <a:tr h="566640">
-                <a:tc>
-                  <a:txBody>
-                    <a:bodyPr lIns="109440" rIns="109440" anchor="ctr">
-                      <a:noAutofit/>
-                    </a:bodyPr>
-                    <a:p>
-                      <a:pPr defTabSz="914400">
-                        <a:lnSpc>
-                          <a:spcPct val="100000"/>
-                        </a:lnSpc>
-                        <a:tabLst>
-                          <a:tab algn="l" pos="0"/>
-                        </a:tabLst>
-                      </a:pPr>
-                      <a:r>
-                        <a:rPr b="1" lang="en-US" sz="1500" spc="-1" strike="noStrike">
-                          <a:solidFill>
-                            <a:schemeClr val="dk1"/>
-                          </a:solidFill>
-                          <a:latin typeface="Calibri"/>
-                        </a:rPr>
-                        <a:t>Bugs registrados</a:t>
-                      </a:r>
-                      <a:endParaRPr b="0" lang="pt-BR" sz="1500" spc="-1" strike="noStrike">
-                        <a:solidFill>
-                          <a:srgbClr val="000000"/>
-                        </a:solidFill>
-                        <a:latin typeface="Arial"/>
-                      </a:endParaRPr>
-                    </a:p>
-                  </a:txBody>
-                  <a:tcPr anchor="ctr" marL="109440" marR="109440">
-                    <a:lnL w="6480">
-                      <a:solidFill>
-                        <a:srgbClr val="eef1f7"/>
-                      </a:solidFill>
-                      <a:prstDash val="solid"/>
-                    </a:lnL>
-                    <a:lnR w="6480">
-                      <a:solidFill>
-                        <a:srgbClr val="eef1f7"/>
-                      </a:solidFill>
-                      <a:prstDash val="solid"/>
-                    </a:lnR>
-                    <a:lnT w="6480">
-                      <a:solidFill>
-                        <a:srgbClr val="eef1f7"/>
-                      </a:solidFill>
-                      <a:prstDash val="solid"/>
-                    </a:lnT>
-                    <a:lnB w="6480">
-                      <a:solidFill>
-                        <a:srgbClr val="eef1f7"/>
-                      </a:solidFill>
-                      <a:prstDash val="solid"/>
-                    </a:lnB>
-                    <a:solidFill>
-                      <a:schemeClr val="lt2"/>
-                    </a:solidFill>
-                  </a:tcPr>
-                </a:tc>
-                <a:tc>
-                  <a:txBody>
-                    <a:bodyPr lIns="109440" rIns="109440" anchor="ctr">
-                      <a:noAutofit/>
-                    </a:bodyPr>
-                    <a:p>
-                      <a:endParaRPr b="0" lang="en-US" sz="1500" spc="-1" strike="noStrike">
-                        <a:solidFill>
-                          <a:schemeClr val="dk1"/>
-                        </a:solidFill>
-                        <a:latin typeface="Calibri"/>
-                      </a:endParaRPr>
-                    </a:p>
-                  </a:txBody>
-                  <a:tcPr anchor="ctr" marL="109440" marR="109440">
-                    <a:lnL w="6480">
-                      <a:solidFill>
-                        <a:srgbClr val="eef1f7"/>
-                      </a:solidFill>
-                      <a:prstDash val="solid"/>
-                    </a:lnL>
-                    <a:lnR w="6480">
-                      <a:solidFill>
-                        <a:srgbClr val="eef1f7"/>
-                      </a:solidFill>
-                      <a:prstDash val="solid"/>
-                    </a:lnR>
-                    <a:lnT w="6480">
-                      <a:solidFill>
-                        <a:srgbClr val="eef1f7"/>
-                      </a:solidFill>
-                      <a:prstDash val="solid"/>
-                    </a:lnT>
-                    <a:lnB w="6480">
-                      <a:solidFill>
-                        <a:srgbClr val="eef1f7"/>
-                      </a:solidFill>
-                      <a:prstDash val="solid"/>
-                    </a:lnB>
-                    <a:solidFill>
-                      <a:schemeClr val="lt2"/>
-                    </a:solidFill>
-                  </a:tcPr>
-                </a:tc>
-              </a:tr>
-            </a:tbl>
-          </a:graphicData>
-        </a:graphic>
-      </p:graphicFrame>
-      <p:sp>
-        <p:nvSpPr>
-          <p:cNvPr id="511" name="PlaceHolder 2"/>
-          <p:cNvSpPr>
-            <a:spLocks noGrp="1"/>
-          </p:cNvSpPr>
-          <p:nvPr>
-            <p:ph type="sldNum" idx="58"/>
-          </p:nvPr>
-        </p:nvSpPr>
-        <p:spPr>
-          <a:xfrm>
-            <a:off x="11137320" y="6446520"/>
-            <a:ext cx="593280" cy="273240"/>
-          </a:xfrm>
-          <a:prstGeom prst="rect">
-            <a:avLst/>
-          </a:prstGeom>
-          <a:noFill/>
-          <a:ln w="0">
-            <a:noFill/>
-          </a:ln>
-        </p:spPr>
-        <p:txBody>
-          <a:bodyPr lIns="90000" rIns="90000" tIns="45000" bIns="45000" anchor="t">
-            <a:noAutofit/>
-          </a:bodyPr>
-          <a:lstStyle>
-            <a:lvl1pPr indent="0" algn="r" defTabSz="914400">
-              <a:lnSpc>
-                <a:spcPct val="100000"/>
-              </a:lnSpc>
-              <a:buNone/>
-              <a:tabLst>
-                <a:tab algn="l" pos="0"/>
-              </a:tabLst>
-              <a:defRPr b="0" lang="en-US" sz="1000" spc="-1" strike="noStrike">
-                <a:solidFill>
-                  <a:schemeClr val="accent6"/>
-                </a:solidFill>
-                <a:latin typeface="Calibri"/>
-              </a:defRPr>
-            </a:lvl1pPr>
-          </a:lstStyle>
-          <a:p>
-            <a:pPr indent="0" algn="r" defTabSz="914400">
-              <a:lnSpc>
-                <a:spcPct val="100000"/>
-              </a:lnSpc>
-              <a:buNone/>
-              <a:tabLst>
-                <a:tab algn="l" pos="0"/>
-              </a:tabLst>
-            </a:pPr>
-            <a:fld id="{2318C657-F022-416E-A9B3-78604A0FF56E}" type="slidenum">
-              <a:rPr b="0" lang="en-US" sz="1000" spc="-1" strike="noStrike">
-                <a:solidFill>
-                  <a:schemeClr val="accent6"/>
-                </a:solidFill>
-                <a:latin typeface="Calibri"/>
-              </a:rPr>
-              <a:t>&lt;número&gt;</a:t>
-            </a:fld>
-            <a:endParaRPr b="0" lang="pt-BR" sz="1000" spc="-1" strike="noStrike">
-              <a:solidFill>
-                <a:srgbClr val="000000"/>
-              </a:solidFill>
-              <a:latin typeface="Times New Roman"/>
-            </a:endParaRPr>
-          </a:p>
-        </p:txBody>
-      </p:sp>
     </p:spTree>
   </p:cSld>
   <mc:AlternateContent>
@@ -43972,133 +42862,7 @@
                 </a:solidFill>
                 <a:latin typeface="Calibri"/>
               </a:rPr>
-              <a:t>Cu</a:t>
-            </a:r>
-            <a:r>
-              <a:rPr b="1" lang="en-US" sz="3000" spc="-1" strike="noStrike">
-                <a:solidFill>
-                  <a:schemeClr val="dk2"/>
-                </a:solidFill>
-                <a:latin typeface="Calibri"/>
-              </a:rPr>
-              <a:t>po</a:t>
-            </a:r>
-            <a:r>
-              <a:rPr b="1" lang="en-US" sz="3000" spc="-1" strike="noStrike">
-                <a:solidFill>
-                  <a:schemeClr val="dk2"/>
-                </a:solidFill>
-                <a:latin typeface="Calibri"/>
-              </a:rPr>
-              <a:t>m </a:t>
-            </a:r>
-            <a:r>
-              <a:rPr b="1" lang="en-US" sz="3000" spc="-1" strike="noStrike">
-                <a:solidFill>
-                  <a:schemeClr val="dk2"/>
-                </a:solidFill>
-                <a:latin typeface="Calibri"/>
-              </a:rPr>
-              <a:t>co</a:t>
-            </a:r>
-            <a:r>
-              <a:rPr b="1" lang="en-US" sz="3000" spc="-1" strike="noStrike">
-                <a:solidFill>
-                  <a:schemeClr val="dk2"/>
-                </a:solidFill>
-                <a:latin typeface="Calibri"/>
-              </a:rPr>
-              <a:t>m </a:t>
-            </a:r>
-            <a:r>
-              <a:rPr b="1" lang="en-US" sz="3000" spc="-1" strike="noStrike">
-                <a:solidFill>
-                  <a:schemeClr val="dk2"/>
-                </a:solidFill>
-                <a:latin typeface="Calibri"/>
-              </a:rPr>
-              <a:t>tip</a:t>
-            </a:r>
-            <a:r>
-              <a:rPr b="1" lang="en-US" sz="3000" spc="-1" strike="noStrike">
-                <a:solidFill>
-                  <a:schemeClr val="dk2"/>
-                </a:solidFill>
-                <a:latin typeface="Calibri"/>
-              </a:rPr>
-              <a:t>os </a:t>
-            </a:r>
-            <a:r>
-              <a:rPr b="1" lang="en-US" sz="3000" spc="-1" strike="noStrike">
-                <a:solidFill>
-                  <a:schemeClr val="dk2"/>
-                </a:solidFill>
-                <a:latin typeface="Calibri"/>
-              </a:rPr>
-              <a:t>inv</a:t>
-            </a:r>
-            <a:r>
-              <a:rPr b="1" lang="en-US" sz="3000" spc="-1" strike="noStrike">
-                <a:solidFill>
-                  <a:schemeClr val="dk2"/>
-                </a:solidFill>
-                <a:latin typeface="Calibri"/>
-              </a:rPr>
-              <a:t>áli</a:t>
-            </a:r>
-            <a:r>
-              <a:rPr b="1" lang="en-US" sz="3000" spc="-1" strike="noStrike">
-                <a:solidFill>
-                  <a:schemeClr val="dk2"/>
-                </a:solidFill>
-                <a:latin typeface="Calibri"/>
-              </a:rPr>
-              <a:t>do</a:t>
-            </a:r>
-            <a:r>
-              <a:rPr b="1" lang="en-US" sz="3000" spc="-1" strike="noStrike">
-                <a:solidFill>
-                  <a:schemeClr val="dk2"/>
-                </a:solidFill>
-                <a:latin typeface="Calibri"/>
-              </a:rPr>
-              <a:t>s </a:t>
-            </a:r>
-            <a:r>
-              <a:rPr b="1" lang="en-US" sz="3000" spc="-1" strike="noStrike">
-                <a:solidFill>
-                  <a:schemeClr val="dk2"/>
-                </a:solidFill>
-                <a:latin typeface="Calibri"/>
-              </a:rPr>
-              <a:t>no </a:t>
-            </a:r>
-            <a:r>
-              <a:rPr b="1" lang="en-US" sz="3000" spc="-1" strike="noStrike">
-                <a:solidFill>
-                  <a:schemeClr val="dk2"/>
-                </a:solidFill>
-                <a:latin typeface="Calibri"/>
-              </a:rPr>
-              <a:t>cál</a:t>
-            </a:r>
-            <a:r>
-              <a:rPr b="1" lang="en-US" sz="3000" spc="-1" strike="noStrike">
-                <a:solidFill>
-                  <a:schemeClr val="dk2"/>
-                </a:solidFill>
-                <a:latin typeface="Calibri"/>
-              </a:rPr>
-              <a:t>cul</a:t>
-            </a:r>
-            <a:r>
-              <a:rPr b="1" lang="en-US" sz="3000" spc="-1" strike="noStrike">
-                <a:solidFill>
-                  <a:schemeClr val="dk2"/>
-                </a:solidFill>
-                <a:latin typeface="Calibri"/>
-              </a:rPr>
-              <a:t>o</a:t>
+              <a:t>Cupom com tipos inválidos no cálculo</a:t>
             </a:r>
             <a:endParaRPr b="0" lang="pt-BR" sz="3000" spc="-1" strike="noStrike">
               <a:solidFill>
@@ -44163,7 +42927,7 @@
                 <a:tab algn="l" pos="0"/>
               </a:tabLst>
             </a:pPr>
-            <a:fld id="{B031FFFE-947D-4DC6-8667-8C39F7C3701B}" type="slidenum">
+            <a:fld id="{CB51CC56-1FB2-4275-BF25-5354A1D24138}" type="slidenum">
               <a:rPr b="0" lang="en-US" sz="1000" spc="-1" strike="noStrike">
                 <a:solidFill>
                   <a:schemeClr val="accent6"/>
@@ -44454,133 +43218,7 @@
                 </a:solidFill>
                 <a:latin typeface="Calibri"/>
               </a:rPr>
-              <a:t>Cu</a:t>
-            </a:r>
-            <a:r>
-              <a:rPr b="1" lang="en-US" sz="3000" spc="-1" strike="noStrike">
-                <a:solidFill>
-                  <a:schemeClr val="dk2"/>
-                </a:solidFill>
-                <a:latin typeface="Calibri"/>
-              </a:rPr>
-              <a:t>po</a:t>
-            </a:r>
-            <a:r>
-              <a:rPr b="1" lang="en-US" sz="3000" spc="-1" strike="noStrike">
-                <a:solidFill>
-                  <a:schemeClr val="dk2"/>
-                </a:solidFill>
-                <a:latin typeface="Calibri"/>
-              </a:rPr>
-              <a:t>m </a:t>
-            </a:r>
-            <a:r>
-              <a:rPr b="1" lang="en-US" sz="3000" spc="-1" strike="noStrike">
-                <a:solidFill>
-                  <a:schemeClr val="dk2"/>
-                </a:solidFill>
-                <a:latin typeface="Calibri"/>
-              </a:rPr>
-              <a:t>co</a:t>
-            </a:r>
-            <a:r>
-              <a:rPr b="1" lang="en-US" sz="3000" spc="-1" strike="noStrike">
-                <a:solidFill>
-                  <a:schemeClr val="dk2"/>
-                </a:solidFill>
-                <a:latin typeface="Calibri"/>
-              </a:rPr>
-              <a:t>m </a:t>
-            </a:r>
-            <a:r>
-              <a:rPr b="1" lang="en-US" sz="3000" spc="-1" strike="noStrike">
-                <a:solidFill>
-                  <a:schemeClr val="dk2"/>
-                </a:solidFill>
-                <a:latin typeface="Calibri"/>
-              </a:rPr>
-              <a:t>tip</a:t>
-            </a:r>
-            <a:r>
-              <a:rPr b="1" lang="en-US" sz="3000" spc="-1" strike="noStrike">
-                <a:solidFill>
-                  <a:schemeClr val="dk2"/>
-                </a:solidFill>
-                <a:latin typeface="Calibri"/>
-              </a:rPr>
-              <a:t>os </a:t>
-            </a:r>
-            <a:r>
-              <a:rPr b="1" lang="en-US" sz="3000" spc="-1" strike="noStrike">
-                <a:solidFill>
-                  <a:schemeClr val="dk2"/>
-                </a:solidFill>
-                <a:latin typeface="Calibri"/>
-              </a:rPr>
-              <a:t>inv</a:t>
-            </a:r>
-            <a:r>
-              <a:rPr b="1" lang="en-US" sz="3000" spc="-1" strike="noStrike">
-                <a:solidFill>
-                  <a:schemeClr val="dk2"/>
-                </a:solidFill>
-                <a:latin typeface="Calibri"/>
-              </a:rPr>
-              <a:t>áli</a:t>
-            </a:r>
-            <a:r>
-              <a:rPr b="1" lang="en-US" sz="3000" spc="-1" strike="noStrike">
-                <a:solidFill>
-                  <a:schemeClr val="dk2"/>
-                </a:solidFill>
-                <a:latin typeface="Calibri"/>
-              </a:rPr>
-              <a:t>do</a:t>
-            </a:r>
-            <a:r>
-              <a:rPr b="1" lang="en-US" sz="3000" spc="-1" strike="noStrike">
-                <a:solidFill>
-                  <a:schemeClr val="dk2"/>
-                </a:solidFill>
-                <a:latin typeface="Calibri"/>
-              </a:rPr>
-              <a:t>s </a:t>
-            </a:r>
-            <a:r>
-              <a:rPr b="1" lang="en-US" sz="3000" spc="-1" strike="noStrike">
-                <a:solidFill>
-                  <a:schemeClr val="dk2"/>
-                </a:solidFill>
-                <a:latin typeface="Calibri"/>
-              </a:rPr>
-              <a:t>no </a:t>
-            </a:r>
-            <a:r>
-              <a:rPr b="1" lang="en-US" sz="3000" spc="-1" strike="noStrike">
-                <a:solidFill>
-                  <a:schemeClr val="dk2"/>
-                </a:solidFill>
-                <a:latin typeface="Calibri"/>
-              </a:rPr>
-              <a:t>cál</a:t>
-            </a:r>
-            <a:r>
-              <a:rPr b="1" lang="en-US" sz="3000" spc="-1" strike="noStrike">
-                <a:solidFill>
-                  <a:schemeClr val="dk2"/>
-                </a:solidFill>
-                <a:latin typeface="Calibri"/>
-              </a:rPr>
-              <a:t>cul</a:t>
-            </a:r>
-            <a:r>
-              <a:rPr b="1" lang="en-US" sz="3000" spc="-1" strike="noStrike">
-                <a:solidFill>
-                  <a:schemeClr val="dk2"/>
-                </a:solidFill>
-                <a:latin typeface="Calibri"/>
-              </a:rPr>
-              <a:t>o</a:t>
+              <a:t>Cupom com tipos inválidos no cálculo</a:t>
             </a:r>
             <a:endParaRPr b="0" lang="pt-BR" sz="3000" spc="-1" strike="noStrike">
               <a:solidFill>
@@ -45171,7 +43809,7 @@
                 <a:tab algn="l" pos="0"/>
               </a:tabLst>
             </a:pPr>
-            <a:fld id="{E6A32223-070D-46B9-B9EE-8B6B72A3B68B}" type="slidenum">
+            <a:fld id="{DF31E675-6C22-486A-8873-1110339E6829}" type="slidenum">
               <a:rPr b="0" lang="en-US" sz="1000" spc="-1" strike="noStrike">
                 <a:solidFill>
                   <a:schemeClr val="accent6"/>
@@ -45439,16 +44077,7 @@
                 </a:solidFill>
                 <a:latin typeface="Calibri"/>
               </a:rPr>
-              <a:t>Cupom com tipos </a:t>
-            </a:r>
-            <a:r>
-              <a:rPr b="1" lang="en-US" sz="3000" spc="-1" strike="noStrike">
-                <a:solidFill>
-                  <a:schemeClr val="dk2"/>
-                </a:solidFill>
-                <a:latin typeface="Calibri"/>
-              </a:rPr>
-              <a:t>inválidos no cálculo</a:t>
+              <a:t>Cupom com tipos inválidos no cálculo</a:t>
             </a:r>
             <a:endParaRPr b="0" lang="pt-BR" sz="3000" spc="-1" strike="noStrike">
               <a:solidFill>
@@ -45513,7 +44142,7 @@
                 <a:tab algn="l" pos="0"/>
               </a:tabLst>
             </a:pPr>
-            <a:fld id="{C524C09D-6D14-4577-BC27-996437EEFA75}" type="slidenum">
+            <a:fld id="{58D4CDCF-FB00-40A2-918F-98CAF50B3BE7}" type="slidenum">
               <a:rPr b="0" lang="en-US" sz="1000" spc="-1" strike="noStrike">
                 <a:solidFill>
                   <a:schemeClr val="accent6"/>
@@ -45804,16 +44433,7 @@
                 </a:solidFill>
                 <a:latin typeface="Calibri"/>
               </a:rPr>
-              <a:t>Cupom com tipos </a:t>
-            </a:r>
-            <a:r>
-              <a:rPr b="1" lang="en-US" sz="3000" spc="-1" strike="noStrike">
-                <a:solidFill>
-                  <a:schemeClr val="dk2"/>
-                </a:solidFill>
-                <a:latin typeface="Calibri"/>
-              </a:rPr>
-              <a:t>inválidos no cálculo</a:t>
+              <a:t>Cupom com tipos inválidos no cálculo</a:t>
             </a:r>
             <a:endParaRPr b="0" lang="pt-BR" sz="3000" spc="-1" strike="noStrike">
               <a:solidFill>
@@ -46413,7 +45033,7 @@
                 <a:tab algn="l" pos="0"/>
               </a:tabLst>
             </a:pPr>
-            <a:fld id="{070E9BF3-ED8C-406E-BA9C-B5AD8204DE23}" type="slidenum">
+            <a:fld id="{3562B250-D7C0-4F1E-9C3F-5DEAE5587DCD}" type="slidenum">
               <a:rPr b="0" lang="en-US" sz="1000" spc="-1" strike="noStrike">
                 <a:solidFill>
                   <a:schemeClr val="accent6"/>
